--- a/Unhumble.pptx
+++ b/Unhumble.pptx
@@ -7,11 +7,12 @@
   <p:sldIdLst>
     <p:sldId id="256" r:id="rId2"/>
     <p:sldId id="257" r:id="rId3"/>
+    <p:sldId id="258" r:id="rId4"/>
   </p:sldIdLst>
   <p:sldSz cx="12192000" cy="6858000"/>
   <p:notesSz cx="6858000" cy="9144000"/>
   <p:custDataLst>
-    <p:tags r:id="rId4"/>
+    <p:tags r:id="rId5"/>
   </p:custDataLst>
   <p:defaultTextStyle>
     <a:defPPr>
@@ -108,6 +109,11 @@
       </a:defRPr>
     </a:lvl9pPr>
   </p:defaultTextStyle>
+  <p:extLst>
+    <p:ext uri="{EFAFB233-063F-42B5-8137-9DF3F51BA10A}">
+      <p15:sldGuideLst xmlns:p15="http://schemas.microsoft.com/office/powerpoint/2012/main"/>
+    </p:ext>
+  </p:extLst>
 </p:presentation>
 </file>
 
@@ -242,7 +248,7 @@
           <a:p>
             <a:fld id="{C764DE79-268F-4C1A-8933-263129D2AF90}" type="datetimeFigureOut">
               <a:rPr lang="en-US" dirty="0"/>
-              <a:t>4/7/24</a:t>
+              <a:t>4/8/24</a:t>
             </a:fld>
             <a:endParaRPr lang="en-US" dirty="0"/>
           </a:p>
@@ -407,7 +413,7 @@
           <a:p>
             <a:fld id="{C764DE79-268F-4C1A-8933-263129D2AF90}" type="datetimeFigureOut">
               <a:rPr lang="en-US" dirty="0"/>
-              <a:t>4/7/24</a:t>
+              <a:t>4/8/24</a:t>
             </a:fld>
             <a:endParaRPr lang="en-US" dirty="0"/>
           </a:p>
@@ -582,7 +588,7 @@
           <a:p>
             <a:fld id="{C764DE79-268F-4C1A-8933-263129D2AF90}" type="datetimeFigureOut">
               <a:rPr lang="en-US" dirty="0"/>
-              <a:t>4/7/24</a:t>
+              <a:t>4/8/24</a:t>
             </a:fld>
             <a:endParaRPr lang="en-US" dirty="0"/>
           </a:p>
@@ -747,7 +753,7 @@
           <a:p>
             <a:fld id="{C764DE79-268F-4C1A-8933-263129D2AF90}" type="datetimeFigureOut">
               <a:rPr lang="en-US" dirty="0"/>
-              <a:t>4/7/24</a:t>
+              <a:t>4/8/24</a:t>
             </a:fld>
             <a:endParaRPr lang="en-US" dirty="0"/>
           </a:p>
@@ -988,7 +994,7 @@
           <a:p>
             <a:fld id="{C764DE79-268F-4C1A-8933-263129D2AF90}" type="datetimeFigureOut">
               <a:rPr lang="en-US" dirty="0"/>
-              <a:t>4/7/24</a:t>
+              <a:t>4/8/24</a:t>
             </a:fld>
             <a:endParaRPr lang="en-US" dirty="0"/>
           </a:p>
@@ -1215,7 +1221,7 @@
           <a:p>
             <a:fld id="{C764DE79-268F-4C1A-8933-263129D2AF90}" type="datetimeFigureOut">
               <a:rPr lang="en-US" dirty="0"/>
-              <a:t>4/7/24</a:t>
+              <a:t>4/8/24</a:t>
             </a:fld>
             <a:endParaRPr lang="en-US" dirty="0"/>
           </a:p>
@@ -1577,7 +1583,7 @@
           <a:p>
             <a:fld id="{C764DE79-268F-4C1A-8933-263129D2AF90}" type="datetimeFigureOut">
               <a:rPr lang="en-US" dirty="0"/>
-              <a:t>4/7/24</a:t>
+              <a:t>4/8/24</a:t>
             </a:fld>
             <a:endParaRPr lang="en-US" dirty="0"/>
           </a:p>
@@ -1690,7 +1696,7 @@
           <a:p>
             <a:fld id="{C764DE79-268F-4C1A-8933-263129D2AF90}" type="datetimeFigureOut">
               <a:rPr lang="en-US" dirty="0"/>
-              <a:t>4/7/24</a:t>
+              <a:t>4/8/24</a:t>
             </a:fld>
             <a:endParaRPr lang="en-US" dirty="0"/>
           </a:p>
@@ -1780,7 +1786,7 @@
           <a:p>
             <a:fld id="{C764DE79-268F-4C1A-8933-263129D2AF90}" type="datetimeFigureOut">
               <a:rPr lang="en-US" dirty="0"/>
-              <a:t>4/7/24</a:t>
+              <a:t>4/8/24</a:t>
             </a:fld>
             <a:endParaRPr lang="en-US" dirty="0"/>
           </a:p>
@@ -2052,7 +2058,7 @@
           <a:p>
             <a:fld id="{C764DE79-268F-4C1A-8933-263129D2AF90}" type="datetimeFigureOut">
               <a:rPr lang="en-US" dirty="0"/>
-              <a:t>4/7/24</a:t>
+              <a:t>4/8/24</a:t>
             </a:fld>
             <a:endParaRPr lang="en-US" dirty="0"/>
           </a:p>
@@ -2304,7 +2310,7 @@
           <a:p>
             <a:fld id="{C764DE79-268F-4C1A-8933-263129D2AF90}" type="datetimeFigureOut">
               <a:rPr lang="en-US" dirty="0"/>
-              <a:t>4/7/24</a:t>
+              <a:t>4/8/24</a:t>
             </a:fld>
             <a:endParaRPr lang="en-US" dirty="0"/>
           </a:p>
@@ -2578,7 +2584,7 @@
           <a:p>
             <a:fld id="{C764DE79-268F-4C1A-8933-263129D2AF90}" type="datetimeFigureOut">
               <a:rPr lang="en-US" dirty="0"/>
-              <a:t>4/7/24</a:t>
+              <a:t>4/8/24</a:t>
             </a:fld>
             <a:endParaRPr lang="en-US" dirty="0"/>
           </a:p>
@@ -2996,7 +3002,7 @@
             </p:custDataLst>
             <p:extLst>
               <p:ext uri="{D42A27DB-BD31-4B8C-83A1-F6EECF244321}">
-                <p14:modId xmlns:p14="http://schemas.microsoft.com/office/powerpoint/2010/main" val="1722349369"/>
+                <p14:modId xmlns:p14="http://schemas.microsoft.com/office/powerpoint/2010/main" val="2047471174"/>
               </p:ext>
             </p:extLst>
           </p:nvPr>
@@ -3044,2745 +3050,2817 @@
           </a:graphicData>
         </a:graphic>
       </p:graphicFrame>
-      <p:pic>
-        <p:nvPicPr>
-          <p:cNvPr id="5" name="Picture 4">
+      <p:grpSp>
+        <p:nvGrpSpPr>
+          <p:cNvPr id="15" name="Group 14">
             <a:extLst>
               <a:ext uri="{FF2B5EF4-FFF2-40B4-BE49-F238E27FC236}">
-                <a16:creationId xmlns:a16="http://schemas.microsoft.com/office/drawing/2014/main" id="{E0A31FBB-E485-1B77-1197-CBEE92CFD0E4}"/>
+                <a16:creationId xmlns:a16="http://schemas.microsoft.com/office/drawing/2014/main" id="{572D35C5-98CB-EF2B-D33C-800D08A2BD24}"/>
               </a:ext>
             </a:extLst>
           </p:cNvPr>
-          <p:cNvPicPr>
-            <a:picLocks noChangeAspect="1"/>
-          </p:cNvPicPr>
+          <p:cNvGrpSpPr/>
           <p:nvPr/>
-        </p:nvPicPr>
-        <p:blipFill rotWithShape="1">
-          <a:blip r:embed="rId5"/>
-          <a:srcRect l="4235" t="1226" r="4644" b="1302"/>
-          <a:stretch/>
-        </p:blipFill>
-        <p:spPr>
+        </p:nvGrpSpPr>
+        <p:grpSpPr>
           <a:xfrm>
-            <a:off x="3731172" y="84083"/>
-            <a:ext cx="4708635" cy="6684580"/>
+            <a:off x="735725" y="25880"/>
+            <a:ext cx="10797510" cy="6742783"/>
+            <a:chOff x="735725" y="25880"/>
+            <a:chExt cx="10797510" cy="6742783"/>
           </a:xfrm>
-          <a:prstGeom prst="rect">
-            <a:avLst/>
-          </a:prstGeom>
-        </p:spPr>
-      </p:pic>
-      <p:sp>
-        <p:nvSpPr>
-          <p:cNvPr id="6" name="Freeform 72">
+        </p:grpSpPr>
+        <p:sp>
+          <p:nvSpPr>
+            <p:cNvPr id="3" name="Rectangle 2">
+              <a:extLst>
+                <a:ext uri="{FF2B5EF4-FFF2-40B4-BE49-F238E27FC236}">
+                  <a16:creationId xmlns:a16="http://schemas.microsoft.com/office/drawing/2014/main" id="{F7DB2351-9DF7-3559-7249-55EA67579545}"/>
+                </a:ext>
+              </a:extLst>
+            </p:cNvPr>
+            <p:cNvSpPr/>
+            <p:nvPr/>
+          </p:nvSpPr>
+          <p:spPr>
+            <a:xfrm>
+              <a:off x="744782" y="25880"/>
+              <a:ext cx="10788453" cy="6742783"/>
+            </a:xfrm>
+            <a:prstGeom prst="rect">
+              <a:avLst/>
+            </a:prstGeom>
+            <a:solidFill>
+              <a:srgbClr val="FFFFFF"/>
+            </a:solidFill>
+            <a:ln w="19050" cap="flat" cmpd="sng" algn="ctr">
+              <a:noFill/>
+              <a:prstDash val="solid"/>
+              <a:miter lim="800000"/>
+              <a:headEnd type="none" w="med" len="med"/>
+              <a:tailEnd type="none" w="med" len="med"/>
+            </a:ln>
+            <a:effectLst/>
             <a:extLst>
-              <a:ext uri="{FF2B5EF4-FFF2-40B4-BE49-F238E27FC236}">
-                <a16:creationId xmlns:a16="http://schemas.microsoft.com/office/drawing/2014/main" id="{61EF16AA-186D-DA1C-A8A7-2C5918BF5FF6}"/>
+              <a:ext uri="{91240B29-F687-4F45-9708-019B960494DF}">
+                <a14:hiddenLine xmlns:a14="http://schemas.microsoft.com/office/drawing/2010/main" w="19050" cap="flat" cmpd="sng" algn="ctr">
+                  <a:solidFill>
+                    <a:srgbClr val="FFFFFF"/>
+                  </a:solidFill>
+                  <a:prstDash val="solid"/>
+                  <a:miter lim="800000"/>
+                  <a:headEnd type="none" w="med" len="med"/>
+                  <a:tailEnd type="none" w="med" len="med"/>
+                </a14:hiddenLine>
               </a:ext>
             </a:extLst>
-          </p:cNvPr>
-          <p:cNvSpPr>
-            <a:spLocks/>
-          </p:cNvSpPr>
-          <p:nvPr/>
-        </p:nvSpPr>
-        <p:spPr bwMode="auto">
-          <a:xfrm rot="14660993">
-            <a:off x="2503524" y="199245"/>
-            <a:ext cx="414442" cy="2376312"/>
-          </a:xfrm>
-          <a:custGeom>
-            <a:avLst/>
-            <a:gdLst/>
-            <a:ahLst/>
-            <a:cxnLst>
-              <a:cxn ang="0">
-                <a:pos x="158" y="574"/>
-              </a:cxn>
-              <a:cxn ang="0">
-                <a:pos x="156" y="576"/>
-              </a:cxn>
-              <a:cxn ang="0">
-                <a:pos x="152" y="578"/>
-              </a:cxn>
-              <a:cxn ang="0">
-                <a:pos x="120" y="594"/>
-              </a:cxn>
-              <a:cxn ang="0">
-                <a:pos x="72" y="624"/>
-              </a:cxn>
-              <a:cxn ang="0">
-                <a:pos x="56" y="632"/>
-              </a:cxn>
-              <a:cxn ang="0">
-                <a:pos x="30" y="650"/>
-              </a:cxn>
-              <a:cxn ang="0">
-                <a:pos x="58" y="608"/>
-              </a:cxn>
-              <a:cxn ang="0">
-                <a:pos x="112" y="502"/>
-              </a:cxn>
-              <a:cxn ang="0">
-                <a:pos x="152" y="382"/>
-              </a:cxn>
-              <a:cxn ang="0">
-                <a:pos x="162" y="266"/>
-              </a:cxn>
-              <a:cxn ang="0">
-                <a:pos x="156" y="204"/>
-              </a:cxn>
-              <a:cxn ang="0">
-                <a:pos x="150" y="178"/>
-              </a:cxn>
-              <a:cxn ang="0">
-                <a:pos x="118" y="90"/>
-              </a:cxn>
-              <a:cxn ang="0">
-                <a:pos x="74" y="22"/>
-              </a:cxn>
-              <a:cxn ang="0">
-                <a:pos x="54" y="0"/>
-              </a:cxn>
-              <a:cxn ang="0">
-                <a:pos x="48" y="10"/>
-              </a:cxn>
-              <a:cxn ang="0">
-                <a:pos x="58" y="28"/>
-              </a:cxn>
-              <a:cxn ang="0">
-                <a:pos x="82" y="70"/>
-              </a:cxn>
-              <a:cxn ang="0">
-                <a:pos x="110" y="124"/>
-              </a:cxn>
-              <a:cxn ang="0">
-                <a:pos x="134" y="196"/>
-              </a:cxn>
-              <a:cxn ang="0">
-                <a:pos x="144" y="284"/>
-              </a:cxn>
-              <a:cxn ang="0">
-                <a:pos x="140" y="334"/>
-              </a:cxn>
-              <a:cxn ang="0">
-                <a:pos x="138" y="354"/>
-              </a:cxn>
-              <a:cxn ang="0">
-                <a:pos x="120" y="430"/>
-              </a:cxn>
-              <a:cxn ang="0">
-                <a:pos x="108" y="462"/>
-              </a:cxn>
-              <a:cxn ang="0">
-                <a:pos x="78" y="536"/>
-              </a:cxn>
-              <a:cxn ang="0">
-                <a:pos x="24" y="634"/>
-              </a:cxn>
-              <a:cxn ang="0">
-                <a:pos x="24" y="634"/>
-              </a:cxn>
-              <a:cxn ang="0">
-                <a:pos x="20" y="602"/>
-              </a:cxn>
-              <a:cxn ang="0">
-                <a:pos x="20" y="590"/>
-              </a:cxn>
-              <a:cxn ang="0">
-                <a:pos x="22" y="570"/>
-              </a:cxn>
-              <a:cxn ang="0">
-                <a:pos x="26" y="562"/>
-              </a:cxn>
-              <a:cxn ang="0">
-                <a:pos x="16" y="562"/>
-              </a:cxn>
-              <a:cxn ang="0">
-                <a:pos x="8" y="564"/>
-              </a:cxn>
-              <a:cxn ang="0">
-                <a:pos x="0" y="576"/>
-              </a:cxn>
-              <a:cxn ang="0">
-                <a:pos x="2" y="596"/>
-              </a:cxn>
-              <a:cxn ang="0">
-                <a:pos x="2" y="612"/>
-              </a:cxn>
-              <a:cxn ang="0">
-                <a:pos x="4" y="630"/>
-              </a:cxn>
-              <a:cxn ang="0">
-                <a:pos x="8" y="642"/>
-              </a:cxn>
-              <a:cxn ang="0">
-                <a:pos x="8" y="652"/>
-              </a:cxn>
-              <a:cxn ang="0">
-                <a:pos x="16" y="662"/>
-              </a:cxn>
-              <a:cxn ang="0">
-                <a:pos x="20" y="664"/>
-              </a:cxn>
-              <a:cxn ang="0">
-                <a:pos x="26" y="668"/>
-              </a:cxn>
-              <a:cxn ang="0">
-                <a:pos x="46" y="662"/>
-              </a:cxn>
-              <a:cxn ang="0">
-                <a:pos x="72" y="646"/>
-              </a:cxn>
-              <a:cxn ang="0">
-                <a:pos x="94" y="632"/>
-              </a:cxn>
-              <a:cxn ang="0">
-                <a:pos x="118" y="616"/>
-              </a:cxn>
-              <a:cxn ang="0">
-                <a:pos x="130" y="610"/>
-              </a:cxn>
-              <a:cxn ang="0">
-                <a:pos x="138" y="604"/>
-              </a:cxn>
-              <a:cxn ang="0">
-                <a:pos x="162" y="582"/>
-              </a:cxn>
-              <a:cxn ang="0">
-                <a:pos x="160" y="578"/>
-              </a:cxn>
-            </a:cxnLst>
-            <a:rect l="0" t="0" r="r" b="b"/>
-            <a:pathLst>
-              <a:path w="162" h="668">
-                <a:moveTo>
-                  <a:pt x="160" y="578"/>
-                </a:moveTo>
-                <a:lnTo>
-                  <a:pt x="160" y="578"/>
-                </a:lnTo>
-                <a:lnTo>
-                  <a:pt x="158" y="574"/>
-                </a:lnTo>
-                <a:lnTo>
-                  <a:pt x="158" y="574"/>
-                </a:lnTo>
-                <a:lnTo>
-                  <a:pt x="156" y="576"/>
-                </a:lnTo>
-                <a:lnTo>
-                  <a:pt x="156" y="576"/>
-                </a:lnTo>
-                <a:lnTo>
-                  <a:pt x="156" y="576"/>
-                </a:lnTo>
-                <a:lnTo>
-                  <a:pt x="156" y="576"/>
-                </a:lnTo>
-                <a:lnTo>
-                  <a:pt x="156" y="576"/>
-                </a:lnTo>
-                <a:lnTo>
-                  <a:pt x="156" y="576"/>
-                </a:lnTo>
-                <a:lnTo>
-                  <a:pt x="154" y="578"/>
-                </a:lnTo>
-                <a:lnTo>
-                  <a:pt x="152" y="578"/>
-                </a:lnTo>
-                <a:lnTo>
-                  <a:pt x="152" y="578"/>
-                </a:lnTo>
-                <a:lnTo>
-                  <a:pt x="136" y="586"/>
-                </a:lnTo>
-                <a:lnTo>
-                  <a:pt x="120" y="594"/>
-                </a:lnTo>
-                <a:lnTo>
-                  <a:pt x="120" y="594"/>
-                </a:lnTo>
-                <a:lnTo>
-                  <a:pt x="102" y="604"/>
-                </a:lnTo>
-                <a:lnTo>
-                  <a:pt x="102" y="604"/>
-                </a:lnTo>
-                <a:lnTo>
-                  <a:pt x="72" y="624"/>
-                </a:lnTo>
-                <a:lnTo>
-                  <a:pt x="72" y="624"/>
-                </a:lnTo>
-                <a:lnTo>
-                  <a:pt x="66" y="626"/>
-                </a:lnTo>
-                <a:lnTo>
-                  <a:pt x="62" y="630"/>
-                </a:lnTo>
-                <a:lnTo>
-                  <a:pt x="62" y="630"/>
-                </a:lnTo>
-                <a:lnTo>
-                  <a:pt x="56" y="632"/>
-                </a:lnTo>
-                <a:lnTo>
-                  <a:pt x="52" y="636"/>
-                </a:lnTo>
-                <a:lnTo>
-                  <a:pt x="52" y="636"/>
-                </a:lnTo>
-                <a:lnTo>
-                  <a:pt x="42" y="642"/>
-                </a:lnTo>
-                <a:lnTo>
-                  <a:pt x="30" y="650"/>
-                </a:lnTo>
-                <a:lnTo>
-                  <a:pt x="30" y="650"/>
-                </a:lnTo>
-                <a:lnTo>
-                  <a:pt x="36" y="640"/>
-                </a:lnTo>
-                <a:lnTo>
-                  <a:pt x="36" y="640"/>
-                </a:lnTo>
-                <a:lnTo>
-                  <a:pt x="58" y="608"/>
-                </a:lnTo>
-                <a:lnTo>
-                  <a:pt x="78" y="574"/>
-                </a:lnTo>
-                <a:lnTo>
-                  <a:pt x="96" y="538"/>
-                </a:lnTo>
-                <a:lnTo>
-                  <a:pt x="112" y="502"/>
-                </a:lnTo>
-                <a:lnTo>
-                  <a:pt x="112" y="502"/>
-                </a:lnTo>
-                <a:lnTo>
-                  <a:pt x="130" y="460"/>
-                </a:lnTo>
-                <a:lnTo>
-                  <a:pt x="142" y="420"/>
-                </a:lnTo>
-                <a:lnTo>
-                  <a:pt x="142" y="420"/>
-                </a:lnTo>
-                <a:lnTo>
-                  <a:pt x="152" y="382"/>
-                </a:lnTo>
-                <a:lnTo>
-                  <a:pt x="158" y="344"/>
-                </a:lnTo>
-                <a:lnTo>
-                  <a:pt x="162" y="304"/>
-                </a:lnTo>
-                <a:lnTo>
-                  <a:pt x="162" y="266"/>
-                </a:lnTo>
-                <a:lnTo>
-                  <a:pt x="162" y="266"/>
-                </a:lnTo>
-                <a:lnTo>
-                  <a:pt x="160" y="242"/>
-                </a:lnTo>
-                <a:lnTo>
-                  <a:pt x="156" y="216"/>
-                </a:lnTo>
-                <a:lnTo>
-                  <a:pt x="156" y="216"/>
-                </a:lnTo>
-                <a:lnTo>
-                  <a:pt x="156" y="204"/>
-                </a:lnTo>
-                <a:lnTo>
-                  <a:pt x="154" y="190"/>
-                </a:lnTo>
-                <a:lnTo>
-                  <a:pt x="154" y="190"/>
-                </a:lnTo>
-                <a:lnTo>
-                  <a:pt x="150" y="178"/>
-                </a:lnTo>
-                <a:lnTo>
-                  <a:pt x="150" y="178"/>
-                </a:lnTo>
-                <a:lnTo>
-                  <a:pt x="146" y="164"/>
-                </a:lnTo>
-                <a:lnTo>
-                  <a:pt x="146" y="164"/>
-                </a:lnTo>
-                <a:lnTo>
-                  <a:pt x="134" y="128"/>
-                </a:lnTo>
-                <a:lnTo>
-                  <a:pt x="118" y="90"/>
-                </a:lnTo>
-                <a:lnTo>
-                  <a:pt x="118" y="90"/>
-                </a:lnTo>
-                <a:lnTo>
-                  <a:pt x="96" y="54"/>
-                </a:lnTo>
-                <a:lnTo>
-                  <a:pt x="74" y="22"/>
-                </a:lnTo>
-                <a:lnTo>
-                  <a:pt x="74" y="22"/>
-                </a:lnTo>
-                <a:lnTo>
-                  <a:pt x="68" y="12"/>
-                </a:lnTo>
-                <a:lnTo>
-                  <a:pt x="60" y="4"/>
-                </a:lnTo>
-                <a:lnTo>
-                  <a:pt x="60" y="4"/>
-                </a:lnTo>
-                <a:lnTo>
-                  <a:pt x="54" y="0"/>
-                </a:lnTo>
-                <a:lnTo>
-                  <a:pt x="52" y="2"/>
-                </a:lnTo>
-                <a:lnTo>
-                  <a:pt x="48" y="6"/>
-                </a:lnTo>
-                <a:lnTo>
-                  <a:pt x="48" y="6"/>
-                </a:lnTo>
-                <a:lnTo>
-                  <a:pt x="48" y="10"/>
-                </a:lnTo>
-                <a:lnTo>
-                  <a:pt x="50" y="14"/>
-                </a:lnTo>
-                <a:lnTo>
-                  <a:pt x="50" y="14"/>
-                </a:lnTo>
-                <a:lnTo>
-                  <a:pt x="54" y="22"/>
-                </a:lnTo>
-                <a:lnTo>
-                  <a:pt x="58" y="28"/>
-                </a:lnTo>
-                <a:lnTo>
-                  <a:pt x="58" y="28"/>
-                </a:lnTo>
-                <a:lnTo>
-                  <a:pt x="66" y="42"/>
-                </a:lnTo>
-                <a:lnTo>
-                  <a:pt x="66" y="42"/>
-                </a:lnTo>
-                <a:lnTo>
-                  <a:pt x="82" y="70"/>
-                </a:lnTo>
-                <a:lnTo>
-                  <a:pt x="100" y="98"/>
-                </a:lnTo>
-                <a:lnTo>
-                  <a:pt x="100" y="98"/>
-                </a:lnTo>
-                <a:lnTo>
-                  <a:pt x="106" y="110"/>
-                </a:lnTo>
-                <a:lnTo>
-                  <a:pt x="110" y="124"/>
-                </a:lnTo>
-                <a:lnTo>
-                  <a:pt x="110" y="124"/>
-                </a:lnTo>
-                <a:lnTo>
-                  <a:pt x="120" y="148"/>
-                </a:lnTo>
-                <a:lnTo>
-                  <a:pt x="128" y="172"/>
-                </a:lnTo>
-                <a:lnTo>
-                  <a:pt x="134" y="196"/>
-                </a:lnTo>
-                <a:lnTo>
-                  <a:pt x="138" y="220"/>
-                </a:lnTo>
-                <a:lnTo>
-                  <a:pt x="138" y="220"/>
-                </a:lnTo>
-                <a:lnTo>
-                  <a:pt x="142" y="260"/>
-                </a:lnTo>
-                <a:lnTo>
-                  <a:pt x="144" y="284"/>
-                </a:lnTo>
-                <a:lnTo>
-                  <a:pt x="142" y="306"/>
-                </a:lnTo>
-                <a:lnTo>
-                  <a:pt x="142" y="306"/>
-                </a:lnTo>
-                <a:lnTo>
-                  <a:pt x="140" y="326"/>
-                </a:lnTo>
-                <a:lnTo>
-                  <a:pt x="140" y="334"/>
-                </a:lnTo>
-                <a:lnTo>
-                  <a:pt x="140" y="334"/>
-                </a:lnTo>
-                <a:lnTo>
-                  <a:pt x="140" y="340"/>
-                </a:lnTo>
-                <a:lnTo>
-                  <a:pt x="138" y="354"/>
-                </a:lnTo>
-                <a:lnTo>
-                  <a:pt x="138" y="354"/>
-                </a:lnTo>
-                <a:lnTo>
-                  <a:pt x="132" y="380"/>
-                </a:lnTo>
-                <a:lnTo>
-                  <a:pt x="132" y="380"/>
-                </a:lnTo>
-                <a:lnTo>
-                  <a:pt x="120" y="430"/>
-                </a:lnTo>
-                <a:lnTo>
-                  <a:pt x="120" y="430"/>
-                </a:lnTo>
-                <a:lnTo>
-                  <a:pt x="114" y="446"/>
-                </a:lnTo>
-                <a:lnTo>
-                  <a:pt x="114" y="446"/>
-                </a:lnTo>
-                <a:lnTo>
-                  <a:pt x="108" y="462"/>
-                </a:lnTo>
-                <a:lnTo>
-                  <a:pt x="108" y="462"/>
-                </a:lnTo>
-                <a:lnTo>
-                  <a:pt x="96" y="494"/>
-                </a:lnTo>
-                <a:lnTo>
-                  <a:pt x="84" y="522"/>
-                </a:lnTo>
-                <a:lnTo>
-                  <a:pt x="84" y="522"/>
-                </a:lnTo>
-                <a:lnTo>
-                  <a:pt x="78" y="536"/>
-                </a:lnTo>
-                <a:lnTo>
-                  <a:pt x="78" y="536"/>
-                </a:lnTo>
-                <a:lnTo>
-                  <a:pt x="52" y="586"/>
-                </a:lnTo>
-                <a:lnTo>
-                  <a:pt x="24" y="634"/>
-                </a:lnTo>
-                <a:lnTo>
-                  <a:pt x="24" y="634"/>
-                </a:lnTo>
-                <a:lnTo>
-                  <a:pt x="24" y="636"/>
-                </a:lnTo>
-                <a:lnTo>
-                  <a:pt x="24" y="636"/>
-                </a:lnTo>
-                <a:lnTo>
-                  <a:pt x="24" y="634"/>
-                </a:lnTo>
-                <a:lnTo>
-                  <a:pt x="24" y="634"/>
-                </a:lnTo>
-                <a:lnTo>
-                  <a:pt x="24" y="622"/>
-                </a:lnTo>
-                <a:lnTo>
-                  <a:pt x="24" y="622"/>
-                </a:lnTo>
-                <a:lnTo>
-                  <a:pt x="20" y="602"/>
-                </a:lnTo>
-                <a:lnTo>
-                  <a:pt x="20" y="602"/>
-                </a:lnTo>
-                <a:lnTo>
-                  <a:pt x="20" y="598"/>
-                </a:lnTo>
-                <a:lnTo>
-                  <a:pt x="20" y="594"/>
-                </a:lnTo>
-                <a:lnTo>
-                  <a:pt x="20" y="594"/>
-                </a:lnTo>
-                <a:lnTo>
-                  <a:pt x="20" y="590"/>
-                </a:lnTo>
-                <a:lnTo>
-                  <a:pt x="20" y="588"/>
-                </a:lnTo>
-                <a:lnTo>
-                  <a:pt x="20" y="588"/>
-                </a:lnTo>
-                <a:lnTo>
-                  <a:pt x="20" y="576"/>
-                </a:lnTo>
-                <a:lnTo>
-                  <a:pt x="22" y="570"/>
-                </a:lnTo>
-                <a:lnTo>
-                  <a:pt x="24" y="566"/>
-                </a:lnTo>
-                <a:lnTo>
-                  <a:pt x="24" y="566"/>
-                </a:lnTo>
-                <a:lnTo>
-                  <a:pt x="26" y="564"/>
-                </a:lnTo>
-                <a:lnTo>
-                  <a:pt x="26" y="562"/>
-                </a:lnTo>
-                <a:lnTo>
-                  <a:pt x="26" y="562"/>
-                </a:lnTo>
-                <a:lnTo>
-                  <a:pt x="22" y="562"/>
-                </a:lnTo>
-                <a:lnTo>
-                  <a:pt x="16" y="562"/>
-                </a:lnTo>
-                <a:lnTo>
-                  <a:pt x="16" y="562"/>
-                </a:lnTo>
-                <a:lnTo>
-                  <a:pt x="12" y="562"/>
-                </a:lnTo>
-                <a:lnTo>
-                  <a:pt x="12" y="562"/>
-                </a:lnTo>
-                <a:lnTo>
-                  <a:pt x="8" y="564"/>
-                </a:lnTo>
-                <a:lnTo>
-                  <a:pt x="8" y="564"/>
-                </a:lnTo>
-                <a:lnTo>
-                  <a:pt x="4" y="566"/>
-                </a:lnTo>
-                <a:lnTo>
-                  <a:pt x="4" y="566"/>
-                </a:lnTo>
-                <a:lnTo>
-                  <a:pt x="2" y="572"/>
-                </a:lnTo>
-                <a:lnTo>
-                  <a:pt x="0" y="576"/>
-                </a:lnTo>
-                <a:lnTo>
-                  <a:pt x="0" y="576"/>
-                </a:lnTo>
-                <a:lnTo>
-                  <a:pt x="0" y="580"/>
-                </a:lnTo>
-                <a:lnTo>
-                  <a:pt x="0" y="580"/>
-                </a:lnTo>
-                <a:lnTo>
-                  <a:pt x="2" y="596"/>
-                </a:lnTo>
-                <a:lnTo>
-                  <a:pt x="2" y="596"/>
-                </a:lnTo>
-                <a:lnTo>
-                  <a:pt x="2" y="608"/>
-                </a:lnTo>
-                <a:lnTo>
-                  <a:pt x="2" y="608"/>
-                </a:lnTo>
-                <a:lnTo>
-                  <a:pt x="2" y="612"/>
-                </a:lnTo>
-                <a:lnTo>
-                  <a:pt x="2" y="612"/>
-                </a:lnTo>
-                <a:lnTo>
-                  <a:pt x="4" y="628"/>
-                </a:lnTo>
-                <a:lnTo>
-                  <a:pt x="4" y="630"/>
-                </a:lnTo>
-                <a:lnTo>
-                  <a:pt x="4" y="630"/>
-                </a:lnTo>
-                <a:lnTo>
-                  <a:pt x="6" y="632"/>
-                </a:lnTo>
-                <a:lnTo>
-                  <a:pt x="6" y="632"/>
-                </a:lnTo>
-                <a:lnTo>
-                  <a:pt x="6" y="638"/>
-                </a:lnTo>
-                <a:lnTo>
-                  <a:pt x="8" y="642"/>
-                </a:lnTo>
-                <a:lnTo>
-                  <a:pt x="8" y="642"/>
-                </a:lnTo>
-                <a:lnTo>
-                  <a:pt x="6" y="644"/>
-                </a:lnTo>
-                <a:lnTo>
-                  <a:pt x="6" y="644"/>
-                </a:lnTo>
-                <a:lnTo>
-                  <a:pt x="8" y="652"/>
-                </a:lnTo>
-                <a:lnTo>
-                  <a:pt x="12" y="660"/>
-                </a:lnTo>
-                <a:lnTo>
-                  <a:pt x="12" y="660"/>
-                </a:lnTo>
-                <a:lnTo>
-                  <a:pt x="16" y="662"/>
-                </a:lnTo>
-                <a:lnTo>
-                  <a:pt x="16" y="662"/>
-                </a:lnTo>
-                <a:lnTo>
-                  <a:pt x="16" y="664"/>
-                </a:lnTo>
-                <a:lnTo>
-                  <a:pt x="16" y="664"/>
-                </a:lnTo>
-                <a:lnTo>
-                  <a:pt x="20" y="664"/>
-                </a:lnTo>
-                <a:lnTo>
-                  <a:pt x="20" y="664"/>
-                </a:lnTo>
-                <a:lnTo>
-                  <a:pt x="22" y="666"/>
-                </a:lnTo>
-                <a:lnTo>
-                  <a:pt x="22" y="666"/>
-                </a:lnTo>
-                <a:lnTo>
-                  <a:pt x="26" y="668"/>
-                </a:lnTo>
-                <a:lnTo>
-                  <a:pt x="26" y="668"/>
-                </a:lnTo>
-                <a:lnTo>
-                  <a:pt x="30" y="668"/>
-                </a:lnTo>
-                <a:lnTo>
-                  <a:pt x="30" y="668"/>
-                </a:lnTo>
-                <a:lnTo>
-                  <a:pt x="40" y="666"/>
-                </a:lnTo>
-                <a:lnTo>
-                  <a:pt x="46" y="662"/>
-                </a:lnTo>
-                <a:lnTo>
-                  <a:pt x="46" y="662"/>
-                </a:lnTo>
-                <a:lnTo>
-                  <a:pt x="52" y="660"/>
-                </a:lnTo>
-                <a:lnTo>
-                  <a:pt x="52" y="660"/>
-                </a:lnTo>
-                <a:lnTo>
-                  <a:pt x="72" y="646"/>
-                </a:lnTo>
-                <a:lnTo>
-                  <a:pt x="72" y="646"/>
-                </a:lnTo>
-                <a:lnTo>
-                  <a:pt x="90" y="634"/>
-                </a:lnTo>
-                <a:lnTo>
-                  <a:pt x="90" y="634"/>
-                </a:lnTo>
-                <a:lnTo>
-                  <a:pt x="94" y="632"/>
-                </a:lnTo>
-                <a:lnTo>
-                  <a:pt x="94" y="632"/>
-                </a:lnTo>
-                <a:lnTo>
-                  <a:pt x="116" y="618"/>
-                </a:lnTo>
-                <a:lnTo>
-                  <a:pt x="116" y="618"/>
-                </a:lnTo>
-                <a:lnTo>
-                  <a:pt x="118" y="616"/>
-                </a:lnTo>
-                <a:lnTo>
-                  <a:pt x="118" y="616"/>
-                </a:lnTo>
-                <a:lnTo>
-                  <a:pt x="122" y="614"/>
-                </a:lnTo>
-                <a:lnTo>
-                  <a:pt x="122" y="614"/>
-                </a:lnTo>
-                <a:lnTo>
-                  <a:pt x="130" y="610"/>
-                </a:lnTo>
-                <a:lnTo>
-                  <a:pt x="136" y="606"/>
-                </a:lnTo>
-                <a:lnTo>
-                  <a:pt x="136" y="606"/>
-                </a:lnTo>
-                <a:lnTo>
-                  <a:pt x="138" y="604"/>
-                </a:lnTo>
-                <a:lnTo>
-                  <a:pt x="138" y="604"/>
-                </a:lnTo>
-                <a:lnTo>
-                  <a:pt x="150" y="596"/>
-                </a:lnTo>
-                <a:lnTo>
-                  <a:pt x="160" y="588"/>
-                </a:lnTo>
-                <a:lnTo>
-                  <a:pt x="160" y="588"/>
-                </a:lnTo>
-                <a:lnTo>
-                  <a:pt x="162" y="582"/>
-                </a:lnTo>
-                <a:lnTo>
-                  <a:pt x="162" y="582"/>
-                </a:lnTo>
-                <a:lnTo>
-                  <a:pt x="162" y="580"/>
-                </a:lnTo>
-                <a:lnTo>
-                  <a:pt x="160" y="578"/>
-                </a:lnTo>
-                <a:lnTo>
-                  <a:pt x="160" y="578"/>
-                </a:lnTo>
-                <a:close/>
-              </a:path>
-            </a:pathLst>
-          </a:custGeom>
-          <a:solidFill>
-            <a:schemeClr val="accent3">
-              <a:lumMod val="60000"/>
-              <a:lumOff val="40000"/>
-            </a:schemeClr>
-          </a:solidFill>
-          <a:ln w="9525" cap="flat" cmpd="sng" algn="ctr">
+          </p:spPr>
+          <p:style>
+            <a:lnRef idx="2">
+              <a:schemeClr val="accent1">
+                <a:shade val="15000"/>
+              </a:schemeClr>
+            </a:lnRef>
+            <a:fillRef idx="1">
+              <a:schemeClr val="accent1"/>
+            </a:fillRef>
+            <a:effectRef idx="0">
+              <a:schemeClr val="accent1"/>
+            </a:effectRef>
+            <a:fontRef idx="minor">
+              <a:schemeClr val="lt1"/>
+            </a:fontRef>
+          </p:style>
+          <p:txBody>
+            <a:bodyPr rtlCol="0" anchor="ctr"/>
+            <a:lstStyle/>
+            <a:p>
+              <a:pPr algn="ctr"/>
+              <a:endParaRPr lang="en-US"/>
+            </a:p>
+          </p:txBody>
+        </p:sp>
+        <p:pic>
+          <p:nvPicPr>
+            <p:cNvPr id="5" name="Picture 4">
+              <a:extLst>
+                <a:ext uri="{FF2B5EF4-FFF2-40B4-BE49-F238E27FC236}">
+                  <a16:creationId xmlns:a16="http://schemas.microsoft.com/office/drawing/2014/main" id="{E0A31FBB-E485-1B77-1197-CBEE92CFD0E4}"/>
+                </a:ext>
+              </a:extLst>
+            </p:cNvPr>
+            <p:cNvPicPr>
+              <a:picLocks noChangeAspect="1"/>
+            </p:cNvPicPr>
+            <p:nvPr/>
+          </p:nvPicPr>
+          <p:blipFill rotWithShape="1">
+            <a:blip r:embed="rId5"/>
+            <a:srcRect l="4235" t="1226" r="4644" b="1302"/>
+            <a:stretch/>
+          </p:blipFill>
+          <p:spPr>
+            <a:xfrm>
+              <a:off x="3731172" y="69335"/>
+              <a:ext cx="4708635" cy="6684580"/>
+            </a:xfrm>
+            <a:prstGeom prst="rect">
+              <a:avLst/>
+            </a:prstGeom>
+          </p:spPr>
+        </p:pic>
+        <p:sp>
+          <p:nvSpPr>
+            <p:cNvPr id="6" name="Freeform 72">
+              <a:extLst>
+                <a:ext uri="{FF2B5EF4-FFF2-40B4-BE49-F238E27FC236}">
+                  <a16:creationId xmlns:a16="http://schemas.microsoft.com/office/drawing/2014/main" id="{61EF16AA-186D-DA1C-A8A7-2C5918BF5FF6}"/>
+                </a:ext>
+              </a:extLst>
+            </p:cNvPr>
+            <p:cNvSpPr>
+              <a:spLocks/>
+            </p:cNvSpPr>
+            <p:nvPr/>
+          </p:nvSpPr>
+          <p:spPr bwMode="auto">
+            <a:xfrm rot="14660993">
+              <a:off x="2503524" y="199245"/>
+              <a:ext cx="414442" cy="2376312"/>
+            </a:xfrm>
+            <a:custGeom>
+              <a:avLst/>
+              <a:gdLst/>
+              <a:ahLst/>
+              <a:cxnLst>
+                <a:cxn ang="0">
+                  <a:pos x="158" y="574"/>
+                </a:cxn>
+                <a:cxn ang="0">
+                  <a:pos x="156" y="576"/>
+                </a:cxn>
+                <a:cxn ang="0">
+                  <a:pos x="152" y="578"/>
+                </a:cxn>
+                <a:cxn ang="0">
+                  <a:pos x="120" y="594"/>
+                </a:cxn>
+                <a:cxn ang="0">
+                  <a:pos x="72" y="624"/>
+                </a:cxn>
+                <a:cxn ang="0">
+                  <a:pos x="56" y="632"/>
+                </a:cxn>
+                <a:cxn ang="0">
+                  <a:pos x="30" y="650"/>
+                </a:cxn>
+                <a:cxn ang="0">
+                  <a:pos x="58" y="608"/>
+                </a:cxn>
+                <a:cxn ang="0">
+                  <a:pos x="112" y="502"/>
+                </a:cxn>
+                <a:cxn ang="0">
+                  <a:pos x="152" y="382"/>
+                </a:cxn>
+                <a:cxn ang="0">
+                  <a:pos x="162" y="266"/>
+                </a:cxn>
+                <a:cxn ang="0">
+                  <a:pos x="156" y="204"/>
+                </a:cxn>
+                <a:cxn ang="0">
+                  <a:pos x="150" y="178"/>
+                </a:cxn>
+                <a:cxn ang="0">
+                  <a:pos x="118" y="90"/>
+                </a:cxn>
+                <a:cxn ang="0">
+                  <a:pos x="74" y="22"/>
+                </a:cxn>
+                <a:cxn ang="0">
+                  <a:pos x="54" y="0"/>
+                </a:cxn>
+                <a:cxn ang="0">
+                  <a:pos x="48" y="10"/>
+                </a:cxn>
+                <a:cxn ang="0">
+                  <a:pos x="58" y="28"/>
+                </a:cxn>
+                <a:cxn ang="0">
+                  <a:pos x="82" y="70"/>
+                </a:cxn>
+                <a:cxn ang="0">
+                  <a:pos x="110" y="124"/>
+                </a:cxn>
+                <a:cxn ang="0">
+                  <a:pos x="134" y="196"/>
+                </a:cxn>
+                <a:cxn ang="0">
+                  <a:pos x="144" y="284"/>
+                </a:cxn>
+                <a:cxn ang="0">
+                  <a:pos x="140" y="334"/>
+                </a:cxn>
+                <a:cxn ang="0">
+                  <a:pos x="138" y="354"/>
+                </a:cxn>
+                <a:cxn ang="0">
+                  <a:pos x="120" y="430"/>
+                </a:cxn>
+                <a:cxn ang="0">
+                  <a:pos x="108" y="462"/>
+                </a:cxn>
+                <a:cxn ang="0">
+                  <a:pos x="78" y="536"/>
+                </a:cxn>
+                <a:cxn ang="0">
+                  <a:pos x="24" y="634"/>
+                </a:cxn>
+                <a:cxn ang="0">
+                  <a:pos x="24" y="634"/>
+                </a:cxn>
+                <a:cxn ang="0">
+                  <a:pos x="20" y="602"/>
+                </a:cxn>
+                <a:cxn ang="0">
+                  <a:pos x="20" y="590"/>
+                </a:cxn>
+                <a:cxn ang="0">
+                  <a:pos x="22" y="570"/>
+                </a:cxn>
+                <a:cxn ang="0">
+                  <a:pos x="26" y="562"/>
+                </a:cxn>
+                <a:cxn ang="0">
+                  <a:pos x="16" y="562"/>
+                </a:cxn>
+                <a:cxn ang="0">
+                  <a:pos x="8" y="564"/>
+                </a:cxn>
+                <a:cxn ang="0">
+                  <a:pos x="0" y="576"/>
+                </a:cxn>
+                <a:cxn ang="0">
+                  <a:pos x="2" y="596"/>
+                </a:cxn>
+                <a:cxn ang="0">
+                  <a:pos x="2" y="612"/>
+                </a:cxn>
+                <a:cxn ang="0">
+                  <a:pos x="4" y="630"/>
+                </a:cxn>
+                <a:cxn ang="0">
+                  <a:pos x="8" y="642"/>
+                </a:cxn>
+                <a:cxn ang="0">
+                  <a:pos x="8" y="652"/>
+                </a:cxn>
+                <a:cxn ang="0">
+                  <a:pos x="16" y="662"/>
+                </a:cxn>
+                <a:cxn ang="0">
+                  <a:pos x="20" y="664"/>
+                </a:cxn>
+                <a:cxn ang="0">
+                  <a:pos x="26" y="668"/>
+                </a:cxn>
+                <a:cxn ang="0">
+                  <a:pos x="46" y="662"/>
+                </a:cxn>
+                <a:cxn ang="0">
+                  <a:pos x="72" y="646"/>
+                </a:cxn>
+                <a:cxn ang="0">
+                  <a:pos x="94" y="632"/>
+                </a:cxn>
+                <a:cxn ang="0">
+                  <a:pos x="118" y="616"/>
+                </a:cxn>
+                <a:cxn ang="0">
+                  <a:pos x="130" y="610"/>
+                </a:cxn>
+                <a:cxn ang="0">
+                  <a:pos x="138" y="604"/>
+                </a:cxn>
+                <a:cxn ang="0">
+                  <a:pos x="162" y="582"/>
+                </a:cxn>
+                <a:cxn ang="0">
+                  <a:pos x="160" y="578"/>
+                </a:cxn>
+              </a:cxnLst>
+              <a:rect l="0" t="0" r="r" b="b"/>
+              <a:pathLst>
+                <a:path w="162" h="668">
+                  <a:moveTo>
+                    <a:pt x="160" y="578"/>
+                  </a:moveTo>
+                  <a:lnTo>
+                    <a:pt x="160" y="578"/>
+                  </a:lnTo>
+                  <a:lnTo>
+                    <a:pt x="158" y="574"/>
+                  </a:lnTo>
+                  <a:lnTo>
+                    <a:pt x="158" y="574"/>
+                  </a:lnTo>
+                  <a:lnTo>
+                    <a:pt x="156" y="576"/>
+                  </a:lnTo>
+                  <a:lnTo>
+                    <a:pt x="156" y="576"/>
+                  </a:lnTo>
+                  <a:lnTo>
+                    <a:pt x="156" y="576"/>
+                  </a:lnTo>
+                  <a:lnTo>
+                    <a:pt x="156" y="576"/>
+                  </a:lnTo>
+                  <a:lnTo>
+                    <a:pt x="156" y="576"/>
+                  </a:lnTo>
+                  <a:lnTo>
+                    <a:pt x="156" y="576"/>
+                  </a:lnTo>
+                  <a:lnTo>
+                    <a:pt x="154" y="578"/>
+                  </a:lnTo>
+                  <a:lnTo>
+                    <a:pt x="152" y="578"/>
+                  </a:lnTo>
+                  <a:lnTo>
+                    <a:pt x="152" y="578"/>
+                  </a:lnTo>
+                  <a:lnTo>
+                    <a:pt x="136" y="586"/>
+                  </a:lnTo>
+                  <a:lnTo>
+                    <a:pt x="120" y="594"/>
+                  </a:lnTo>
+                  <a:lnTo>
+                    <a:pt x="120" y="594"/>
+                  </a:lnTo>
+                  <a:lnTo>
+                    <a:pt x="102" y="604"/>
+                  </a:lnTo>
+                  <a:lnTo>
+                    <a:pt x="102" y="604"/>
+                  </a:lnTo>
+                  <a:lnTo>
+                    <a:pt x="72" y="624"/>
+                  </a:lnTo>
+                  <a:lnTo>
+                    <a:pt x="72" y="624"/>
+                  </a:lnTo>
+                  <a:lnTo>
+                    <a:pt x="66" y="626"/>
+                  </a:lnTo>
+                  <a:lnTo>
+                    <a:pt x="62" y="630"/>
+                  </a:lnTo>
+                  <a:lnTo>
+                    <a:pt x="62" y="630"/>
+                  </a:lnTo>
+                  <a:lnTo>
+                    <a:pt x="56" y="632"/>
+                  </a:lnTo>
+                  <a:lnTo>
+                    <a:pt x="52" y="636"/>
+                  </a:lnTo>
+                  <a:lnTo>
+                    <a:pt x="52" y="636"/>
+                  </a:lnTo>
+                  <a:lnTo>
+                    <a:pt x="42" y="642"/>
+                  </a:lnTo>
+                  <a:lnTo>
+                    <a:pt x="30" y="650"/>
+                  </a:lnTo>
+                  <a:lnTo>
+                    <a:pt x="30" y="650"/>
+                  </a:lnTo>
+                  <a:lnTo>
+                    <a:pt x="36" y="640"/>
+                  </a:lnTo>
+                  <a:lnTo>
+                    <a:pt x="36" y="640"/>
+                  </a:lnTo>
+                  <a:lnTo>
+                    <a:pt x="58" y="608"/>
+                  </a:lnTo>
+                  <a:lnTo>
+                    <a:pt x="78" y="574"/>
+                  </a:lnTo>
+                  <a:lnTo>
+                    <a:pt x="96" y="538"/>
+                  </a:lnTo>
+                  <a:lnTo>
+                    <a:pt x="112" y="502"/>
+                  </a:lnTo>
+                  <a:lnTo>
+                    <a:pt x="112" y="502"/>
+                  </a:lnTo>
+                  <a:lnTo>
+                    <a:pt x="130" y="460"/>
+                  </a:lnTo>
+                  <a:lnTo>
+                    <a:pt x="142" y="420"/>
+                  </a:lnTo>
+                  <a:lnTo>
+                    <a:pt x="142" y="420"/>
+                  </a:lnTo>
+                  <a:lnTo>
+                    <a:pt x="152" y="382"/>
+                  </a:lnTo>
+                  <a:lnTo>
+                    <a:pt x="158" y="344"/>
+                  </a:lnTo>
+                  <a:lnTo>
+                    <a:pt x="162" y="304"/>
+                  </a:lnTo>
+                  <a:lnTo>
+                    <a:pt x="162" y="266"/>
+                  </a:lnTo>
+                  <a:lnTo>
+                    <a:pt x="162" y="266"/>
+                  </a:lnTo>
+                  <a:lnTo>
+                    <a:pt x="160" y="242"/>
+                  </a:lnTo>
+                  <a:lnTo>
+                    <a:pt x="156" y="216"/>
+                  </a:lnTo>
+                  <a:lnTo>
+                    <a:pt x="156" y="216"/>
+                  </a:lnTo>
+                  <a:lnTo>
+                    <a:pt x="156" y="204"/>
+                  </a:lnTo>
+                  <a:lnTo>
+                    <a:pt x="154" y="190"/>
+                  </a:lnTo>
+                  <a:lnTo>
+                    <a:pt x="154" y="190"/>
+                  </a:lnTo>
+                  <a:lnTo>
+                    <a:pt x="150" y="178"/>
+                  </a:lnTo>
+                  <a:lnTo>
+                    <a:pt x="150" y="178"/>
+                  </a:lnTo>
+                  <a:lnTo>
+                    <a:pt x="146" y="164"/>
+                  </a:lnTo>
+                  <a:lnTo>
+                    <a:pt x="146" y="164"/>
+                  </a:lnTo>
+                  <a:lnTo>
+                    <a:pt x="134" y="128"/>
+                  </a:lnTo>
+                  <a:lnTo>
+                    <a:pt x="118" y="90"/>
+                  </a:lnTo>
+                  <a:lnTo>
+                    <a:pt x="118" y="90"/>
+                  </a:lnTo>
+                  <a:lnTo>
+                    <a:pt x="96" y="54"/>
+                  </a:lnTo>
+                  <a:lnTo>
+                    <a:pt x="74" y="22"/>
+                  </a:lnTo>
+                  <a:lnTo>
+                    <a:pt x="74" y="22"/>
+                  </a:lnTo>
+                  <a:lnTo>
+                    <a:pt x="68" y="12"/>
+                  </a:lnTo>
+                  <a:lnTo>
+                    <a:pt x="60" y="4"/>
+                  </a:lnTo>
+                  <a:lnTo>
+                    <a:pt x="60" y="4"/>
+                  </a:lnTo>
+                  <a:lnTo>
+                    <a:pt x="54" y="0"/>
+                  </a:lnTo>
+                  <a:lnTo>
+                    <a:pt x="52" y="2"/>
+                  </a:lnTo>
+                  <a:lnTo>
+                    <a:pt x="48" y="6"/>
+                  </a:lnTo>
+                  <a:lnTo>
+                    <a:pt x="48" y="6"/>
+                  </a:lnTo>
+                  <a:lnTo>
+                    <a:pt x="48" y="10"/>
+                  </a:lnTo>
+                  <a:lnTo>
+                    <a:pt x="50" y="14"/>
+                  </a:lnTo>
+                  <a:lnTo>
+                    <a:pt x="50" y="14"/>
+                  </a:lnTo>
+                  <a:lnTo>
+                    <a:pt x="54" y="22"/>
+                  </a:lnTo>
+                  <a:lnTo>
+                    <a:pt x="58" y="28"/>
+                  </a:lnTo>
+                  <a:lnTo>
+                    <a:pt x="58" y="28"/>
+                  </a:lnTo>
+                  <a:lnTo>
+                    <a:pt x="66" y="42"/>
+                  </a:lnTo>
+                  <a:lnTo>
+                    <a:pt x="66" y="42"/>
+                  </a:lnTo>
+                  <a:lnTo>
+                    <a:pt x="82" y="70"/>
+                  </a:lnTo>
+                  <a:lnTo>
+                    <a:pt x="100" y="98"/>
+                  </a:lnTo>
+                  <a:lnTo>
+                    <a:pt x="100" y="98"/>
+                  </a:lnTo>
+                  <a:lnTo>
+                    <a:pt x="106" y="110"/>
+                  </a:lnTo>
+                  <a:lnTo>
+                    <a:pt x="110" y="124"/>
+                  </a:lnTo>
+                  <a:lnTo>
+                    <a:pt x="110" y="124"/>
+                  </a:lnTo>
+                  <a:lnTo>
+                    <a:pt x="120" y="148"/>
+                  </a:lnTo>
+                  <a:lnTo>
+                    <a:pt x="128" y="172"/>
+                  </a:lnTo>
+                  <a:lnTo>
+                    <a:pt x="134" y="196"/>
+                  </a:lnTo>
+                  <a:lnTo>
+                    <a:pt x="138" y="220"/>
+                  </a:lnTo>
+                  <a:lnTo>
+                    <a:pt x="138" y="220"/>
+                  </a:lnTo>
+                  <a:lnTo>
+                    <a:pt x="142" y="260"/>
+                  </a:lnTo>
+                  <a:lnTo>
+                    <a:pt x="144" y="284"/>
+                  </a:lnTo>
+                  <a:lnTo>
+                    <a:pt x="142" y="306"/>
+                  </a:lnTo>
+                  <a:lnTo>
+                    <a:pt x="142" y="306"/>
+                  </a:lnTo>
+                  <a:lnTo>
+                    <a:pt x="140" y="326"/>
+                  </a:lnTo>
+                  <a:lnTo>
+                    <a:pt x="140" y="334"/>
+                  </a:lnTo>
+                  <a:lnTo>
+                    <a:pt x="140" y="334"/>
+                  </a:lnTo>
+                  <a:lnTo>
+                    <a:pt x="140" y="340"/>
+                  </a:lnTo>
+                  <a:lnTo>
+                    <a:pt x="138" y="354"/>
+                  </a:lnTo>
+                  <a:lnTo>
+                    <a:pt x="138" y="354"/>
+                  </a:lnTo>
+                  <a:lnTo>
+                    <a:pt x="132" y="380"/>
+                  </a:lnTo>
+                  <a:lnTo>
+                    <a:pt x="132" y="380"/>
+                  </a:lnTo>
+                  <a:lnTo>
+                    <a:pt x="120" y="430"/>
+                  </a:lnTo>
+                  <a:lnTo>
+                    <a:pt x="120" y="430"/>
+                  </a:lnTo>
+                  <a:lnTo>
+                    <a:pt x="114" y="446"/>
+                  </a:lnTo>
+                  <a:lnTo>
+                    <a:pt x="114" y="446"/>
+                  </a:lnTo>
+                  <a:lnTo>
+                    <a:pt x="108" y="462"/>
+                  </a:lnTo>
+                  <a:lnTo>
+                    <a:pt x="108" y="462"/>
+                  </a:lnTo>
+                  <a:lnTo>
+                    <a:pt x="96" y="494"/>
+                  </a:lnTo>
+                  <a:lnTo>
+                    <a:pt x="84" y="522"/>
+                  </a:lnTo>
+                  <a:lnTo>
+                    <a:pt x="84" y="522"/>
+                  </a:lnTo>
+                  <a:lnTo>
+                    <a:pt x="78" y="536"/>
+                  </a:lnTo>
+                  <a:lnTo>
+                    <a:pt x="78" y="536"/>
+                  </a:lnTo>
+                  <a:lnTo>
+                    <a:pt x="52" y="586"/>
+                  </a:lnTo>
+                  <a:lnTo>
+                    <a:pt x="24" y="634"/>
+                  </a:lnTo>
+                  <a:lnTo>
+                    <a:pt x="24" y="634"/>
+                  </a:lnTo>
+                  <a:lnTo>
+                    <a:pt x="24" y="636"/>
+                  </a:lnTo>
+                  <a:lnTo>
+                    <a:pt x="24" y="636"/>
+                  </a:lnTo>
+                  <a:lnTo>
+                    <a:pt x="24" y="634"/>
+                  </a:lnTo>
+                  <a:lnTo>
+                    <a:pt x="24" y="634"/>
+                  </a:lnTo>
+                  <a:lnTo>
+                    <a:pt x="24" y="622"/>
+                  </a:lnTo>
+                  <a:lnTo>
+                    <a:pt x="24" y="622"/>
+                  </a:lnTo>
+                  <a:lnTo>
+                    <a:pt x="20" y="602"/>
+                  </a:lnTo>
+                  <a:lnTo>
+                    <a:pt x="20" y="602"/>
+                  </a:lnTo>
+                  <a:lnTo>
+                    <a:pt x="20" y="598"/>
+                  </a:lnTo>
+                  <a:lnTo>
+                    <a:pt x="20" y="594"/>
+                  </a:lnTo>
+                  <a:lnTo>
+                    <a:pt x="20" y="594"/>
+                  </a:lnTo>
+                  <a:lnTo>
+                    <a:pt x="20" y="590"/>
+                  </a:lnTo>
+                  <a:lnTo>
+                    <a:pt x="20" y="588"/>
+                  </a:lnTo>
+                  <a:lnTo>
+                    <a:pt x="20" y="588"/>
+                  </a:lnTo>
+                  <a:lnTo>
+                    <a:pt x="20" y="576"/>
+                  </a:lnTo>
+                  <a:lnTo>
+                    <a:pt x="22" y="570"/>
+                  </a:lnTo>
+                  <a:lnTo>
+                    <a:pt x="24" y="566"/>
+                  </a:lnTo>
+                  <a:lnTo>
+                    <a:pt x="24" y="566"/>
+                  </a:lnTo>
+                  <a:lnTo>
+                    <a:pt x="26" y="564"/>
+                  </a:lnTo>
+                  <a:lnTo>
+                    <a:pt x="26" y="562"/>
+                  </a:lnTo>
+                  <a:lnTo>
+                    <a:pt x="26" y="562"/>
+                  </a:lnTo>
+                  <a:lnTo>
+                    <a:pt x="22" y="562"/>
+                  </a:lnTo>
+                  <a:lnTo>
+                    <a:pt x="16" y="562"/>
+                  </a:lnTo>
+                  <a:lnTo>
+                    <a:pt x="16" y="562"/>
+                  </a:lnTo>
+                  <a:lnTo>
+                    <a:pt x="12" y="562"/>
+                  </a:lnTo>
+                  <a:lnTo>
+                    <a:pt x="12" y="562"/>
+                  </a:lnTo>
+                  <a:lnTo>
+                    <a:pt x="8" y="564"/>
+                  </a:lnTo>
+                  <a:lnTo>
+                    <a:pt x="8" y="564"/>
+                  </a:lnTo>
+                  <a:lnTo>
+                    <a:pt x="4" y="566"/>
+                  </a:lnTo>
+                  <a:lnTo>
+                    <a:pt x="4" y="566"/>
+                  </a:lnTo>
+                  <a:lnTo>
+                    <a:pt x="2" y="572"/>
+                  </a:lnTo>
+                  <a:lnTo>
+                    <a:pt x="0" y="576"/>
+                  </a:lnTo>
+                  <a:lnTo>
+                    <a:pt x="0" y="576"/>
+                  </a:lnTo>
+                  <a:lnTo>
+                    <a:pt x="0" y="580"/>
+                  </a:lnTo>
+                  <a:lnTo>
+                    <a:pt x="0" y="580"/>
+                  </a:lnTo>
+                  <a:lnTo>
+                    <a:pt x="2" y="596"/>
+                  </a:lnTo>
+                  <a:lnTo>
+                    <a:pt x="2" y="596"/>
+                  </a:lnTo>
+                  <a:lnTo>
+                    <a:pt x="2" y="608"/>
+                  </a:lnTo>
+                  <a:lnTo>
+                    <a:pt x="2" y="608"/>
+                  </a:lnTo>
+                  <a:lnTo>
+                    <a:pt x="2" y="612"/>
+                  </a:lnTo>
+                  <a:lnTo>
+                    <a:pt x="2" y="612"/>
+                  </a:lnTo>
+                  <a:lnTo>
+                    <a:pt x="4" y="628"/>
+                  </a:lnTo>
+                  <a:lnTo>
+                    <a:pt x="4" y="630"/>
+                  </a:lnTo>
+                  <a:lnTo>
+                    <a:pt x="4" y="630"/>
+                  </a:lnTo>
+                  <a:lnTo>
+                    <a:pt x="6" y="632"/>
+                  </a:lnTo>
+                  <a:lnTo>
+                    <a:pt x="6" y="632"/>
+                  </a:lnTo>
+                  <a:lnTo>
+                    <a:pt x="6" y="638"/>
+                  </a:lnTo>
+                  <a:lnTo>
+                    <a:pt x="8" y="642"/>
+                  </a:lnTo>
+                  <a:lnTo>
+                    <a:pt x="8" y="642"/>
+                  </a:lnTo>
+                  <a:lnTo>
+                    <a:pt x="6" y="644"/>
+                  </a:lnTo>
+                  <a:lnTo>
+                    <a:pt x="6" y="644"/>
+                  </a:lnTo>
+                  <a:lnTo>
+                    <a:pt x="8" y="652"/>
+                  </a:lnTo>
+                  <a:lnTo>
+                    <a:pt x="12" y="660"/>
+                  </a:lnTo>
+                  <a:lnTo>
+                    <a:pt x="12" y="660"/>
+                  </a:lnTo>
+                  <a:lnTo>
+                    <a:pt x="16" y="662"/>
+                  </a:lnTo>
+                  <a:lnTo>
+                    <a:pt x="16" y="662"/>
+                  </a:lnTo>
+                  <a:lnTo>
+                    <a:pt x="16" y="664"/>
+                  </a:lnTo>
+                  <a:lnTo>
+                    <a:pt x="16" y="664"/>
+                  </a:lnTo>
+                  <a:lnTo>
+                    <a:pt x="20" y="664"/>
+                  </a:lnTo>
+                  <a:lnTo>
+                    <a:pt x="20" y="664"/>
+                  </a:lnTo>
+                  <a:lnTo>
+                    <a:pt x="22" y="666"/>
+                  </a:lnTo>
+                  <a:lnTo>
+                    <a:pt x="22" y="666"/>
+                  </a:lnTo>
+                  <a:lnTo>
+                    <a:pt x="26" y="668"/>
+                  </a:lnTo>
+                  <a:lnTo>
+                    <a:pt x="26" y="668"/>
+                  </a:lnTo>
+                  <a:lnTo>
+                    <a:pt x="30" y="668"/>
+                  </a:lnTo>
+                  <a:lnTo>
+                    <a:pt x="30" y="668"/>
+                  </a:lnTo>
+                  <a:lnTo>
+                    <a:pt x="40" y="666"/>
+                  </a:lnTo>
+                  <a:lnTo>
+                    <a:pt x="46" y="662"/>
+                  </a:lnTo>
+                  <a:lnTo>
+                    <a:pt x="46" y="662"/>
+                  </a:lnTo>
+                  <a:lnTo>
+                    <a:pt x="52" y="660"/>
+                  </a:lnTo>
+                  <a:lnTo>
+                    <a:pt x="52" y="660"/>
+                  </a:lnTo>
+                  <a:lnTo>
+                    <a:pt x="72" y="646"/>
+                  </a:lnTo>
+                  <a:lnTo>
+                    <a:pt x="72" y="646"/>
+                  </a:lnTo>
+                  <a:lnTo>
+                    <a:pt x="90" y="634"/>
+                  </a:lnTo>
+                  <a:lnTo>
+                    <a:pt x="90" y="634"/>
+                  </a:lnTo>
+                  <a:lnTo>
+                    <a:pt x="94" y="632"/>
+                  </a:lnTo>
+                  <a:lnTo>
+                    <a:pt x="94" y="632"/>
+                  </a:lnTo>
+                  <a:lnTo>
+                    <a:pt x="116" y="618"/>
+                  </a:lnTo>
+                  <a:lnTo>
+                    <a:pt x="116" y="618"/>
+                  </a:lnTo>
+                  <a:lnTo>
+                    <a:pt x="118" y="616"/>
+                  </a:lnTo>
+                  <a:lnTo>
+                    <a:pt x="118" y="616"/>
+                  </a:lnTo>
+                  <a:lnTo>
+                    <a:pt x="122" y="614"/>
+                  </a:lnTo>
+                  <a:lnTo>
+                    <a:pt x="122" y="614"/>
+                  </a:lnTo>
+                  <a:lnTo>
+                    <a:pt x="130" y="610"/>
+                  </a:lnTo>
+                  <a:lnTo>
+                    <a:pt x="136" y="606"/>
+                  </a:lnTo>
+                  <a:lnTo>
+                    <a:pt x="136" y="606"/>
+                  </a:lnTo>
+                  <a:lnTo>
+                    <a:pt x="138" y="604"/>
+                  </a:lnTo>
+                  <a:lnTo>
+                    <a:pt x="138" y="604"/>
+                  </a:lnTo>
+                  <a:lnTo>
+                    <a:pt x="150" y="596"/>
+                  </a:lnTo>
+                  <a:lnTo>
+                    <a:pt x="160" y="588"/>
+                  </a:lnTo>
+                  <a:lnTo>
+                    <a:pt x="160" y="588"/>
+                  </a:lnTo>
+                  <a:lnTo>
+                    <a:pt x="162" y="582"/>
+                  </a:lnTo>
+                  <a:lnTo>
+                    <a:pt x="162" y="582"/>
+                  </a:lnTo>
+                  <a:lnTo>
+                    <a:pt x="162" y="580"/>
+                  </a:lnTo>
+                  <a:lnTo>
+                    <a:pt x="160" y="578"/>
+                  </a:lnTo>
+                  <a:lnTo>
+                    <a:pt x="160" y="578"/>
+                  </a:lnTo>
+                  <a:close/>
+                </a:path>
+              </a:pathLst>
+            </a:custGeom>
             <a:solidFill>
-              <a:schemeClr val="accent3">
-                <a:lumMod val="60000"/>
-                <a:lumOff val="40000"/>
-              </a:schemeClr>
+              <a:srgbClr val="A1EEBD"/>
             </a:solidFill>
-            <a:prstDash val="solid"/>
-            <a:round/>
-            <a:headEnd type="none" w="med" len="med"/>
-            <a:tailEnd type="none" w="med" len="med"/>
-          </a:ln>
-        </p:spPr>
-        <p:txBody>
-          <a:bodyPr vert="horz" wrap="square" lIns="121728" tIns="60864" rIns="121728" bIns="60864" numCol="1" anchor="t" anchorCtr="0" compatLnSpc="1">
-            <a:prstTxWarp prst="textNoShape">
+            <a:ln w="9525" cap="flat" cmpd="sng" algn="ctr">
+              <a:solidFill>
+                <a:srgbClr val="A1EEBD"/>
+              </a:solidFill>
+              <a:prstDash val="solid"/>
+              <a:round/>
+              <a:headEnd type="none" w="med" len="med"/>
+              <a:tailEnd type="none" w="med" len="med"/>
+            </a:ln>
+          </p:spPr>
+          <p:txBody>
+            <a:bodyPr vert="horz" wrap="square" lIns="121728" tIns="60864" rIns="121728" bIns="60864" numCol="1" anchor="t" anchorCtr="0" compatLnSpc="1">
+              <a:prstTxWarp prst="textNoShape">
+                <a:avLst/>
+              </a:prstTxWarp>
+            </a:bodyPr>
+            <a:lstStyle/>
+            <a:p>
+              <a:endParaRPr lang="en-US" sz="2396"/>
+            </a:p>
+          </p:txBody>
+        </p:sp>
+        <p:sp>
+          <p:nvSpPr>
+            <p:cNvPr id="7" name="TextBox 6">
+              <a:extLst>
+                <a:ext uri="{FF2B5EF4-FFF2-40B4-BE49-F238E27FC236}">
+                  <a16:creationId xmlns:a16="http://schemas.microsoft.com/office/drawing/2014/main" id="{9D11FC89-A787-102D-9A8C-8FED11CDEAB9}"/>
+                </a:ext>
+              </a:extLst>
+            </p:cNvPr>
+            <p:cNvSpPr txBox="1"/>
+            <p:nvPr/>
+          </p:nvSpPr>
+          <p:spPr>
+            <a:xfrm>
+              <a:off x="735725" y="1991836"/>
+              <a:ext cx="2042547" cy="707886"/>
+            </a:xfrm>
+            <a:prstGeom prst="rect">
               <a:avLst/>
-            </a:prstTxWarp>
-          </a:bodyPr>
-          <a:lstStyle/>
-          <a:p>
-            <a:endParaRPr lang="en-US" sz="2396"/>
-          </a:p>
-        </p:txBody>
-      </p:sp>
-      <p:sp>
-        <p:nvSpPr>
-          <p:cNvPr id="7" name="TextBox 6">
-            <a:extLst>
-              <a:ext uri="{FF2B5EF4-FFF2-40B4-BE49-F238E27FC236}">
-                <a16:creationId xmlns:a16="http://schemas.microsoft.com/office/drawing/2014/main" id="{9D11FC89-A787-102D-9A8C-8FED11CDEAB9}"/>
-              </a:ext>
-            </a:extLst>
-          </p:cNvPr>
-          <p:cNvSpPr txBox="1"/>
-          <p:nvPr/>
-        </p:nvSpPr>
-        <p:spPr>
-          <a:xfrm>
-            <a:off x="735725" y="1991836"/>
-            <a:ext cx="2042547" cy="707886"/>
-          </a:xfrm>
-          <a:prstGeom prst="rect">
-            <a:avLst/>
-          </a:prstGeom>
-          <a:noFill/>
-        </p:spPr>
-        <p:txBody>
-          <a:bodyPr wrap="none" rtlCol="0">
-            <a:spAutoFit/>
-          </a:bodyPr>
-          <a:lstStyle/>
-          <a:p>
-            <a:r>
-              <a:rPr lang="en-US" sz="2000" b="1" dirty="0">
-                <a:highlight>
-                  <a:srgbClr val="47D45A"/>
-                </a:highlight>
-                <a:latin typeface="Apple SD Gothic Neo" panose="02000300000000000000" pitchFamily="2" charset="-127"/>
-                <a:ea typeface="Apple SD Gothic Neo" panose="02000300000000000000" pitchFamily="2" charset="-127"/>
-              </a:rPr>
-              <a:t>Pretentious text</a:t>
-            </a:r>
-            <a:br>
-              <a:rPr lang="en-US" sz="2000" b="1" dirty="0">
-                <a:highlight>
-                  <a:srgbClr val="47D45A"/>
-                </a:highlight>
-                <a:latin typeface="Apple SD Gothic Neo" panose="02000300000000000000" pitchFamily="2" charset="-127"/>
-                <a:ea typeface="Apple SD Gothic Neo" panose="02000300000000000000" pitchFamily="2" charset="-127"/>
-              </a:rPr>
-            </a:br>
-            <a:r>
-              <a:rPr lang="en-US" sz="2000" b="1" dirty="0">
-                <a:highlight>
-                  <a:srgbClr val="47D45A"/>
-                </a:highlight>
-                <a:latin typeface="Apple SD Gothic Neo" panose="02000300000000000000" pitchFamily="2" charset="-127"/>
-                <a:ea typeface="Apple SD Gothic Neo" panose="02000300000000000000" pitchFamily="2" charset="-127"/>
-              </a:rPr>
-              <a:t>is greyed out</a:t>
-            </a:r>
-          </a:p>
-        </p:txBody>
-      </p:sp>
-      <p:sp>
-        <p:nvSpPr>
-          <p:cNvPr id="8" name="Freeform 72">
-            <a:extLst>
-              <a:ext uri="{FF2B5EF4-FFF2-40B4-BE49-F238E27FC236}">
-                <a16:creationId xmlns:a16="http://schemas.microsoft.com/office/drawing/2014/main" id="{CE99A475-0192-EC71-F401-1BFAEBCE21E8}"/>
-              </a:ext>
-            </a:extLst>
-          </p:cNvPr>
-          <p:cNvSpPr>
-            <a:spLocks/>
-          </p:cNvSpPr>
-          <p:nvPr/>
-        </p:nvSpPr>
-        <p:spPr bwMode="auto">
-          <a:xfrm rot="14660993">
-            <a:off x="2657449" y="2919816"/>
-            <a:ext cx="572024" cy="2048154"/>
-          </a:xfrm>
-          <a:custGeom>
-            <a:avLst/>
-            <a:gdLst/>
-            <a:ahLst/>
-            <a:cxnLst>
-              <a:cxn ang="0">
-                <a:pos x="158" y="574"/>
-              </a:cxn>
-              <a:cxn ang="0">
-                <a:pos x="156" y="576"/>
-              </a:cxn>
-              <a:cxn ang="0">
-                <a:pos x="152" y="578"/>
-              </a:cxn>
-              <a:cxn ang="0">
-                <a:pos x="120" y="594"/>
-              </a:cxn>
-              <a:cxn ang="0">
-                <a:pos x="72" y="624"/>
-              </a:cxn>
-              <a:cxn ang="0">
-                <a:pos x="56" y="632"/>
-              </a:cxn>
-              <a:cxn ang="0">
-                <a:pos x="30" y="650"/>
-              </a:cxn>
-              <a:cxn ang="0">
-                <a:pos x="58" y="608"/>
-              </a:cxn>
-              <a:cxn ang="0">
-                <a:pos x="112" y="502"/>
-              </a:cxn>
-              <a:cxn ang="0">
-                <a:pos x="152" y="382"/>
-              </a:cxn>
-              <a:cxn ang="0">
-                <a:pos x="162" y="266"/>
-              </a:cxn>
-              <a:cxn ang="0">
-                <a:pos x="156" y="204"/>
-              </a:cxn>
-              <a:cxn ang="0">
-                <a:pos x="150" y="178"/>
-              </a:cxn>
-              <a:cxn ang="0">
-                <a:pos x="118" y="90"/>
-              </a:cxn>
-              <a:cxn ang="0">
-                <a:pos x="74" y="22"/>
-              </a:cxn>
-              <a:cxn ang="0">
-                <a:pos x="54" y="0"/>
-              </a:cxn>
-              <a:cxn ang="0">
-                <a:pos x="48" y="10"/>
-              </a:cxn>
-              <a:cxn ang="0">
-                <a:pos x="58" y="28"/>
-              </a:cxn>
-              <a:cxn ang="0">
-                <a:pos x="82" y="70"/>
-              </a:cxn>
-              <a:cxn ang="0">
-                <a:pos x="110" y="124"/>
-              </a:cxn>
-              <a:cxn ang="0">
-                <a:pos x="134" y="196"/>
-              </a:cxn>
-              <a:cxn ang="0">
-                <a:pos x="144" y="284"/>
-              </a:cxn>
-              <a:cxn ang="0">
-                <a:pos x="140" y="334"/>
-              </a:cxn>
-              <a:cxn ang="0">
-                <a:pos x="138" y="354"/>
-              </a:cxn>
-              <a:cxn ang="0">
-                <a:pos x="120" y="430"/>
-              </a:cxn>
-              <a:cxn ang="0">
-                <a:pos x="108" y="462"/>
-              </a:cxn>
-              <a:cxn ang="0">
-                <a:pos x="78" y="536"/>
-              </a:cxn>
-              <a:cxn ang="0">
-                <a:pos x="24" y="634"/>
-              </a:cxn>
-              <a:cxn ang="0">
-                <a:pos x="24" y="634"/>
-              </a:cxn>
-              <a:cxn ang="0">
-                <a:pos x="20" y="602"/>
-              </a:cxn>
-              <a:cxn ang="0">
-                <a:pos x="20" y="590"/>
-              </a:cxn>
-              <a:cxn ang="0">
-                <a:pos x="22" y="570"/>
-              </a:cxn>
-              <a:cxn ang="0">
-                <a:pos x="26" y="562"/>
-              </a:cxn>
-              <a:cxn ang="0">
-                <a:pos x="16" y="562"/>
-              </a:cxn>
-              <a:cxn ang="0">
-                <a:pos x="8" y="564"/>
-              </a:cxn>
-              <a:cxn ang="0">
-                <a:pos x="0" y="576"/>
-              </a:cxn>
-              <a:cxn ang="0">
-                <a:pos x="2" y="596"/>
-              </a:cxn>
-              <a:cxn ang="0">
-                <a:pos x="2" y="612"/>
-              </a:cxn>
-              <a:cxn ang="0">
-                <a:pos x="4" y="630"/>
-              </a:cxn>
-              <a:cxn ang="0">
-                <a:pos x="8" y="642"/>
-              </a:cxn>
-              <a:cxn ang="0">
-                <a:pos x="8" y="652"/>
-              </a:cxn>
-              <a:cxn ang="0">
-                <a:pos x="16" y="662"/>
-              </a:cxn>
-              <a:cxn ang="0">
-                <a:pos x="20" y="664"/>
-              </a:cxn>
-              <a:cxn ang="0">
-                <a:pos x="26" y="668"/>
-              </a:cxn>
-              <a:cxn ang="0">
-                <a:pos x="46" y="662"/>
-              </a:cxn>
-              <a:cxn ang="0">
-                <a:pos x="72" y="646"/>
-              </a:cxn>
-              <a:cxn ang="0">
-                <a:pos x="94" y="632"/>
-              </a:cxn>
-              <a:cxn ang="0">
-                <a:pos x="118" y="616"/>
-              </a:cxn>
-              <a:cxn ang="0">
-                <a:pos x="130" y="610"/>
-              </a:cxn>
-              <a:cxn ang="0">
-                <a:pos x="138" y="604"/>
-              </a:cxn>
-              <a:cxn ang="0">
-                <a:pos x="162" y="582"/>
-              </a:cxn>
-              <a:cxn ang="0">
-                <a:pos x="160" y="578"/>
-              </a:cxn>
-            </a:cxnLst>
-            <a:rect l="0" t="0" r="r" b="b"/>
-            <a:pathLst>
-              <a:path w="162" h="668">
-                <a:moveTo>
-                  <a:pt x="160" y="578"/>
-                </a:moveTo>
-                <a:lnTo>
-                  <a:pt x="160" y="578"/>
-                </a:lnTo>
-                <a:lnTo>
-                  <a:pt x="158" y="574"/>
-                </a:lnTo>
-                <a:lnTo>
-                  <a:pt x="158" y="574"/>
-                </a:lnTo>
-                <a:lnTo>
-                  <a:pt x="156" y="576"/>
-                </a:lnTo>
-                <a:lnTo>
-                  <a:pt x="156" y="576"/>
-                </a:lnTo>
-                <a:lnTo>
-                  <a:pt x="156" y="576"/>
-                </a:lnTo>
-                <a:lnTo>
-                  <a:pt x="156" y="576"/>
-                </a:lnTo>
-                <a:lnTo>
-                  <a:pt x="156" y="576"/>
-                </a:lnTo>
-                <a:lnTo>
-                  <a:pt x="156" y="576"/>
-                </a:lnTo>
-                <a:lnTo>
-                  <a:pt x="154" y="578"/>
-                </a:lnTo>
-                <a:lnTo>
-                  <a:pt x="152" y="578"/>
-                </a:lnTo>
-                <a:lnTo>
-                  <a:pt x="152" y="578"/>
-                </a:lnTo>
-                <a:lnTo>
-                  <a:pt x="136" y="586"/>
-                </a:lnTo>
-                <a:lnTo>
-                  <a:pt x="120" y="594"/>
-                </a:lnTo>
-                <a:lnTo>
-                  <a:pt x="120" y="594"/>
-                </a:lnTo>
-                <a:lnTo>
-                  <a:pt x="102" y="604"/>
-                </a:lnTo>
-                <a:lnTo>
-                  <a:pt x="102" y="604"/>
-                </a:lnTo>
-                <a:lnTo>
-                  <a:pt x="72" y="624"/>
-                </a:lnTo>
-                <a:lnTo>
-                  <a:pt x="72" y="624"/>
-                </a:lnTo>
-                <a:lnTo>
-                  <a:pt x="66" y="626"/>
-                </a:lnTo>
-                <a:lnTo>
-                  <a:pt x="62" y="630"/>
-                </a:lnTo>
-                <a:lnTo>
-                  <a:pt x="62" y="630"/>
-                </a:lnTo>
-                <a:lnTo>
-                  <a:pt x="56" y="632"/>
-                </a:lnTo>
-                <a:lnTo>
-                  <a:pt x="52" y="636"/>
-                </a:lnTo>
-                <a:lnTo>
-                  <a:pt x="52" y="636"/>
-                </a:lnTo>
-                <a:lnTo>
-                  <a:pt x="42" y="642"/>
-                </a:lnTo>
-                <a:lnTo>
-                  <a:pt x="30" y="650"/>
-                </a:lnTo>
-                <a:lnTo>
-                  <a:pt x="30" y="650"/>
-                </a:lnTo>
-                <a:lnTo>
-                  <a:pt x="36" y="640"/>
-                </a:lnTo>
-                <a:lnTo>
-                  <a:pt x="36" y="640"/>
-                </a:lnTo>
-                <a:lnTo>
-                  <a:pt x="58" y="608"/>
-                </a:lnTo>
-                <a:lnTo>
-                  <a:pt x="78" y="574"/>
-                </a:lnTo>
-                <a:lnTo>
-                  <a:pt x="96" y="538"/>
-                </a:lnTo>
-                <a:lnTo>
-                  <a:pt x="112" y="502"/>
-                </a:lnTo>
-                <a:lnTo>
-                  <a:pt x="112" y="502"/>
-                </a:lnTo>
-                <a:lnTo>
-                  <a:pt x="130" y="460"/>
-                </a:lnTo>
-                <a:lnTo>
-                  <a:pt x="142" y="420"/>
-                </a:lnTo>
-                <a:lnTo>
-                  <a:pt x="142" y="420"/>
-                </a:lnTo>
-                <a:lnTo>
-                  <a:pt x="152" y="382"/>
-                </a:lnTo>
-                <a:lnTo>
-                  <a:pt x="158" y="344"/>
-                </a:lnTo>
-                <a:lnTo>
-                  <a:pt x="162" y="304"/>
-                </a:lnTo>
-                <a:lnTo>
-                  <a:pt x="162" y="266"/>
-                </a:lnTo>
-                <a:lnTo>
-                  <a:pt x="162" y="266"/>
-                </a:lnTo>
-                <a:lnTo>
-                  <a:pt x="160" y="242"/>
-                </a:lnTo>
-                <a:lnTo>
-                  <a:pt x="156" y="216"/>
-                </a:lnTo>
-                <a:lnTo>
-                  <a:pt x="156" y="216"/>
-                </a:lnTo>
-                <a:lnTo>
-                  <a:pt x="156" y="204"/>
-                </a:lnTo>
-                <a:lnTo>
-                  <a:pt x="154" y="190"/>
-                </a:lnTo>
-                <a:lnTo>
-                  <a:pt x="154" y="190"/>
-                </a:lnTo>
-                <a:lnTo>
-                  <a:pt x="150" y="178"/>
-                </a:lnTo>
-                <a:lnTo>
-                  <a:pt x="150" y="178"/>
-                </a:lnTo>
-                <a:lnTo>
-                  <a:pt x="146" y="164"/>
-                </a:lnTo>
-                <a:lnTo>
-                  <a:pt x="146" y="164"/>
-                </a:lnTo>
-                <a:lnTo>
-                  <a:pt x="134" y="128"/>
-                </a:lnTo>
-                <a:lnTo>
-                  <a:pt x="118" y="90"/>
-                </a:lnTo>
-                <a:lnTo>
-                  <a:pt x="118" y="90"/>
-                </a:lnTo>
-                <a:lnTo>
-                  <a:pt x="96" y="54"/>
-                </a:lnTo>
-                <a:lnTo>
-                  <a:pt x="74" y="22"/>
-                </a:lnTo>
-                <a:lnTo>
-                  <a:pt x="74" y="22"/>
-                </a:lnTo>
-                <a:lnTo>
-                  <a:pt x="68" y="12"/>
-                </a:lnTo>
-                <a:lnTo>
-                  <a:pt x="60" y="4"/>
-                </a:lnTo>
-                <a:lnTo>
-                  <a:pt x="60" y="4"/>
-                </a:lnTo>
-                <a:lnTo>
-                  <a:pt x="54" y="0"/>
-                </a:lnTo>
-                <a:lnTo>
-                  <a:pt x="52" y="2"/>
-                </a:lnTo>
-                <a:lnTo>
-                  <a:pt x="48" y="6"/>
-                </a:lnTo>
-                <a:lnTo>
-                  <a:pt x="48" y="6"/>
-                </a:lnTo>
-                <a:lnTo>
-                  <a:pt x="48" y="10"/>
-                </a:lnTo>
-                <a:lnTo>
-                  <a:pt x="50" y="14"/>
-                </a:lnTo>
-                <a:lnTo>
-                  <a:pt x="50" y="14"/>
-                </a:lnTo>
-                <a:lnTo>
-                  <a:pt x="54" y="22"/>
-                </a:lnTo>
-                <a:lnTo>
-                  <a:pt x="58" y="28"/>
-                </a:lnTo>
-                <a:lnTo>
-                  <a:pt x="58" y="28"/>
-                </a:lnTo>
-                <a:lnTo>
-                  <a:pt x="66" y="42"/>
-                </a:lnTo>
-                <a:lnTo>
-                  <a:pt x="66" y="42"/>
-                </a:lnTo>
-                <a:lnTo>
-                  <a:pt x="82" y="70"/>
-                </a:lnTo>
-                <a:lnTo>
-                  <a:pt x="100" y="98"/>
-                </a:lnTo>
-                <a:lnTo>
-                  <a:pt x="100" y="98"/>
-                </a:lnTo>
-                <a:lnTo>
-                  <a:pt x="106" y="110"/>
-                </a:lnTo>
-                <a:lnTo>
-                  <a:pt x="110" y="124"/>
-                </a:lnTo>
-                <a:lnTo>
-                  <a:pt x="110" y="124"/>
-                </a:lnTo>
-                <a:lnTo>
-                  <a:pt x="120" y="148"/>
-                </a:lnTo>
-                <a:lnTo>
-                  <a:pt x="128" y="172"/>
-                </a:lnTo>
-                <a:lnTo>
-                  <a:pt x="134" y="196"/>
-                </a:lnTo>
-                <a:lnTo>
-                  <a:pt x="138" y="220"/>
-                </a:lnTo>
-                <a:lnTo>
-                  <a:pt x="138" y="220"/>
-                </a:lnTo>
-                <a:lnTo>
-                  <a:pt x="142" y="260"/>
-                </a:lnTo>
-                <a:lnTo>
-                  <a:pt x="144" y="284"/>
-                </a:lnTo>
-                <a:lnTo>
-                  <a:pt x="142" y="306"/>
-                </a:lnTo>
-                <a:lnTo>
-                  <a:pt x="142" y="306"/>
-                </a:lnTo>
-                <a:lnTo>
-                  <a:pt x="140" y="326"/>
-                </a:lnTo>
-                <a:lnTo>
-                  <a:pt x="140" y="334"/>
-                </a:lnTo>
-                <a:lnTo>
-                  <a:pt x="140" y="334"/>
-                </a:lnTo>
-                <a:lnTo>
-                  <a:pt x="140" y="340"/>
-                </a:lnTo>
-                <a:lnTo>
-                  <a:pt x="138" y="354"/>
-                </a:lnTo>
-                <a:lnTo>
-                  <a:pt x="138" y="354"/>
-                </a:lnTo>
-                <a:lnTo>
-                  <a:pt x="132" y="380"/>
-                </a:lnTo>
-                <a:lnTo>
-                  <a:pt x="132" y="380"/>
-                </a:lnTo>
-                <a:lnTo>
-                  <a:pt x="120" y="430"/>
-                </a:lnTo>
-                <a:lnTo>
-                  <a:pt x="120" y="430"/>
-                </a:lnTo>
-                <a:lnTo>
-                  <a:pt x="114" y="446"/>
-                </a:lnTo>
-                <a:lnTo>
-                  <a:pt x="114" y="446"/>
-                </a:lnTo>
-                <a:lnTo>
-                  <a:pt x="108" y="462"/>
-                </a:lnTo>
-                <a:lnTo>
-                  <a:pt x="108" y="462"/>
-                </a:lnTo>
-                <a:lnTo>
-                  <a:pt x="96" y="494"/>
-                </a:lnTo>
-                <a:lnTo>
-                  <a:pt x="84" y="522"/>
-                </a:lnTo>
-                <a:lnTo>
-                  <a:pt x="84" y="522"/>
-                </a:lnTo>
-                <a:lnTo>
-                  <a:pt x="78" y="536"/>
-                </a:lnTo>
-                <a:lnTo>
-                  <a:pt x="78" y="536"/>
-                </a:lnTo>
-                <a:lnTo>
-                  <a:pt x="52" y="586"/>
-                </a:lnTo>
-                <a:lnTo>
-                  <a:pt x="24" y="634"/>
-                </a:lnTo>
-                <a:lnTo>
-                  <a:pt x="24" y="634"/>
-                </a:lnTo>
-                <a:lnTo>
-                  <a:pt x="24" y="636"/>
-                </a:lnTo>
-                <a:lnTo>
-                  <a:pt x="24" y="636"/>
-                </a:lnTo>
-                <a:lnTo>
-                  <a:pt x="24" y="634"/>
-                </a:lnTo>
-                <a:lnTo>
-                  <a:pt x="24" y="634"/>
-                </a:lnTo>
-                <a:lnTo>
-                  <a:pt x="24" y="622"/>
-                </a:lnTo>
-                <a:lnTo>
-                  <a:pt x="24" y="622"/>
-                </a:lnTo>
-                <a:lnTo>
-                  <a:pt x="20" y="602"/>
-                </a:lnTo>
-                <a:lnTo>
-                  <a:pt x="20" y="602"/>
-                </a:lnTo>
-                <a:lnTo>
-                  <a:pt x="20" y="598"/>
-                </a:lnTo>
-                <a:lnTo>
-                  <a:pt x="20" y="594"/>
-                </a:lnTo>
-                <a:lnTo>
-                  <a:pt x="20" y="594"/>
-                </a:lnTo>
-                <a:lnTo>
-                  <a:pt x="20" y="590"/>
-                </a:lnTo>
-                <a:lnTo>
-                  <a:pt x="20" y="588"/>
-                </a:lnTo>
-                <a:lnTo>
-                  <a:pt x="20" y="588"/>
-                </a:lnTo>
-                <a:lnTo>
-                  <a:pt x="20" y="576"/>
-                </a:lnTo>
-                <a:lnTo>
-                  <a:pt x="22" y="570"/>
-                </a:lnTo>
-                <a:lnTo>
-                  <a:pt x="24" y="566"/>
-                </a:lnTo>
-                <a:lnTo>
-                  <a:pt x="24" y="566"/>
-                </a:lnTo>
-                <a:lnTo>
-                  <a:pt x="26" y="564"/>
-                </a:lnTo>
-                <a:lnTo>
-                  <a:pt x="26" y="562"/>
-                </a:lnTo>
-                <a:lnTo>
-                  <a:pt x="26" y="562"/>
-                </a:lnTo>
-                <a:lnTo>
-                  <a:pt x="22" y="562"/>
-                </a:lnTo>
-                <a:lnTo>
-                  <a:pt x="16" y="562"/>
-                </a:lnTo>
-                <a:lnTo>
-                  <a:pt x="16" y="562"/>
-                </a:lnTo>
-                <a:lnTo>
-                  <a:pt x="12" y="562"/>
-                </a:lnTo>
-                <a:lnTo>
-                  <a:pt x="12" y="562"/>
-                </a:lnTo>
-                <a:lnTo>
-                  <a:pt x="8" y="564"/>
-                </a:lnTo>
-                <a:lnTo>
-                  <a:pt x="8" y="564"/>
-                </a:lnTo>
-                <a:lnTo>
-                  <a:pt x="4" y="566"/>
-                </a:lnTo>
-                <a:lnTo>
-                  <a:pt x="4" y="566"/>
-                </a:lnTo>
-                <a:lnTo>
-                  <a:pt x="2" y="572"/>
-                </a:lnTo>
-                <a:lnTo>
-                  <a:pt x="0" y="576"/>
-                </a:lnTo>
-                <a:lnTo>
-                  <a:pt x="0" y="576"/>
-                </a:lnTo>
-                <a:lnTo>
-                  <a:pt x="0" y="580"/>
-                </a:lnTo>
-                <a:lnTo>
-                  <a:pt x="0" y="580"/>
-                </a:lnTo>
-                <a:lnTo>
-                  <a:pt x="2" y="596"/>
-                </a:lnTo>
-                <a:lnTo>
-                  <a:pt x="2" y="596"/>
-                </a:lnTo>
-                <a:lnTo>
-                  <a:pt x="2" y="608"/>
-                </a:lnTo>
-                <a:lnTo>
-                  <a:pt x="2" y="608"/>
-                </a:lnTo>
-                <a:lnTo>
-                  <a:pt x="2" y="612"/>
-                </a:lnTo>
-                <a:lnTo>
-                  <a:pt x="2" y="612"/>
-                </a:lnTo>
-                <a:lnTo>
-                  <a:pt x="4" y="628"/>
-                </a:lnTo>
-                <a:lnTo>
-                  <a:pt x="4" y="630"/>
-                </a:lnTo>
-                <a:lnTo>
-                  <a:pt x="4" y="630"/>
-                </a:lnTo>
-                <a:lnTo>
-                  <a:pt x="6" y="632"/>
-                </a:lnTo>
-                <a:lnTo>
-                  <a:pt x="6" y="632"/>
-                </a:lnTo>
-                <a:lnTo>
-                  <a:pt x="6" y="638"/>
-                </a:lnTo>
-                <a:lnTo>
-                  <a:pt x="8" y="642"/>
-                </a:lnTo>
-                <a:lnTo>
-                  <a:pt x="8" y="642"/>
-                </a:lnTo>
-                <a:lnTo>
-                  <a:pt x="6" y="644"/>
-                </a:lnTo>
-                <a:lnTo>
-                  <a:pt x="6" y="644"/>
-                </a:lnTo>
-                <a:lnTo>
-                  <a:pt x="8" y="652"/>
-                </a:lnTo>
-                <a:lnTo>
-                  <a:pt x="12" y="660"/>
-                </a:lnTo>
-                <a:lnTo>
-                  <a:pt x="12" y="660"/>
-                </a:lnTo>
-                <a:lnTo>
-                  <a:pt x="16" y="662"/>
-                </a:lnTo>
-                <a:lnTo>
-                  <a:pt x="16" y="662"/>
-                </a:lnTo>
-                <a:lnTo>
-                  <a:pt x="16" y="664"/>
-                </a:lnTo>
-                <a:lnTo>
-                  <a:pt x="16" y="664"/>
-                </a:lnTo>
-                <a:lnTo>
-                  <a:pt x="20" y="664"/>
-                </a:lnTo>
-                <a:lnTo>
-                  <a:pt x="20" y="664"/>
-                </a:lnTo>
-                <a:lnTo>
-                  <a:pt x="22" y="666"/>
-                </a:lnTo>
-                <a:lnTo>
-                  <a:pt x="22" y="666"/>
-                </a:lnTo>
-                <a:lnTo>
-                  <a:pt x="26" y="668"/>
-                </a:lnTo>
-                <a:lnTo>
-                  <a:pt x="26" y="668"/>
-                </a:lnTo>
-                <a:lnTo>
-                  <a:pt x="30" y="668"/>
-                </a:lnTo>
-                <a:lnTo>
-                  <a:pt x="30" y="668"/>
-                </a:lnTo>
-                <a:lnTo>
-                  <a:pt x="40" y="666"/>
-                </a:lnTo>
-                <a:lnTo>
-                  <a:pt x="46" y="662"/>
-                </a:lnTo>
-                <a:lnTo>
-                  <a:pt x="46" y="662"/>
-                </a:lnTo>
-                <a:lnTo>
-                  <a:pt x="52" y="660"/>
-                </a:lnTo>
-                <a:lnTo>
-                  <a:pt x="52" y="660"/>
-                </a:lnTo>
-                <a:lnTo>
-                  <a:pt x="72" y="646"/>
-                </a:lnTo>
-                <a:lnTo>
-                  <a:pt x="72" y="646"/>
-                </a:lnTo>
-                <a:lnTo>
-                  <a:pt x="90" y="634"/>
-                </a:lnTo>
-                <a:lnTo>
-                  <a:pt x="90" y="634"/>
-                </a:lnTo>
-                <a:lnTo>
-                  <a:pt x="94" y="632"/>
-                </a:lnTo>
-                <a:lnTo>
-                  <a:pt x="94" y="632"/>
-                </a:lnTo>
-                <a:lnTo>
-                  <a:pt x="116" y="618"/>
-                </a:lnTo>
-                <a:lnTo>
-                  <a:pt x="116" y="618"/>
-                </a:lnTo>
-                <a:lnTo>
-                  <a:pt x="118" y="616"/>
-                </a:lnTo>
-                <a:lnTo>
-                  <a:pt x="118" y="616"/>
-                </a:lnTo>
-                <a:lnTo>
-                  <a:pt x="122" y="614"/>
-                </a:lnTo>
-                <a:lnTo>
-                  <a:pt x="122" y="614"/>
-                </a:lnTo>
-                <a:lnTo>
-                  <a:pt x="130" y="610"/>
-                </a:lnTo>
-                <a:lnTo>
-                  <a:pt x="136" y="606"/>
-                </a:lnTo>
-                <a:lnTo>
-                  <a:pt x="136" y="606"/>
-                </a:lnTo>
-                <a:lnTo>
-                  <a:pt x="138" y="604"/>
-                </a:lnTo>
-                <a:lnTo>
-                  <a:pt x="138" y="604"/>
-                </a:lnTo>
-                <a:lnTo>
-                  <a:pt x="150" y="596"/>
-                </a:lnTo>
-                <a:lnTo>
-                  <a:pt x="160" y="588"/>
-                </a:lnTo>
-                <a:lnTo>
-                  <a:pt x="160" y="588"/>
-                </a:lnTo>
-                <a:lnTo>
-                  <a:pt x="162" y="582"/>
-                </a:lnTo>
-                <a:lnTo>
-                  <a:pt x="162" y="582"/>
-                </a:lnTo>
-                <a:lnTo>
-                  <a:pt x="162" y="580"/>
-                </a:lnTo>
-                <a:lnTo>
-                  <a:pt x="160" y="578"/>
-                </a:lnTo>
-                <a:lnTo>
-                  <a:pt x="160" y="578"/>
-                </a:lnTo>
-                <a:close/>
-              </a:path>
-            </a:pathLst>
-          </a:custGeom>
-          <a:solidFill>
-            <a:schemeClr val="accent3">
-              <a:lumMod val="60000"/>
-              <a:lumOff val="40000"/>
-            </a:schemeClr>
-          </a:solidFill>
-          <a:ln w="9525" cap="flat" cmpd="sng" algn="ctr">
+            </a:prstGeom>
+            <a:noFill/>
+          </p:spPr>
+          <p:txBody>
+            <a:bodyPr wrap="none" rtlCol="0">
+              <a:spAutoFit/>
+            </a:bodyPr>
+            <a:lstStyle/>
+            <a:p>
+              <a:r>
+                <a:rPr lang="en-US" sz="2000" b="1" dirty="0">
+                  <a:highlight>
+                    <a:srgbClr val="A1EEBD"/>
+                  </a:highlight>
+                  <a:latin typeface="Apple SD Gothic Neo" panose="02000300000000000000" pitchFamily="2" charset="-127"/>
+                  <a:ea typeface="Apple SD Gothic Neo" panose="02000300000000000000" pitchFamily="2" charset="-127"/>
+                </a:rPr>
+                <a:t>Pretentious text</a:t>
+              </a:r>
+              <a:br>
+                <a:rPr lang="en-US" sz="2000" b="1" dirty="0">
+                  <a:highlight>
+                    <a:srgbClr val="A1EEBD"/>
+                  </a:highlight>
+                  <a:latin typeface="Apple SD Gothic Neo" panose="02000300000000000000" pitchFamily="2" charset="-127"/>
+                  <a:ea typeface="Apple SD Gothic Neo" panose="02000300000000000000" pitchFamily="2" charset="-127"/>
+                </a:rPr>
+              </a:br>
+              <a:r>
+                <a:rPr lang="en-US" sz="2000" b="1" dirty="0">
+                  <a:highlight>
+                    <a:srgbClr val="A1EEBD"/>
+                  </a:highlight>
+                  <a:latin typeface="Apple SD Gothic Neo" panose="02000300000000000000" pitchFamily="2" charset="-127"/>
+                  <a:ea typeface="Apple SD Gothic Neo" panose="02000300000000000000" pitchFamily="2" charset="-127"/>
+                </a:rPr>
+                <a:t>is greyed out</a:t>
+              </a:r>
+            </a:p>
+          </p:txBody>
+        </p:sp>
+        <p:sp>
+          <p:nvSpPr>
+            <p:cNvPr id="8" name="Freeform 72">
+              <a:extLst>
+                <a:ext uri="{FF2B5EF4-FFF2-40B4-BE49-F238E27FC236}">
+                  <a16:creationId xmlns:a16="http://schemas.microsoft.com/office/drawing/2014/main" id="{CE99A475-0192-EC71-F401-1BFAEBCE21E8}"/>
+                </a:ext>
+              </a:extLst>
+            </p:cNvPr>
+            <p:cNvSpPr>
+              <a:spLocks/>
+            </p:cNvSpPr>
+            <p:nvPr/>
+          </p:nvSpPr>
+          <p:spPr bwMode="auto">
+            <a:xfrm rot="14660993">
+              <a:off x="2657449" y="2919816"/>
+              <a:ext cx="572024" cy="2048154"/>
+            </a:xfrm>
+            <a:custGeom>
+              <a:avLst/>
+              <a:gdLst/>
+              <a:ahLst/>
+              <a:cxnLst>
+                <a:cxn ang="0">
+                  <a:pos x="158" y="574"/>
+                </a:cxn>
+                <a:cxn ang="0">
+                  <a:pos x="156" y="576"/>
+                </a:cxn>
+                <a:cxn ang="0">
+                  <a:pos x="152" y="578"/>
+                </a:cxn>
+                <a:cxn ang="0">
+                  <a:pos x="120" y="594"/>
+                </a:cxn>
+                <a:cxn ang="0">
+                  <a:pos x="72" y="624"/>
+                </a:cxn>
+                <a:cxn ang="0">
+                  <a:pos x="56" y="632"/>
+                </a:cxn>
+                <a:cxn ang="0">
+                  <a:pos x="30" y="650"/>
+                </a:cxn>
+                <a:cxn ang="0">
+                  <a:pos x="58" y="608"/>
+                </a:cxn>
+                <a:cxn ang="0">
+                  <a:pos x="112" y="502"/>
+                </a:cxn>
+                <a:cxn ang="0">
+                  <a:pos x="152" y="382"/>
+                </a:cxn>
+                <a:cxn ang="0">
+                  <a:pos x="162" y="266"/>
+                </a:cxn>
+                <a:cxn ang="0">
+                  <a:pos x="156" y="204"/>
+                </a:cxn>
+                <a:cxn ang="0">
+                  <a:pos x="150" y="178"/>
+                </a:cxn>
+                <a:cxn ang="0">
+                  <a:pos x="118" y="90"/>
+                </a:cxn>
+                <a:cxn ang="0">
+                  <a:pos x="74" y="22"/>
+                </a:cxn>
+                <a:cxn ang="0">
+                  <a:pos x="54" y="0"/>
+                </a:cxn>
+                <a:cxn ang="0">
+                  <a:pos x="48" y="10"/>
+                </a:cxn>
+                <a:cxn ang="0">
+                  <a:pos x="58" y="28"/>
+                </a:cxn>
+                <a:cxn ang="0">
+                  <a:pos x="82" y="70"/>
+                </a:cxn>
+                <a:cxn ang="0">
+                  <a:pos x="110" y="124"/>
+                </a:cxn>
+                <a:cxn ang="0">
+                  <a:pos x="134" y="196"/>
+                </a:cxn>
+                <a:cxn ang="0">
+                  <a:pos x="144" y="284"/>
+                </a:cxn>
+                <a:cxn ang="0">
+                  <a:pos x="140" y="334"/>
+                </a:cxn>
+                <a:cxn ang="0">
+                  <a:pos x="138" y="354"/>
+                </a:cxn>
+                <a:cxn ang="0">
+                  <a:pos x="120" y="430"/>
+                </a:cxn>
+                <a:cxn ang="0">
+                  <a:pos x="108" y="462"/>
+                </a:cxn>
+                <a:cxn ang="0">
+                  <a:pos x="78" y="536"/>
+                </a:cxn>
+                <a:cxn ang="0">
+                  <a:pos x="24" y="634"/>
+                </a:cxn>
+                <a:cxn ang="0">
+                  <a:pos x="24" y="634"/>
+                </a:cxn>
+                <a:cxn ang="0">
+                  <a:pos x="20" y="602"/>
+                </a:cxn>
+                <a:cxn ang="0">
+                  <a:pos x="20" y="590"/>
+                </a:cxn>
+                <a:cxn ang="0">
+                  <a:pos x="22" y="570"/>
+                </a:cxn>
+                <a:cxn ang="0">
+                  <a:pos x="26" y="562"/>
+                </a:cxn>
+                <a:cxn ang="0">
+                  <a:pos x="16" y="562"/>
+                </a:cxn>
+                <a:cxn ang="0">
+                  <a:pos x="8" y="564"/>
+                </a:cxn>
+                <a:cxn ang="0">
+                  <a:pos x="0" y="576"/>
+                </a:cxn>
+                <a:cxn ang="0">
+                  <a:pos x="2" y="596"/>
+                </a:cxn>
+                <a:cxn ang="0">
+                  <a:pos x="2" y="612"/>
+                </a:cxn>
+                <a:cxn ang="0">
+                  <a:pos x="4" y="630"/>
+                </a:cxn>
+                <a:cxn ang="0">
+                  <a:pos x="8" y="642"/>
+                </a:cxn>
+                <a:cxn ang="0">
+                  <a:pos x="8" y="652"/>
+                </a:cxn>
+                <a:cxn ang="0">
+                  <a:pos x="16" y="662"/>
+                </a:cxn>
+                <a:cxn ang="0">
+                  <a:pos x="20" y="664"/>
+                </a:cxn>
+                <a:cxn ang="0">
+                  <a:pos x="26" y="668"/>
+                </a:cxn>
+                <a:cxn ang="0">
+                  <a:pos x="46" y="662"/>
+                </a:cxn>
+                <a:cxn ang="0">
+                  <a:pos x="72" y="646"/>
+                </a:cxn>
+                <a:cxn ang="0">
+                  <a:pos x="94" y="632"/>
+                </a:cxn>
+                <a:cxn ang="0">
+                  <a:pos x="118" y="616"/>
+                </a:cxn>
+                <a:cxn ang="0">
+                  <a:pos x="130" y="610"/>
+                </a:cxn>
+                <a:cxn ang="0">
+                  <a:pos x="138" y="604"/>
+                </a:cxn>
+                <a:cxn ang="0">
+                  <a:pos x="162" y="582"/>
+                </a:cxn>
+                <a:cxn ang="0">
+                  <a:pos x="160" y="578"/>
+                </a:cxn>
+              </a:cxnLst>
+              <a:rect l="0" t="0" r="r" b="b"/>
+              <a:pathLst>
+                <a:path w="162" h="668">
+                  <a:moveTo>
+                    <a:pt x="160" y="578"/>
+                  </a:moveTo>
+                  <a:lnTo>
+                    <a:pt x="160" y="578"/>
+                  </a:lnTo>
+                  <a:lnTo>
+                    <a:pt x="158" y="574"/>
+                  </a:lnTo>
+                  <a:lnTo>
+                    <a:pt x="158" y="574"/>
+                  </a:lnTo>
+                  <a:lnTo>
+                    <a:pt x="156" y="576"/>
+                  </a:lnTo>
+                  <a:lnTo>
+                    <a:pt x="156" y="576"/>
+                  </a:lnTo>
+                  <a:lnTo>
+                    <a:pt x="156" y="576"/>
+                  </a:lnTo>
+                  <a:lnTo>
+                    <a:pt x="156" y="576"/>
+                  </a:lnTo>
+                  <a:lnTo>
+                    <a:pt x="156" y="576"/>
+                  </a:lnTo>
+                  <a:lnTo>
+                    <a:pt x="156" y="576"/>
+                  </a:lnTo>
+                  <a:lnTo>
+                    <a:pt x="154" y="578"/>
+                  </a:lnTo>
+                  <a:lnTo>
+                    <a:pt x="152" y="578"/>
+                  </a:lnTo>
+                  <a:lnTo>
+                    <a:pt x="152" y="578"/>
+                  </a:lnTo>
+                  <a:lnTo>
+                    <a:pt x="136" y="586"/>
+                  </a:lnTo>
+                  <a:lnTo>
+                    <a:pt x="120" y="594"/>
+                  </a:lnTo>
+                  <a:lnTo>
+                    <a:pt x="120" y="594"/>
+                  </a:lnTo>
+                  <a:lnTo>
+                    <a:pt x="102" y="604"/>
+                  </a:lnTo>
+                  <a:lnTo>
+                    <a:pt x="102" y="604"/>
+                  </a:lnTo>
+                  <a:lnTo>
+                    <a:pt x="72" y="624"/>
+                  </a:lnTo>
+                  <a:lnTo>
+                    <a:pt x="72" y="624"/>
+                  </a:lnTo>
+                  <a:lnTo>
+                    <a:pt x="66" y="626"/>
+                  </a:lnTo>
+                  <a:lnTo>
+                    <a:pt x="62" y="630"/>
+                  </a:lnTo>
+                  <a:lnTo>
+                    <a:pt x="62" y="630"/>
+                  </a:lnTo>
+                  <a:lnTo>
+                    <a:pt x="56" y="632"/>
+                  </a:lnTo>
+                  <a:lnTo>
+                    <a:pt x="52" y="636"/>
+                  </a:lnTo>
+                  <a:lnTo>
+                    <a:pt x="52" y="636"/>
+                  </a:lnTo>
+                  <a:lnTo>
+                    <a:pt x="42" y="642"/>
+                  </a:lnTo>
+                  <a:lnTo>
+                    <a:pt x="30" y="650"/>
+                  </a:lnTo>
+                  <a:lnTo>
+                    <a:pt x="30" y="650"/>
+                  </a:lnTo>
+                  <a:lnTo>
+                    <a:pt x="36" y="640"/>
+                  </a:lnTo>
+                  <a:lnTo>
+                    <a:pt x="36" y="640"/>
+                  </a:lnTo>
+                  <a:lnTo>
+                    <a:pt x="58" y="608"/>
+                  </a:lnTo>
+                  <a:lnTo>
+                    <a:pt x="78" y="574"/>
+                  </a:lnTo>
+                  <a:lnTo>
+                    <a:pt x="96" y="538"/>
+                  </a:lnTo>
+                  <a:lnTo>
+                    <a:pt x="112" y="502"/>
+                  </a:lnTo>
+                  <a:lnTo>
+                    <a:pt x="112" y="502"/>
+                  </a:lnTo>
+                  <a:lnTo>
+                    <a:pt x="130" y="460"/>
+                  </a:lnTo>
+                  <a:lnTo>
+                    <a:pt x="142" y="420"/>
+                  </a:lnTo>
+                  <a:lnTo>
+                    <a:pt x="142" y="420"/>
+                  </a:lnTo>
+                  <a:lnTo>
+                    <a:pt x="152" y="382"/>
+                  </a:lnTo>
+                  <a:lnTo>
+                    <a:pt x="158" y="344"/>
+                  </a:lnTo>
+                  <a:lnTo>
+                    <a:pt x="162" y="304"/>
+                  </a:lnTo>
+                  <a:lnTo>
+                    <a:pt x="162" y="266"/>
+                  </a:lnTo>
+                  <a:lnTo>
+                    <a:pt x="162" y="266"/>
+                  </a:lnTo>
+                  <a:lnTo>
+                    <a:pt x="160" y="242"/>
+                  </a:lnTo>
+                  <a:lnTo>
+                    <a:pt x="156" y="216"/>
+                  </a:lnTo>
+                  <a:lnTo>
+                    <a:pt x="156" y="216"/>
+                  </a:lnTo>
+                  <a:lnTo>
+                    <a:pt x="156" y="204"/>
+                  </a:lnTo>
+                  <a:lnTo>
+                    <a:pt x="154" y="190"/>
+                  </a:lnTo>
+                  <a:lnTo>
+                    <a:pt x="154" y="190"/>
+                  </a:lnTo>
+                  <a:lnTo>
+                    <a:pt x="150" y="178"/>
+                  </a:lnTo>
+                  <a:lnTo>
+                    <a:pt x="150" y="178"/>
+                  </a:lnTo>
+                  <a:lnTo>
+                    <a:pt x="146" y="164"/>
+                  </a:lnTo>
+                  <a:lnTo>
+                    <a:pt x="146" y="164"/>
+                  </a:lnTo>
+                  <a:lnTo>
+                    <a:pt x="134" y="128"/>
+                  </a:lnTo>
+                  <a:lnTo>
+                    <a:pt x="118" y="90"/>
+                  </a:lnTo>
+                  <a:lnTo>
+                    <a:pt x="118" y="90"/>
+                  </a:lnTo>
+                  <a:lnTo>
+                    <a:pt x="96" y="54"/>
+                  </a:lnTo>
+                  <a:lnTo>
+                    <a:pt x="74" y="22"/>
+                  </a:lnTo>
+                  <a:lnTo>
+                    <a:pt x="74" y="22"/>
+                  </a:lnTo>
+                  <a:lnTo>
+                    <a:pt x="68" y="12"/>
+                  </a:lnTo>
+                  <a:lnTo>
+                    <a:pt x="60" y="4"/>
+                  </a:lnTo>
+                  <a:lnTo>
+                    <a:pt x="60" y="4"/>
+                  </a:lnTo>
+                  <a:lnTo>
+                    <a:pt x="54" y="0"/>
+                  </a:lnTo>
+                  <a:lnTo>
+                    <a:pt x="52" y="2"/>
+                  </a:lnTo>
+                  <a:lnTo>
+                    <a:pt x="48" y="6"/>
+                  </a:lnTo>
+                  <a:lnTo>
+                    <a:pt x="48" y="6"/>
+                  </a:lnTo>
+                  <a:lnTo>
+                    <a:pt x="48" y="10"/>
+                  </a:lnTo>
+                  <a:lnTo>
+                    <a:pt x="50" y="14"/>
+                  </a:lnTo>
+                  <a:lnTo>
+                    <a:pt x="50" y="14"/>
+                  </a:lnTo>
+                  <a:lnTo>
+                    <a:pt x="54" y="22"/>
+                  </a:lnTo>
+                  <a:lnTo>
+                    <a:pt x="58" y="28"/>
+                  </a:lnTo>
+                  <a:lnTo>
+                    <a:pt x="58" y="28"/>
+                  </a:lnTo>
+                  <a:lnTo>
+                    <a:pt x="66" y="42"/>
+                  </a:lnTo>
+                  <a:lnTo>
+                    <a:pt x="66" y="42"/>
+                  </a:lnTo>
+                  <a:lnTo>
+                    <a:pt x="82" y="70"/>
+                  </a:lnTo>
+                  <a:lnTo>
+                    <a:pt x="100" y="98"/>
+                  </a:lnTo>
+                  <a:lnTo>
+                    <a:pt x="100" y="98"/>
+                  </a:lnTo>
+                  <a:lnTo>
+                    <a:pt x="106" y="110"/>
+                  </a:lnTo>
+                  <a:lnTo>
+                    <a:pt x="110" y="124"/>
+                  </a:lnTo>
+                  <a:lnTo>
+                    <a:pt x="110" y="124"/>
+                  </a:lnTo>
+                  <a:lnTo>
+                    <a:pt x="120" y="148"/>
+                  </a:lnTo>
+                  <a:lnTo>
+                    <a:pt x="128" y="172"/>
+                  </a:lnTo>
+                  <a:lnTo>
+                    <a:pt x="134" y="196"/>
+                  </a:lnTo>
+                  <a:lnTo>
+                    <a:pt x="138" y="220"/>
+                  </a:lnTo>
+                  <a:lnTo>
+                    <a:pt x="138" y="220"/>
+                  </a:lnTo>
+                  <a:lnTo>
+                    <a:pt x="142" y="260"/>
+                  </a:lnTo>
+                  <a:lnTo>
+                    <a:pt x="144" y="284"/>
+                  </a:lnTo>
+                  <a:lnTo>
+                    <a:pt x="142" y="306"/>
+                  </a:lnTo>
+                  <a:lnTo>
+                    <a:pt x="142" y="306"/>
+                  </a:lnTo>
+                  <a:lnTo>
+                    <a:pt x="140" y="326"/>
+                  </a:lnTo>
+                  <a:lnTo>
+                    <a:pt x="140" y="334"/>
+                  </a:lnTo>
+                  <a:lnTo>
+                    <a:pt x="140" y="334"/>
+                  </a:lnTo>
+                  <a:lnTo>
+                    <a:pt x="140" y="340"/>
+                  </a:lnTo>
+                  <a:lnTo>
+                    <a:pt x="138" y="354"/>
+                  </a:lnTo>
+                  <a:lnTo>
+                    <a:pt x="138" y="354"/>
+                  </a:lnTo>
+                  <a:lnTo>
+                    <a:pt x="132" y="380"/>
+                  </a:lnTo>
+                  <a:lnTo>
+                    <a:pt x="132" y="380"/>
+                  </a:lnTo>
+                  <a:lnTo>
+                    <a:pt x="120" y="430"/>
+                  </a:lnTo>
+                  <a:lnTo>
+                    <a:pt x="120" y="430"/>
+                  </a:lnTo>
+                  <a:lnTo>
+                    <a:pt x="114" y="446"/>
+                  </a:lnTo>
+                  <a:lnTo>
+                    <a:pt x="114" y="446"/>
+                  </a:lnTo>
+                  <a:lnTo>
+                    <a:pt x="108" y="462"/>
+                  </a:lnTo>
+                  <a:lnTo>
+                    <a:pt x="108" y="462"/>
+                  </a:lnTo>
+                  <a:lnTo>
+                    <a:pt x="96" y="494"/>
+                  </a:lnTo>
+                  <a:lnTo>
+                    <a:pt x="84" y="522"/>
+                  </a:lnTo>
+                  <a:lnTo>
+                    <a:pt x="84" y="522"/>
+                  </a:lnTo>
+                  <a:lnTo>
+                    <a:pt x="78" y="536"/>
+                  </a:lnTo>
+                  <a:lnTo>
+                    <a:pt x="78" y="536"/>
+                  </a:lnTo>
+                  <a:lnTo>
+                    <a:pt x="52" y="586"/>
+                  </a:lnTo>
+                  <a:lnTo>
+                    <a:pt x="24" y="634"/>
+                  </a:lnTo>
+                  <a:lnTo>
+                    <a:pt x="24" y="634"/>
+                  </a:lnTo>
+                  <a:lnTo>
+                    <a:pt x="24" y="636"/>
+                  </a:lnTo>
+                  <a:lnTo>
+                    <a:pt x="24" y="636"/>
+                  </a:lnTo>
+                  <a:lnTo>
+                    <a:pt x="24" y="634"/>
+                  </a:lnTo>
+                  <a:lnTo>
+                    <a:pt x="24" y="634"/>
+                  </a:lnTo>
+                  <a:lnTo>
+                    <a:pt x="24" y="622"/>
+                  </a:lnTo>
+                  <a:lnTo>
+                    <a:pt x="24" y="622"/>
+                  </a:lnTo>
+                  <a:lnTo>
+                    <a:pt x="20" y="602"/>
+                  </a:lnTo>
+                  <a:lnTo>
+                    <a:pt x="20" y="602"/>
+                  </a:lnTo>
+                  <a:lnTo>
+                    <a:pt x="20" y="598"/>
+                  </a:lnTo>
+                  <a:lnTo>
+                    <a:pt x="20" y="594"/>
+                  </a:lnTo>
+                  <a:lnTo>
+                    <a:pt x="20" y="594"/>
+                  </a:lnTo>
+                  <a:lnTo>
+                    <a:pt x="20" y="590"/>
+                  </a:lnTo>
+                  <a:lnTo>
+                    <a:pt x="20" y="588"/>
+                  </a:lnTo>
+                  <a:lnTo>
+                    <a:pt x="20" y="588"/>
+                  </a:lnTo>
+                  <a:lnTo>
+                    <a:pt x="20" y="576"/>
+                  </a:lnTo>
+                  <a:lnTo>
+                    <a:pt x="22" y="570"/>
+                  </a:lnTo>
+                  <a:lnTo>
+                    <a:pt x="24" y="566"/>
+                  </a:lnTo>
+                  <a:lnTo>
+                    <a:pt x="24" y="566"/>
+                  </a:lnTo>
+                  <a:lnTo>
+                    <a:pt x="26" y="564"/>
+                  </a:lnTo>
+                  <a:lnTo>
+                    <a:pt x="26" y="562"/>
+                  </a:lnTo>
+                  <a:lnTo>
+                    <a:pt x="26" y="562"/>
+                  </a:lnTo>
+                  <a:lnTo>
+                    <a:pt x="22" y="562"/>
+                  </a:lnTo>
+                  <a:lnTo>
+                    <a:pt x="16" y="562"/>
+                  </a:lnTo>
+                  <a:lnTo>
+                    <a:pt x="16" y="562"/>
+                  </a:lnTo>
+                  <a:lnTo>
+                    <a:pt x="12" y="562"/>
+                  </a:lnTo>
+                  <a:lnTo>
+                    <a:pt x="12" y="562"/>
+                  </a:lnTo>
+                  <a:lnTo>
+                    <a:pt x="8" y="564"/>
+                  </a:lnTo>
+                  <a:lnTo>
+                    <a:pt x="8" y="564"/>
+                  </a:lnTo>
+                  <a:lnTo>
+                    <a:pt x="4" y="566"/>
+                  </a:lnTo>
+                  <a:lnTo>
+                    <a:pt x="4" y="566"/>
+                  </a:lnTo>
+                  <a:lnTo>
+                    <a:pt x="2" y="572"/>
+                  </a:lnTo>
+                  <a:lnTo>
+                    <a:pt x="0" y="576"/>
+                  </a:lnTo>
+                  <a:lnTo>
+                    <a:pt x="0" y="576"/>
+                  </a:lnTo>
+                  <a:lnTo>
+                    <a:pt x="0" y="580"/>
+                  </a:lnTo>
+                  <a:lnTo>
+                    <a:pt x="0" y="580"/>
+                  </a:lnTo>
+                  <a:lnTo>
+                    <a:pt x="2" y="596"/>
+                  </a:lnTo>
+                  <a:lnTo>
+                    <a:pt x="2" y="596"/>
+                  </a:lnTo>
+                  <a:lnTo>
+                    <a:pt x="2" y="608"/>
+                  </a:lnTo>
+                  <a:lnTo>
+                    <a:pt x="2" y="608"/>
+                  </a:lnTo>
+                  <a:lnTo>
+                    <a:pt x="2" y="612"/>
+                  </a:lnTo>
+                  <a:lnTo>
+                    <a:pt x="2" y="612"/>
+                  </a:lnTo>
+                  <a:lnTo>
+                    <a:pt x="4" y="628"/>
+                  </a:lnTo>
+                  <a:lnTo>
+                    <a:pt x="4" y="630"/>
+                  </a:lnTo>
+                  <a:lnTo>
+                    <a:pt x="4" y="630"/>
+                  </a:lnTo>
+                  <a:lnTo>
+                    <a:pt x="6" y="632"/>
+                  </a:lnTo>
+                  <a:lnTo>
+                    <a:pt x="6" y="632"/>
+                  </a:lnTo>
+                  <a:lnTo>
+                    <a:pt x="6" y="638"/>
+                  </a:lnTo>
+                  <a:lnTo>
+                    <a:pt x="8" y="642"/>
+                  </a:lnTo>
+                  <a:lnTo>
+                    <a:pt x="8" y="642"/>
+                  </a:lnTo>
+                  <a:lnTo>
+                    <a:pt x="6" y="644"/>
+                  </a:lnTo>
+                  <a:lnTo>
+                    <a:pt x="6" y="644"/>
+                  </a:lnTo>
+                  <a:lnTo>
+                    <a:pt x="8" y="652"/>
+                  </a:lnTo>
+                  <a:lnTo>
+                    <a:pt x="12" y="660"/>
+                  </a:lnTo>
+                  <a:lnTo>
+                    <a:pt x="12" y="660"/>
+                  </a:lnTo>
+                  <a:lnTo>
+                    <a:pt x="16" y="662"/>
+                  </a:lnTo>
+                  <a:lnTo>
+                    <a:pt x="16" y="662"/>
+                  </a:lnTo>
+                  <a:lnTo>
+                    <a:pt x="16" y="664"/>
+                  </a:lnTo>
+                  <a:lnTo>
+                    <a:pt x="16" y="664"/>
+                  </a:lnTo>
+                  <a:lnTo>
+                    <a:pt x="20" y="664"/>
+                  </a:lnTo>
+                  <a:lnTo>
+                    <a:pt x="20" y="664"/>
+                  </a:lnTo>
+                  <a:lnTo>
+                    <a:pt x="22" y="666"/>
+                  </a:lnTo>
+                  <a:lnTo>
+                    <a:pt x="22" y="666"/>
+                  </a:lnTo>
+                  <a:lnTo>
+                    <a:pt x="26" y="668"/>
+                  </a:lnTo>
+                  <a:lnTo>
+                    <a:pt x="26" y="668"/>
+                  </a:lnTo>
+                  <a:lnTo>
+                    <a:pt x="30" y="668"/>
+                  </a:lnTo>
+                  <a:lnTo>
+                    <a:pt x="30" y="668"/>
+                  </a:lnTo>
+                  <a:lnTo>
+                    <a:pt x="40" y="666"/>
+                  </a:lnTo>
+                  <a:lnTo>
+                    <a:pt x="46" y="662"/>
+                  </a:lnTo>
+                  <a:lnTo>
+                    <a:pt x="46" y="662"/>
+                  </a:lnTo>
+                  <a:lnTo>
+                    <a:pt x="52" y="660"/>
+                  </a:lnTo>
+                  <a:lnTo>
+                    <a:pt x="52" y="660"/>
+                  </a:lnTo>
+                  <a:lnTo>
+                    <a:pt x="72" y="646"/>
+                  </a:lnTo>
+                  <a:lnTo>
+                    <a:pt x="72" y="646"/>
+                  </a:lnTo>
+                  <a:lnTo>
+                    <a:pt x="90" y="634"/>
+                  </a:lnTo>
+                  <a:lnTo>
+                    <a:pt x="90" y="634"/>
+                  </a:lnTo>
+                  <a:lnTo>
+                    <a:pt x="94" y="632"/>
+                  </a:lnTo>
+                  <a:lnTo>
+                    <a:pt x="94" y="632"/>
+                  </a:lnTo>
+                  <a:lnTo>
+                    <a:pt x="116" y="618"/>
+                  </a:lnTo>
+                  <a:lnTo>
+                    <a:pt x="116" y="618"/>
+                  </a:lnTo>
+                  <a:lnTo>
+                    <a:pt x="118" y="616"/>
+                  </a:lnTo>
+                  <a:lnTo>
+                    <a:pt x="118" y="616"/>
+                  </a:lnTo>
+                  <a:lnTo>
+                    <a:pt x="122" y="614"/>
+                  </a:lnTo>
+                  <a:lnTo>
+                    <a:pt x="122" y="614"/>
+                  </a:lnTo>
+                  <a:lnTo>
+                    <a:pt x="130" y="610"/>
+                  </a:lnTo>
+                  <a:lnTo>
+                    <a:pt x="136" y="606"/>
+                  </a:lnTo>
+                  <a:lnTo>
+                    <a:pt x="136" y="606"/>
+                  </a:lnTo>
+                  <a:lnTo>
+                    <a:pt x="138" y="604"/>
+                  </a:lnTo>
+                  <a:lnTo>
+                    <a:pt x="138" y="604"/>
+                  </a:lnTo>
+                  <a:lnTo>
+                    <a:pt x="150" y="596"/>
+                  </a:lnTo>
+                  <a:lnTo>
+                    <a:pt x="160" y="588"/>
+                  </a:lnTo>
+                  <a:lnTo>
+                    <a:pt x="160" y="588"/>
+                  </a:lnTo>
+                  <a:lnTo>
+                    <a:pt x="162" y="582"/>
+                  </a:lnTo>
+                  <a:lnTo>
+                    <a:pt x="162" y="582"/>
+                  </a:lnTo>
+                  <a:lnTo>
+                    <a:pt x="162" y="580"/>
+                  </a:lnTo>
+                  <a:lnTo>
+                    <a:pt x="160" y="578"/>
+                  </a:lnTo>
+                  <a:lnTo>
+                    <a:pt x="160" y="578"/>
+                  </a:lnTo>
+                  <a:close/>
+                </a:path>
+              </a:pathLst>
+            </a:custGeom>
             <a:solidFill>
-              <a:schemeClr val="accent3">
-                <a:lumMod val="60000"/>
-                <a:lumOff val="40000"/>
-              </a:schemeClr>
+              <a:srgbClr val="A1EEBD"/>
             </a:solidFill>
-            <a:prstDash val="solid"/>
-            <a:round/>
-            <a:headEnd type="none" w="med" len="med"/>
-            <a:tailEnd type="none" w="med" len="med"/>
-          </a:ln>
-        </p:spPr>
-        <p:txBody>
-          <a:bodyPr vert="horz" wrap="square" lIns="121728" tIns="60864" rIns="121728" bIns="60864" numCol="1" anchor="t" anchorCtr="0" compatLnSpc="1">
-            <a:prstTxWarp prst="textNoShape">
+            <a:ln w="9525" cap="flat" cmpd="sng" algn="ctr">
+              <a:solidFill>
+                <a:srgbClr val="A1EEBD"/>
+              </a:solidFill>
+              <a:prstDash val="solid"/>
+              <a:round/>
+              <a:headEnd type="none" w="med" len="med"/>
+              <a:tailEnd type="none" w="med" len="med"/>
+            </a:ln>
+          </p:spPr>
+          <p:txBody>
+            <a:bodyPr vert="horz" wrap="square" lIns="121728" tIns="60864" rIns="121728" bIns="60864" numCol="1" anchor="t" anchorCtr="0" compatLnSpc="1">
+              <a:prstTxWarp prst="textNoShape">
+                <a:avLst/>
+              </a:prstTxWarp>
+            </a:bodyPr>
+            <a:lstStyle/>
+            <a:p>
+              <a:endParaRPr lang="en-US" sz="2396"/>
+            </a:p>
+          </p:txBody>
+        </p:sp>
+        <p:sp>
+          <p:nvSpPr>
+            <p:cNvPr id="9" name="TextBox 8">
+              <a:extLst>
+                <a:ext uri="{FF2B5EF4-FFF2-40B4-BE49-F238E27FC236}">
+                  <a16:creationId xmlns:a16="http://schemas.microsoft.com/office/drawing/2014/main" id="{F70884CF-2F68-F1F2-52AB-CCE0561D0E25}"/>
+                </a:ext>
+              </a:extLst>
+            </p:cNvPr>
+            <p:cNvSpPr txBox="1"/>
+            <p:nvPr/>
+          </p:nvSpPr>
+          <p:spPr>
+            <a:xfrm>
+              <a:off x="888796" y="4539324"/>
+              <a:ext cx="2287806" cy="707886"/>
+            </a:xfrm>
+            <a:prstGeom prst="rect">
               <a:avLst/>
-            </a:prstTxWarp>
-          </a:bodyPr>
-          <a:lstStyle/>
-          <a:p>
-            <a:endParaRPr lang="en-US" sz="2396"/>
-          </a:p>
-        </p:txBody>
-      </p:sp>
-      <p:sp>
-        <p:nvSpPr>
-          <p:cNvPr id="9" name="TextBox 8">
-            <a:extLst>
-              <a:ext uri="{FF2B5EF4-FFF2-40B4-BE49-F238E27FC236}">
-                <a16:creationId xmlns:a16="http://schemas.microsoft.com/office/drawing/2014/main" id="{F70884CF-2F68-F1F2-52AB-CCE0561D0E25}"/>
-              </a:ext>
-            </a:extLst>
-          </p:cNvPr>
-          <p:cNvSpPr txBox="1"/>
-          <p:nvPr/>
-        </p:nvSpPr>
-        <p:spPr>
-          <a:xfrm>
-            <a:off x="888796" y="4539324"/>
-            <a:ext cx="2287806" cy="707886"/>
-          </a:xfrm>
-          <a:prstGeom prst="rect">
-            <a:avLst/>
-          </a:prstGeom>
-          <a:noFill/>
-        </p:spPr>
-        <p:txBody>
-          <a:bodyPr wrap="none" rtlCol="0">
-            <a:spAutoFit/>
-          </a:bodyPr>
-          <a:lstStyle/>
-          <a:p>
-            <a:r>
-              <a:rPr lang="en-US" sz="2000" b="1" dirty="0">
-                <a:highlight>
-                  <a:srgbClr val="47D45A"/>
-                </a:highlight>
-                <a:latin typeface="Apple SD Gothic Neo" panose="02000300000000000000" pitchFamily="2" charset="-127"/>
-                <a:ea typeface="Apple SD Gothic Neo" panose="02000300000000000000" pitchFamily="2" charset="-127"/>
-              </a:rPr>
-              <a:t>Irrelevant selfie is </a:t>
-            </a:r>
-            <a:br>
-              <a:rPr lang="en-US" sz="2000" b="1" dirty="0">
-                <a:highlight>
-                  <a:srgbClr val="47D45A"/>
-                </a:highlight>
-                <a:latin typeface="Apple SD Gothic Neo" panose="02000300000000000000" pitchFamily="2" charset="-127"/>
-                <a:ea typeface="Apple SD Gothic Neo" panose="02000300000000000000" pitchFamily="2" charset="-127"/>
-              </a:rPr>
-            </a:br>
-            <a:r>
-              <a:rPr lang="en-US" sz="2000" b="1" dirty="0">
-                <a:highlight>
-                  <a:srgbClr val="47D45A"/>
-                </a:highlight>
-                <a:latin typeface="Apple SD Gothic Neo" panose="02000300000000000000" pitchFamily="2" charset="-127"/>
-                <a:ea typeface="Apple SD Gothic Neo" panose="02000300000000000000" pitchFamily="2" charset="-127"/>
-              </a:rPr>
-              <a:t>replaced with pig</a:t>
-            </a:r>
-          </a:p>
-        </p:txBody>
-      </p:sp>
-      <p:sp>
-        <p:nvSpPr>
-          <p:cNvPr id="10" name="Freeform 72">
-            <a:extLst>
-              <a:ext uri="{FF2B5EF4-FFF2-40B4-BE49-F238E27FC236}">
-                <a16:creationId xmlns:a16="http://schemas.microsoft.com/office/drawing/2014/main" id="{074F114F-F13B-2DBF-6DEA-6D95F50789A5}"/>
-              </a:ext>
-            </a:extLst>
-          </p:cNvPr>
-          <p:cNvSpPr>
-            <a:spLocks/>
-          </p:cNvSpPr>
-          <p:nvPr/>
-        </p:nvSpPr>
-        <p:spPr bwMode="auto">
-          <a:xfrm rot="6939007" flipH="1">
-            <a:off x="9288025" y="2562465"/>
-            <a:ext cx="572024" cy="2048154"/>
-          </a:xfrm>
-          <a:custGeom>
-            <a:avLst/>
-            <a:gdLst/>
-            <a:ahLst/>
-            <a:cxnLst>
-              <a:cxn ang="0">
-                <a:pos x="158" y="574"/>
-              </a:cxn>
-              <a:cxn ang="0">
-                <a:pos x="156" y="576"/>
-              </a:cxn>
-              <a:cxn ang="0">
-                <a:pos x="152" y="578"/>
-              </a:cxn>
-              <a:cxn ang="0">
-                <a:pos x="120" y="594"/>
-              </a:cxn>
-              <a:cxn ang="0">
-                <a:pos x="72" y="624"/>
-              </a:cxn>
-              <a:cxn ang="0">
-                <a:pos x="56" y="632"/>
-              </a:cxn>
-              <a:cxn ang="0">
-                <a:pos x="30" y="650"/>
-              </a:cxn>
-              <a:cxn ang="0">
-                <a:pos x="58" y="608"/>
-              </a:cxn>
-              <a:cxn ang="0">
-                <a:pos x="112" y="502"/>
-              </a:cxn>
-              <a:cxn ang="0">
-                <a:pos x="152" y="382"/>
-              </a:cxn>
-              <a:cxn ang="0">
-                <a:pos x="162" y="266"/>
-              </a:cxn>
-              <a:cxn ang="0">
-                <a:pos x="156" y="204"/>
-              </a:cxn>
-              <a:cxn ang="0">
-                <a:pos x="150" y="178"/>
-              </a:cxn>
-              <a:cxn ang="0">
-                <a:pos x="118" y="90"/>
-              </a:cxn>
-              <a:cxn ang="0">
-                <a:pos x="74" y="22"/>
-              </a:cxn>
-              <a:cxn ang="0">
-                <a:pos x="54" y="0"/>
-              </a:cxn>
-              <a:cxn ang="0">
-                <a:pos x="48" y="10"/>
-              </a:cxn>
-              <a:cxn ang="0">
-                <a:pos x="58" y="28"/>
-              </a:cxn>
-              <a:cxn ang="0">
-                <a:pos x="82" y="70"/>
-              </a:cxn>
-              <a:cxn ang="0">
-                <a:pos x="110" y="124"/>
-              </a:cxn>
-              <a:cxn ang="0">
-                <a:pos x="134" y="196"/>
-              </a:cxn>
-              <a:cxn ang="0">
-                <a:pos x="144" y="284"/>
-              </a:cxn>
-              <a:cxn ang="0">
-                <a:pos x="140" y="334"/>
-              </a:cxn>
-              <a:cxn ang="0">
-                <a:pos x="138" y="354"/>
-              </a:cxn>
-              <a:cxn ang="0">
-                <a:pos x="120" y="430"/>
-              </a:cxn>
-              <a:cxn ang="0">
-                <a:pos x="108" y="462"/>
-              </a:cxn>
-              <a:cxn ang="0">
-                <a:pos x="78" y="536"/>
-              </a:cxn>
-              <a:cxn ang="0">
-                <a:pos x="24" y="634"/>
-              </a:cxn>
-              <a:cxn ang="0">
-                <a:pos x="24" y="634"/>
-              </a:cxn>
-              <a:cxn ang="0">
-                <a:pos x="20" y="602"/>
-              </a:cxn>
-              <a:cxn ang="0">
-                <a:pos x="20" y="590"/>
-              </a:cxn>
-              <a:cxn ang="0">
-                <a:pos x="22" y="570"/>
-              </a:cxn>
-              <a:cxn ang="0">
-                <a:pos x="26" y="562"/>
-              </a:cxn>
-              <a:cxn ang="0">
-                <a:pos x="16" y="562"/>
-              </a:cxn>
-              <a:cxn ang="0">
-                <a:pos x="8" y="564"/>
-              </a:cxn>
-              <a:cxn ang="0">
-                <a:pos x="0" y="576"/>
-              </a:cxn>
-              <a:cxn ang="0">
-                <a:pos x="2" y="596"/>
-              </a:cxn>
-              <a:cxn ang="0">
-                <a:pos x="2" y="612"/>
-              </a:cxn>
-              <a:cxn ang="0">
-                <a:pos x="4" y="630"/>
-              </a:cxn>
-              <a:cxn ang="0">
-                <a:pos x="8" y="642"/>
-              </a:cxn>
-              <a:cxn ang="0">
-                <a:pos x="8" y="652"/>
-              </a:cxn>
-              <a:cxn ang="0">
-                <a:pos x="16" y="662"/>
-              </a:cxn>
-              <a:cxn ang="0">
-                <a:pos x="20" y="664"/>
-              </a:cxn>
-              <a:cxn ang="0">
-                <a:pos x="26" y="668"/>
-              </a:cxn>
-              <a:cxn ang="0">
-                <a:pos x="46" y="662"/>
-              </a:cxn>
-              <a:cxn ang="0">
-                <a:pos x="72" y="646"/>
-              </a:cxn>
-              <a:cxn ang="0">
-                <a:pos x="94" y="632"/>
-              </a:cxn>
-              <a:cxn ang="0">
-                <a:pos x="118" y="616"/>
-              </a:cxn>
-              <a:cxn ang="0">
-                <a:pos x="130" y="610"/>
-              </a:cxn>
-              <a:cxn ang="0">
-                <a:pos x="138" y="604"/>
-              </a:cxn>
-              <a:cxn ang="0">
-                <a:pos x="162" y="582"/>
-              </a:cxn>
-              <a:cxn ang="0">
-                <a:pos x="160" y="578"/>
-              </a:cxn>
-            </a:cxnLst>
-            <a:rect l="0" t="0" r="r" b="b"/>
-            <a:pathLst>
-              <a:path w="162" h="668">
-                <a:moveTo>
-                  <a:pt x="160" y="578"/>
-                </a:moveTo>
-                <a:lnTo>
-                  <a:pt x="160" y="578"/>
-                </a:lnTo>
-                <a:lnTo>
-                  <a:pt x="158" y="574"/>
-                </a:lnTo>
-                <a:lnTo>
-                  <a:pt x="158" y="574"/>
-                </a:lnTo>
-                <a:lnTo>
-                  <a:pt x="156" y="576"/>
-                </a:lnTo>
-                <a:lnTo>
-                  <a:pt x="156" y="576"/>
-                </a:lnTo>
-                <a:lnTo>
-                  <a:pt x="156" y="576"/>
-                </a:lnTo>
-                <a:lnTo>
-                  <a:pt x="156" y="576"/>
-                </a:lnTo>
-                <a:lnTo>
-                  <a:pt x="156" y="576"/>
-                </a:lnTo>
-                <a:lnTo>
-                  <a:pt x="156" y="576"/>
-                </a:lnTo>
-                <a:lnTo>
-                  <a:pt x="154" y="578"/>
-                </a:lnTo>
-                <a:lnTo>
-                  <a:pt x="152" y="578"/>
-                </a:lnTo>
-                <a:lnTo>
-                  <a:pt x="152" y="578"/>
-                </a:lnTo>
-                <a:lnTo>
-                  <a:pt x="136" y="586"/>
-                </a:lnTo>
-                <a:lnTo>
-                  <a:pt x="120" y="594"/>
-                </a:lnTo>
-                <a:lnTo>
-                  <a:pt x="120" y="594"/>
-                </a:lnTo>
-                <a:lnTo>
-                  <a:pt x="102" y="604"/>
-                </a:lnTo>
-                <a:lnTo>
-                  <a:pt x="102" y="604"/>
-                </a:lnTo>
-                <a:lnTo>
-                  <a:pt x="72" y="624"/>
-                </a:lnTo>
-                <a:lnTo>
-                  <a:pt x="72" y="624"/>
-                </a:lnTo>
-                <a:lnTo>
-                  <a:pt x="66" y="626"/>
-                </a:lnTo>
-                <a:lnTo>
-                  <a:pt x="62" y="630"/>
-                </a:lnTo>
-                <a:lnTo>
-                  <a:pt x="62" y="630"/>
-                </a:lnTo>
-                <a:lnTo>
-                  <a:pt x="56" y="632"/>
-                </a:lnTo>
-                <a:lnTo>
-                  <a:pt x="52" y="636"/>
-                </a:lnTo>
-                <a:lnTo>
-                  <a:pt x="52" y="636"/>
-                </a:lnTo>
-                <a:lnTo>
-                  <a:pt x="42" y="642"/>
-                </a:lnTo>
-                <a:lnTo>
-                  <a:pt x="30" y="650"/>
-                </a:lnTo>
-                <a:lnTo>
-                  <a:pt x="30" y="650"/>
-                </a:lnTo>
-                <a:lnTo>
-                  <a:pt x="36" y="640"/>
-                </a:lnTo>
-                <a:lnTo>
-                  <a:pt x="36" y="640"/>
-                </a:lnTo>
-                <a:lnTo>
-                  <a:pt x="58" y="608"/>
-                </a:lnTo>
-                <a:lnTo>
-                  <a:pt x="78" y="574"/>
-                </a:lnTo>
-                <a:lnTo>
-                  <a:pt x="96" y="538"/>
-                </a:lnTo>
-                <a:lnTo>
-                  <a:pt x="112" y="502"/>
-                </a:lnTo>
-                <a:lnTo>
-                  <a:pt x="112" y="502"/>
-                </a:lnTo>
-                <a:lnTo>
-                  <a:pt x="130" y="460"/>
-                </a:lnTo>
-                <a:lnTo>
-                  <a:pt x="142" y="420"/>
-                </a:lnTo>
-                <a:lnTo>
-                  <a:pt x="142" y="420"/>
-                </a:lnTo>
-                <a:lnTo>
-                  <a:pt x="152" y="382"/>
-                </a:lnTo>
-                <a:lnTo>
-                  <a:pt x="158" y="344"/>
-                </a:lnTo>
-                <a:lnTo>
-                  <a:pt x="162" y="304"/>
-                </a:lnTo>
-                <a:lnTo>
-                  <a:pt x="162" y="266"/>
-                </a:lnTo>
-                <a:lnTo>
-                  <a:pt x="162" y="266"/>
-                </a:lnTo>
-                <a:lnTo>
-                  <a:pt x="160" y="242"/>
-                </a:lnTo>
-                <a:lnTo>
-                  <a:pt x="156" y="216"/>
-                </a:lnTo>
-                <a:lnTo>
-                  <a:pt x="156" y="216"/>
-                </a:lnTo>
-                <a:lnTo>
-                  <a:pt x="156" y="204"/>
-                </a:lnTo>
-                <a:lnTo>
-                  <a:pt x="154" y="190"/>
-                </a:lnTo>
-                <a:lnTo>
-                  <a:pt x="154" y="190"/>
-                </a:lnTo>
-                <a:lnTo>
-                  <a:pt x="150" y="178"/>
-                </a:lnTo>
-                <a:lnTo>
-                  <a:pt x="150" y="178"/>
-                </a:lnTo>
-                <a:lnTo>
-                  <a:pt x="146" y="164"/>
-                </a:lnTo>
-                <a:lnTo>
-                  <a:pt x="146" y="164"/>
-                </a:lnTo>
-                <a:lnTo>
-                  <a:pt x="134" y="128"/>
-                </a:lnTo>
-                <a:lnTo>
-                  <a:pt x="118" y="90"/>
-                </a:lnTo>
-                <a:lnTo>
-                  <a:pt x="118" y="90"/>
-                </a:lnTo>
-                <a:lnTo>
-                  <a:pt x="96" y="54"/>
-                </a:lnTo>
-                <a:lnTo>
-                  <a:pt x="74" y="22"/>
-                </a:lnTo>
-                <a:lnTo>
-                  <a:pt x="74" y="22"/>
-                </a:lnTo>
-                <a:lnTo>
-                  <a:pt x="68" y="12"/>
-                </a:lnTo>
-                <a:lnTo>
-                  <a:pt x="60" y="4"/>
-                </a:lnTo>
-                <a:lnTo>
-                  <a:pt x="60" y="4"/>
-                </a:lnTo>
-                <a:lnTo>
-                  <a:pt x="54" y="0"/>
-                </a:lnTo>
-                <a:lnTo>
-                  <a:pt x="52" y="2"/>
-                </a:lnTo>
-                <a:lnTo>
-                  <a:pt x="48" y="6"/>
-                </a:lnTo>
-                <a:lnTo>
-                  <a:pt x="48" y="6"/>
-                </a:lnTo>
-                <a:lnTo>
-                  <a:pt x="48" y="10"/>
-                </a:lnTo>
-                <a:lnTo>
-                  <a:pt x="50" y="14"/>
-                </a:lnTo>
-                <a:lnTo>
-                  <a:pt x="50" y="14"/>
-                </a:lnTo>
-                <a:lnTo>
-                  <a:pt x="54" y="22"/>
-                </a:lnTo>
-                <a:lnTo>
-                  <a:pt x="58" y="28"/>
-                </a:lnTo>
-                <a:lnTo>
-                  <a:pt x="58" y="28"/>
-                </a:lnTo>
-                <a:lnTo>
-                  <a:pt x="66" y="42"/>
-                </a:lnTo>
-                <a:lnTo>
-                  <a:pt x="66" y="42"/>
-                </a:lnTo>
-                <a:lnTo>
-                  <a:pt x="82" y="70"/>
-                </a:lnTo>
-                <a:lnTo>
-                  <a:pt x="100" y="98"/>
-                </a:lnTo>
-                <a:lnTo>
-                  <a:pt x="100" y="98"/>
-                </a:lnTo>
-                <a:lnTo>
-                  <a:pt x="106" y="110"/>
-                </a:lnTo>
-                <a:lnTo>
-                  <a:pt x="110" y="124"/>
-                </a:lnTo>
-                <a:lnTo>
-                  <a:pt x="110" y="124"/>
-                </a:lnTo>
-                <a:lnTo>
-                  <a:pt x="120" y="148"/>
-                </a:lnTo>
-                <a:lnTo>
-                  <a:pt x="128" y="172"/>
-                </a:lnTo>
-                <a:lnTo>
-                  <a:pt x="134" y="196"/>
-                </a:lnTo>
-                <a:lnTo>
-                  <a:pt x="138" y="220"/>
-                </a:lnTo>
-                <a:lnTo>
-                  <a:pt x="138" y="220"/>
-                </a:lnTo>
-                <a:lnTo>
-                  <a:pt x="142" y="260"/>
-                </a:lnTo>
-                <a:lnTo>
-                  <a:pt x="144" y="284"/>
-                </a:lnTo>
-                <a:lnTo>
-                  <a:pt x="142" y="306"/>
-                </a:lnTo>
-                <a:lnTo>
-                  <a:pt x="142" y="306"/>
-                </a:lnTo>
-                <a:lnTo>
-                  <a:pt x="140" y="326"/>
-                </a:lnTo>
-                <a:lnTo>
-                  <a:pt x="140" y="334"/>
-                </a:lnTo>
-                <a:lnTo>
-                  <a:pt x="140" y="334"/>
-                </a:lnTo>
-                <a:lnTo>
-                  <a:pt x="140" y="340"/>
-                </a:lnTo>
-                <a:lnTo>
-                  <a:pt x="138" y="354"/>
-                </a:lnTo>
-                <a:lnTo>
-                  <a:pt x="138" y="354"/>
-                </a:lnTo>
-                <a:lnTo>
-                  <a:pt x="132" y="380"/>
-                </a:lnTo>
-                <a:lnTo>
-                  <a:pt x="132" y="380"/>
-                </a:lnTo>
-                <a:lnTo>
-                  <a:pt x="120" y="430"/>
-                </a:lnTo>
-                <a:lnTo>
-                  <a:pt x="120" y="430"/>
-                </a:lnTo>
-                <a:lnTo>
-                  <a:pt x="114" y="446"/>
-                </a:lnTo>
-                <a:lnTo>
-                  <a:pt x="114" y="446"/>
-                </a:lnTo>
-                <a:lnTo>
-                  <a:pt x="108" y="462"/>
-                </a:lnTo>
-                <a:lnTo>
-                  <a:pt x="108" y="462"/>
-                </a:lnTo>
-                <a:lnTo>
-                  <a:pt x="96" y="494"/>
-                </a:lnTo>
-                <a:lnTo>
-                  <a:pt x="84" y="522"/>
-                </a:lnTo>
-                <a:lnTo>
-                  <a:pt x="84" y="522"/>
-                </a:lnTo>
-                <a:lnTo>
-                  <a:pt x="78" y="536"/>
-                </a:lnTo>
-                <a:lnTo>
-                  <a:pt x="78" y="536"/>
-                </a:lnTo>
-                <a:lnTo>
-                  <a:pt x="52" y="586"/>
-                </a:lnTo>
-                <a:lnTo>
-                  <a:pt x="24" y="634"/>
-                </a:lnTo>
-                <a:lnTo>
-                  <a:pt x="24" y="634"/>
-                </a:lnTo>
-                <a:lnTo>
-                  <a:pt x="24" y="636"/>
-                </a:lnTo>
-                <a:lnTo>
-                  <a:pt x="24" y="636"/>
-                </a:lnTo>
-                <a:lnTo>
-                  <a:pt x="24" y="634"/>
-                </a:lnTo>
-                <a:lnTo>
-                  <a:pt x="24" y="634"/>
-                </a:lnTo>
-                <a:lnTo>
-                  <a:pt x="24" y="622"/>
-                </a:lnTo>
-                <a:lnTo>
-                  <a:pt x="24" y="622"/>
-                </a:lnTo>
-                <a:lnTo>
-                  <a:pt x="20" y="602"/>
-                </a:lnTo>
-                <a:lnTo>
-                  <a:pt x="20" y="602"/>
-                </a:lnTo>
-                <a:lnTo>
-                  <a:pt x="20" y="598"/>
-                </a:lnTo>
-                <a:lnTo>
-                  <a:pt x="20" y="594"/>
-                </a:lnTo>
-                <a:lnTo>
-                  <a:pt x="20" y="594"/>
-                </a:lnTo>
-                <a:lnTo>
-                  <a:pt x="20" y="590"/>
-                </a:lnTo>
-                <a:lnTo>
-                  <a:pt x="20" y="588"/>
-                </a:lnTo>
-                <a:lnTo>
-                  <a:pt x="20" y="588"/>
-                </a:lnTo>
-                <a:lnTo>
-                  <a:pt x="20" y="576"/>
-                </a:lnTo>
-                <a:lnTo>
-                  <a:pt x="22" y="570"/>
-                </a:lnTo>
-                <a:lnTo>
-                  <a:pt x="24" y="566"/>
-                </a:lnTo>
-                <a:lnTo>
-                  <a:pt x="24" y="566"/>
-                </a:lnTo>
-                <a:lnTo>
-                  <a:pt x="26" y="564"/>
-                </a:lnTo>
-                <a:lnTo>
-                  <a:pt x="26" y="562"/>
-                </a:lnTo>
-                <a:lnTo>
-                  <a:pt x="26" y="562"/>
-                </a:lnTo>
-                <a:lnTo>
-                  <a:pt x="22" y="562"/>
-                </a:lnTo>
-                <a:lnTo>
-                  <a:pt x="16" y="562"/>
-                </a:lnTo>
-                <a:lnTo>
-                  <a:pt x="16" y="562"/>
-                </a:lnTo>
-                <a:lnTo>
-                  <a:pt x="12" y="562"/>
-                </a:lnTo>
-                <a:lnTo>
-                  <a:pt x="12" y="562"/>
-                </a:lnTo>
-                <a:lnTo>
-                  <a:pt x="8" y="564"/>
-                </a:lnTo>
-                <a:lnTo>
-                  <a:pt x="8" y="564"/>
-                </a:lnTo>
-                <a:lnTo>
-                  <a:pt x="4" y="566"/>
-                </a:lnTo>
-                <a:lnTo>
-                  <a:pt x="4" y="566"/>
-                </a:lnTo>
-                <a:lnTo>
-                  <a:pt x="2" y="572"/>
-                </a:lnTo>
-                <a:lnTo>
-                  <a:pt x="0" y="576"/>
-                </a:lnTo>
-                <a:lnTo>
-                  <a:pt x="0" y="576"/>
-                </a:lnTo>
-                <a:lnTo>
-                  <a:pt x="0" y="580"/>
-                </a:lnTo>
-                <a:lnTo>
-                  <a:pt x="0" y="580"/>
-                </a:lnTo>
-                <a:lnTo>
-                  <a:pt x="2" y="596"/>
-                </a:lnTo>
-                <a:lnTo>
-                  <a:pt x="2" y="596"/>
-                </a:lnTo>
-                <a:lnTo>
-                  <a:pt x="2" y="608"/>
-                </a:lnTo>
-                <a:lnTo>
-                  <a:pt x="2" y="608"/>
-                </a:lnTo>
-                <a:lnTo>
-                  <a:pt x="2" y="612"/>
-                </a:lnTo>
-                <a:lnTo>
-                  <a:pt x="2" y="612"/>
-                </a:lnTo>
-                <a:lnTo>
-                  <a:pt x="4" y="628"/>
-                </a:lnTo>
-                <a:lnTo>
-                  <a:pt x="4" y="630"/>
-                </a:lnTo>
-                <a:lnTo>
-                  <a:pt x="4" y="630"/>
-                </a:lnTo>
-                <a:lnTo>
-                  <a:pt x="6" y="632"/>
-                </a:lnTo>
-                <a:lnTo>
-                  <a:pt x="6" y="632"/>
-                </a:lnTo>
-                <a:lnTo>
-                  <a:pt x="6" y="638"/>
-                </a:lnTo>
-                <a:lnTo>
-                  <a:pt x="8" y="642"/>
-                </a:lnTo>
-                <a:lnTo>
-                  <a:pt x="8" y="642"/>
-                </a:lnTo>
-                <a:lnTo>
-                  <a:pt x="6" y="644"/>
-                </a:lnTo>
-                <a:lnTo>
-                  <a:pt x="6" y="644"/>
-                </a:lnTo>
-                <a:lnTo>
-                  <a:pt x="8" y="652"/>
-                </a:lnTo>
-                <a:lnTo>
-                  <a:pt x="12" y="660"/>
-                </a:lnTo>
-                <a:lnTo>
-                  <a:pt x="12" y="660"/>
-                </a:lnTo>
-                <a:lnTo>
-                  <a:pt x="16" y="662"/>
-                </a:lnTo>
-                <a:lnTo>
-                  <a:pt x="16" y="662"/>
-                </a:lnTo>
-                <a:lnTo>
-                  <a:pt x="16" y="664"/>
-                </a:lnTo>
-                <a:lnTo>
-                  <a:pt x="16" y="664"/>
-                </a:lnTo>
-                <a:lnTo>
-                  <a:pt x="20" y="664"/>
-                </a:lnTo>
-                <a:lnTo>
-                  <a:pt x="20" y="664"/>
-                </a:lnTo>
-                <a:lnTo>
-                  <a:pt x="22" y="666"/>
-                </a:lnTo>
-                <a:lnTo>
-                  <a:pt x="22" y="666"/>
-                </a:lnTo>
-                <a:lnTo>
-                  <a:pt x="26" y="668"/>
-                </a:lnTo>
-                <a:lnTo>
-                  <a:pt x="26" y="668"/>
-                </a:lnTo>
-                <a:lnTo>
-                  <a:pt x="30" y="668"/>
-                </a:lnTo>
-                <a:lnTo>
-                  <a:pt x="30" y="668"/>
-                </a:lnTo>
-                <a:lnTo>
-                  <a:pt x="40" y="666"/>
-                </a:lnTo>
-                <a:lnTo>
-                  <a:pt x="46" y="662"/>
-                </a:lnTo>
-                <a:lnTo>
-                  <a:pt x="46" y="662"/>
-                </a:lnTo>
-                <a:lnTo>
-                  <a:pt x="52" y="660"/>
-                </a:lnTo>
-                <a:lnTo>
-                  <a:pt x="52" y="660"/>
-                </a:lnTo>
-                <a:lnTo>
-                  <a:pt x="72" y="646"/>
-                </a:lnTo>
-                <a:lnTo>
-                  <a:pt x="72" y="646"/>
-                </a:lnTo>
-                <a:lnTo>
-                  <a:pt x="90" y="634"/>
-                </a:lnTo>
-                <a:lnTo>
-                  <a:pt x="90" y="634"/>
-                </a:lnTo>
-                <a:lnTo>
-                  <a:pt x="94" y="632"/>
-                </a:lnTo>
-                <a:lnTo>
-                  <a:pt x="94" y="632"/>
-                </a:lnTo>
-                <a:lnTo>
-                  <a:pt x="116" y="618"/>
-                </a:lnTo>
-                <a:lnTo>
-                  <a:pt x="116" y="618"/>
-                </a:lnTo>
-                <a:lnTo>
-                  <a:pt x="118" y="616"/>
-                </a:lnTo>
-                <a:lnTo>
-                  <a:pt x="118" y="616"/>
-                </a:lnTo>
-                <a:lnTo>
-                  <a:pt x="122" y="614"/>
-                </a:lnTo>
-                <a:lnTo>
-                  <a:pt x="122" y="614"/>
-                </a:lnTo>
-                <a:lnTo>
-                  <a:pt x="130" y="610"/>
-                </a:lnTo>
-                <a:lnTo>
-                  <a:pt x="136" y="606"/>
-                </a:lnTo>
-                <a:lnTo>
-                  <a:pt x="136" y="606"/>
-                </a:lnTo>
-                <a:lnTo>
-                  <a:pt x="138" y="604"/>
-                </a:lnTo>
-                <a:lnTo>
-                  <a:pt x="138" y="604"/>
-                </a:lnTo>
-                <a:lnTo>
-                  <a:pt x="150" y="596"/>
-                </a:lnTo>
-                <a:lnTo>
-                  <a:pt x="160" y="588"/>
-                </a:lnTo>
-                <a:lnTo>
-                  <a:pt x="160" y="588"/>
-                </a:lnTo>
-                <a:lnTo>
-                  <a:pt x="162" y="582"/>
-                </a:lnTo>
-                <a:lnTo>
-                  <a:pt x="162" y="582"/>
-                </a:lnTo>
-                <a:lnTo>
-                  <a:pt x="162" y="580"/>
-                </a:lnTo>
-                <a:lnTo>
-                  <a:pt x="160" y="578"/>
-                </a:lnTo>
-                <a:lnTo>
-                  <a:pt x="160" y="578"/>
-                </a:lnTo>
-                <a:close/>
-              </a:path>
-            </a:pathLst>
-          </a:custGeom>
-          <a:solidFill>
-            <a:schemeClr val="accent3">
-              <a:lumMod val="60000"/>
-              <a:lumOff val="40000"/>
-            </a:schemeClr>
-          </a:solidFill>
-          <a:ln w="9525" cap="flat" cmpd="sng" algn="ctr">
+            </a:prstGeom>
+            <a:noFill/>
+          </p:spPr>
+          <p:txBody>
+            <a:bodyPr wrap="none" rtlCol="0">
+              <a:spAutoFit/>
+            </a:bodyPr>
+            <a:lstStyle/>
+            <a:p>
+              <a:r>
+                <a:rPr lang="en-US" sz="2000" b="1" dirty="0">
+                  <a:highlight>
+                    <a:srgbClr val="A1EEBD"/>
+                  </a:highlight>
+                  <a:latin typeface="Apple SD Gothic Neo" panose="02000300000000000000" pitchFamily="2" charset="-127"/>
+                  <a:ea typeface="Apple SD Gothic Neo" panose="02000300000000000000" pitchFamily="2" charset="-127"/>
+                </a:rPr>
+                <a:t>Irrelevant selfie is </a:t>
+              </a:r>
+              <a:br>
+                <a:rPr lang="en-US" sz="2000" b="1" dirty="0">
+                  <a:highlight>
+                    <a:srgbClr val="A1EEBD"/>
+                  </a:highlight>
+                  <a:latin typeface="Apple SD Gothic Neo" panose="02000300000000000000" pitchFamily="2" charset="-127"/>
+                  <a:ea typeface="Apple SD Gothic Neo" panose="02000300000000000000" pitchFamily="2" charset="-127"/>
+                </a:rPr>
+              </a:br>
+              <a:r>
+                <a:rPr lang="en-US" sz="2000" b="1" dirty="0">
+                  <a:highlight>
+                    <a:srgbClr val="A1EEBD"/>
+                  </a:highlight>
+                  <a:latin typeface="Apple SD Gothic Neo" panose="02000300000000000000" pitchFamily="2" charset="-127"/>
+                  <a:ea typeface="Apple SD Gothic Neo" panose="02000300000000000000" pitchFamily="2" charset="-127"/>
+                </a:rPr>
+                <a:t>replaced with pig</a:t>
+              </a:r>
+            </a:p>
+          </p:txBody>
+        </p:sp>
+        <p:sp>
+          <p:nvSpPr>
+            <p:cNvPr id="10" name="Freeform 72">
+              <a:extLst>
+                <a:ext uri="{FF2B5EF4-FFF2-40B4-BE49-F238E27FC236}">
+                  <a16:creationId xmlns:a16="http://schemas.microsoft.com/office/drawing/2014/main" id="{074F114F-F13B-2DBF-6DEA-6D95F50789A5}"/>
+                </a:ext>
+              </a:extLst>
+            </p:cNvPr>
+            <p:cNvSpPr>
+              <a:spLocks/>
+            </p:cNvSpPr>
+            <p:nvPr/>
+          </p:nvSpPr>
+          <p:spPr bwMode="auto">
+            <a:xfrm rot="6939007" flipH="1">
+              <a:off x="9288025" y="2562465"/>
+              <a:ext cx="572024" cy="2048154"/>
+            </a:xfrm>
+            <a:custGeom>
+              <a:avLst/>
+              <a:gdLst/>
+              <a:ahLst/>
+              <a:cxnLst>
+                <a:cxn ang="0">
+                  <a:pos x="158" y="574"/>
+                </a:cxn>
+                <a:cxn ang="0">
+                  <a:pos x="156" y="576"/>
+                </a:cxn>
+                <a:cxn ang="0">
+                  <a:pos x="152" y="578"/>
+                </a:cxn>
+                <a:cxn ang="0">
+                  <a:pos x="120" y="594"/>
+                </a:cxn>
+                <a:cxn ang="0">
+                  <a:pos x="72" y="624"/>
+                </a:cxn>
+                <a:cxn ang="0">
+                  <a:pos x="56" y="632"/>
+                </a:cxn>
+                <a:cxn ang="0">
+                  <a:pos x="30" y="650"/>
+                </a:cxn>
+                <a:cxn ang="0">
+                  <a:pos x="58" y="608"/>
+                </a:cxn>
+                <a:cxn ang="0">
+                  <a:pos x="112" y="502"/>
+                </a:cxn>
+                <a:cxn ang="0">
+                  <a:pos x="152" y="382"/>
+                </a:cxn>
+                <a:cxn ang="0">
+                  <a:pos x="162" y="266"/>
+                </a:cxn>
+                <a:cxn ang="0">
+                  <a:pos x="156" y="204"/>
+                </a:cxn>
+                <a:cxn ang="0">
+                  <a:pos x="150" y="178"/>
+                </a:cxn>
+                <a:cxn ang="0">
+                  <a:pos x="118" y="90"/>
+                </a:cxn>
+                <a:cxn ang="0">
+                  <a:pos x="74" y="22"/>
+                </a:cxn>
+                <a:cxn ang="0">
+                  <a:pos x="54" y="0"/>
+                </a:cxn>
+                <a:cxn ang="0">
+                  <a:pos x="48" y="10"/>
+                </a:cxn>
+                <a:cxn ang="0">
+                  <a:pos x="58" y="28"/>
+                </a:cxn>
+                <a:cxn ang="0">
+                  <a:pos x="82" y="70"/>
+                </a:cxn>
+                <a:cxn ang="0">
+                  <a:pos x="110" y="124"/>
+                </a:cxn>
+                <a:cxn ang="0">
+                  <a:pos x="134" y="196"/>
+                </a:cxn>
+                <a:cxn ang="0">
+                  <a:pos x="144" y="284"/>
+                </a:cxn>
+                <a:cxn ang="0">
+                  <a:pos x="140" y="334"/>
+                </a:cxn>
+                <a:cxn ang="0">
+                  <a:pos x="138" y="354"/>
+                </a:cxn>
+                <a:cxn ang="0">
+                  <a:pos x="120" y="430"/>
+                </a:cxn>
+                <a:cxn ang="0">
+                  <a:pos x="108" y="462"/>
+                </a:cxn>
+                <a:cxn ang="0">
+                  <a:pos x="78" y="536"/>
+                </a:cxn>
+                <a:cxn ang="0">
+                  <a:pos x="24" y="634"/>
+                </a:cxn>
+                <a:cxn ang="0">
+                  <a:pos x="24" y="634"/>
+                </a:cxn>
+                <a:cxn ang="0">
+                  <a:pos x="20" y="602"/>
+                </a:cxn>
+                <a:cxn ang="0">
+                  <a:pos x="20" y="590"/>
+                </a:cxn>
+                <a:cxn ang="0">
+                  <a:pos x="22" y="570"/>
+                </a:cxn>
+                <a:cxn ang="0">
+                  <a:pos x="26" y="562"/>
+                </a:cxn>
+                <a:cxn ang="0">
+                  <a:pos x="16" y="562"/>
+                </a:cxn>
+                <a:cxn ang="0">
+                  <a:pos x="8" y="564"/>
+                </a:cxn>
+                <a:cxn ang="0">
+                  <a:pos x="0" y="576"/>
+                </a:cxn>
+                <a:cxn ang="0">
+                  <a:pos x="2" y="596"/>
+                </a:cxn>
+                <a:cxn ang="0">
+                  <a:pos x="2" y="612"/>
+                </a:cxn>
+                <a:cxn ang="0">
+                  <a:pos x="4" y="630"/>
+                </a:cxn>
+                <a:cxn ang="0">
+                  <a:pos x="8" y="642"/>
+                </a:cxn>
+                <a:cxn ang="0">
+                  <a:pos x="8" y="652"/>
+                </a:cxn>
+                <a:cxn ang="0">
+                  <a:pos x="16" y="662"/>
+                </a:cxn>
+                <a:cxn ang="0">
+                  <a:pos x="20" y="664"/>
+                </a:cxn>
+                <a:cxn ang="0">
+                  <a:pos x="26" y="668"/>
+                </a:cxn>
+                <a:cxn ang="0">
+                  <a:pos x="46" y="662"/>
+                </a:cxn>
+                <a:cxn ang="0">
+                  <a:pos x="72" y="646"/>
+                </a:cxn>
+                <a:cxn ang="0">
+                  <a:pos x="94" y="632"/>
+                </a:cxn>
+                <a:cxn ang="0">
+                  <a:pos x="118" y="616"/>
+                </a:cxn>
+                <a:cxn ang="0">
+                  <a:pos x="130" y="610"/>
+                </a:cxn>
+                <a:cxn ang="0">
+                  <a:pos x="138" y="604"/>
+                </a:cxn>
+                <a:cxn ang="0">
+                  <a:pos x="162" y="582"/>
+                </a:cxn>
+                <a:cxn ang="0">
+                  <a:pos x="160" y="578"/>
+                </a:cxn>
+              </a:cxnLst>
+              <a:rect l="0" t="0" r="r" b="b"/>
+              <a:pathLst>
+                <a:path w="162" h="668">
+                  <a:moveTo>
+                    <a:pt x="160" y="578"/>
+                  </a:moveTo>
+                  <a:lnTo>
+                    <a:pt x="160" y="578"/>
+                  </a:lnTo>
+                  <a:lnTo>
+                    <a:pt x="158" y="574"/>
+                  </a:lnTo>
+                  <a:lnTo>
+                    <a:pt x="158" y="574"/>
+                  </a:lnTo>
+                  <a:lnTo>
+                    <a:pt x="156" y="576"/>
+                  </a:lnTo>
+                  <a:lnTo>
+                    <a:pt x="156" y="576"/>
+                  </a:lnTo>
+                  <a:lnTo>
+                    <a:pt x="156" y="576"/>
+                  </a:lnTo>
+                  <a:lnTo>
+                    <a:pt x="156" y="576"/>
+                  </a:lnTo>
+                  <a:lnTo>
+                    <a:pt x="156" y="576"/>
+                  </a:lnTo>
+                  <a:lnTo>
+                    <a:pt x="156" y="576"/>
+                  </a:lnTo>
+                  <a:lnTo>
+                    <a:pt x="154" y="578"/>
+                  </a:lnTo>
+                  <a:lnTo>
+                    <a:pt x="152" y="578"/>
+                  </a:lnTo>
+                  <a:lnTo>
+                    <a:pt x="152" y="578"/>
+                  </a:lnTo>
+                  <a:lnTo>
+                    <a:pt x="136" y="586"/>
+                  </a:lnTo>
+                  <a:lnTo>
+                    <a:pt x="120" y="594"/>
+                  </a:lnTo>
+                  <a:lnTo>
+                    <a:pt x="120" y="594"/>
+                  </a:lnTo>
+                  <a:lnTo>
+                    <a:pt x="102" y="604"/>
+                  </a:lnTo>
+                  <a:lnTo>
+                    <a:pt x="102" y="604"/>
+                  </a:lnTo>
+                  <a:lnTo>
+                    <a:pt x="72" y="624"/>
+                  </a:lnTo>
+                  <a:lnTo>
+                    <a:pt x="72" y="624"/>
+                  </a:lnTo>
+                  <a:lnTo>
+                    <a:pt x="66" y="626"/>
+                  </a:lnTo>
+                  <a:lnTo>
+                    <a:pt x="62" y="630"/>
+                  </a:lnTo>
+                  <a:lnTo>
+                    <a:pt x="62" y="630"/>
+                  </a:lnTo>
+                  <a:lnTo>
+                    <a:pt x="56" y="632"/>
+                  </a:lnTo>
+                  <a:lnTo>
+                    <a:pt x="52" y="636"/>
+                  </a:lnTo>
+                  <a:lnTo>
+                    <a:pt x="52" y="636"/>
+                  </a:lnTo>
+                  <a:lnTo>
+                    <a:pt x="42" y="642"/>
+                  </a:lnTo>
+                  <a:lnTo>
+                    <a:pt x="30" y="650"/>
+                  </a:lnTo>
+                  <a:lnTo>
+                    <a:pt x="30" y="650"/>
+                  </a:lnTo>
+                  <a:lnTo>
+                    <a:pt x="36" y="640"/>
+                  </a:lnTo>
+                  <a:lnTo>
+                    <a:pt x="36" y="640"/>
+                  </a:lnTo>
+                  <a:lnTo>
+                    <a:pt x="58" y="608"/>
+                  </a:lnTo>
+                  <a:lnTo>
+                    <a:pt x="78" y="574"/>
+                  </a:lnTo>
+                  <a:lnTo>
+                    <a:pt x="96" y="538"/>
+                  </a:lnTo>
+                  <a:lnTo>
+                    <a:pt x="112" y="502"/>
+                  </a:lnTo>
+                  <a:lnTo>
+                    <a:pt x="112" y="502"/>
+                  </a:lnTo>
+                  <a:lnTo>
+                    <a:pt x="130" y="460"/>
+                  </a:lnTo>
+                  <a:lnTo>
+                    <a:pt x="142" y="420"/>
+                  </a:lnTo>
+                  <a:lnTo>
+                    <a:pt x="142" y="420"/>
+                  </a:lnTo>
+                  <a:lnTo>
+                    <a:pt x="152" y="382"/>
+                  </a:lnTo>
+                  <a:lnTo>
+                    <a:pt x="158" y="344"/>
+                  </a:lnTo>
+                  <a:lnTo>
+                    <a:pt x="162" y="304"/>
+                  </a:lnTo>
+                  <a:lnTo>
+                    <a:pt x="162" y="266"/>
+                  </a:lnTo>
+                  <a:lnTo>
+                    <a:pt x="162" y="266"/>
+                  </a:lnTo>
+                  <a:lnTo>
+                    <a:pt x="160" y="242"/>
+                  </a:lnTo>
+                  <a:lnTo>
+                    <a:pt x="156" y="216"/>
+                  </a:lnTo>
+                  <a:lnTo>
+                    <a:pt x="156" y="216"/>
+                  </a:lnTo>
+                  <a:lnTo>
+                    <a:pt x="156" y="204"/>
+                  </a:lnTo>
+                  <a:lnTo>
+                    <a:pt x="154" y="190"/>
+                  </a:lnTo>
+                  <a:lnTo>
+                    <a:pt x="154" y="190"/>
+                  </a:lnTo>
+                  <a:lnTo>
+                    <a:pt x="150" y="178"/>
+                  </a:lnTo>
+                  <a:lnTo>
+                    <a:pt x="150" y="178"/>
+                  </a:lnTo>
+                  <a:lnTo>
+                    <a:pt x="146" y="164"/>
+                  </a:lnTo>
+                  <a:lnTo>
+                    <a:pt x="146" y="164"/>
+                  </a:lnTo>
+                  <a:lnTo>
+                    <a:pt x="134" y="128"/>
+                  </a:lnTo>
+                  <a:lnTo>
+                    <a:pt x="118" y="90"/>
+                  </a:lnTo>
+                  <a:lnTo>
+                    <a:pt x="118" y="90"/>
+                  </a:lnTo>
+                  <a:lnTo>
+                    <a:pt x="96" y="54"/>
+                  </a:lnTo>
+                  <a:lnTo>
+                    <a:pt x="74" y="22"/>
+                  </a:lnTo>
+                  <a:lnTo>
+                    <a:pt x="74" y="22"/>
+                  </a:lnTo>
+                  <a:lnTo>
+                    <a:pt x="68" y="12"/>
+                  </a:lnTo>
+                  <a:lnTo>
+                    <a:pt x="60" y="4"/>
+                  </a:lnTo>
+                  <a:lnTo>
+                    <a:pt x="60" y="4"/>
+                  </a:lnTo>
+                  <a:lnTo>
+                    <a:pt x="54" y="0"/>
+                  </a:lnTo>
+                  <a:lnTo>
+                    <a:pt x="52" y="2"/>
+                  </a:lnTo>
+                  <a:lnTo>
+                    <a:pt x="48" y="6"/>
+                  </a:lnTo>
+                  <a:lnTo>
+                    <a:pt x="48" y="6"/>
+                  </a:lnTo>
+                  <a:lnTo>
+                    <a:pt x="48" y="10"/>
+                  </a:lnTo>
+                  <a:lnTo>
+                    <a:pt x="50" y="14"/>
+                  </a:lnTo>
+                  <a:lnTo>
+                    <a:pt x="50" y="14"/>
+                  </a:lnTo>
+                  <a:lnTo>
+                    <a:pt x="54" y="22"/>
+                  </a:lnTo>
+                  <a:lnTo>
+                    <a:pt x="58" y="28"/>
+                  </a:lnTo>
+                  <a:lnTo>
+                    <a:pt x="58" y="28"/>
+                  </a:lnTo>
+                  <a:lnTo>
+                    <a:pt x="66" y="42"/>
+                  </a:lnTo>
+                  <a:lnTo>
+                    <a:pt x="66" y="42"/>
+                  </a:lnTo>
+                  <a:lnTo>
+                    <a:pt x="82" y="70"/>
+                  </a:lnTo>
+                  <a:lnTo>
+                    <a:pt x="100" y="98"/>
+                  </a:lnTo>
+                  <a:lnTo>
+                    <a:pt x="100" y="98"/>
+                  </a:lnTo>
+                  <a:lnTo>
+                    <a:pt x="106" y="110"/>
+                  </a:lnTo>
+                  <a:lnTo>
+                    <a:pt x="110" y="124"/>
+                  </a:lnTo>
+                  <a:lnTo>
+                    <a:pt x="110" y="124"/>
+                  </a:lnTo>
+                  <a:lnTo>
+                    <a:pt x="120" y="148"/>
+                  </a:lnTo>
+                  <a:lnTo>
+                    <a:pt x="128" y="172"/>
+                  </a:lnTo>
+                  <a:lnTo>
+                    <a:pt x="134" y="196"/>
+                  </a:lnTo>
+                  <a:lnTo>
+                    <a:pt x="138" y="220"/>
+                  </a:lnTo>
+                  <a:lnTo>
+                    <a:pt x="138" y="220"/>
+                  </a:lnTo>
+                  <a:lnTo>
+                    <a:pt x="142" y="260"/>
+                  </a:lnTo>
+                  <a:lnTo>
+                    <a:pt x="144" y="284"/>
+                  </a:lnTo>
+                  <a:lnTo>
+                    <a:pt x="142" y="306"/>
+                  </a:lnTo>
+                  <a:lnTo>
+                    <a:pt x="142" y="306"/>
+                  </a:lnTo>
+                  <a:lnTo>
+                    <a:pt x="140" y="326"/>
+                  </a:lnTo>
+                  <a:lnTo>
+                    <a:pt x="140" y="334"/>
+                  </a:lnTo>
+                  <a:lnTo>
+                    <a:pt x="140" y="334"/>
+                  </a:lnTo>
+                  <a:lnTo>
+                    <a:pt x="140" y="340"/>
+                  </a:lnTo>
+                  <a:lnTo>
+                    <a:pt x="138" y="354"/>
+                  </a:lnTo>
+                  <a:lnTo>
+                    <a:pt x="138" y="354"/>
+                  </a:lnTo>
+                  <a:lnTo>
+                    <a:pt x="132" y="380"/>
+                  </a:lnTo>
+                  <a:lnTo>
+                    <a:pt x="132" y="380"/>
+                  </a:lnTo>
+                  <a:lnTo>
+                    <a:pt x="120" y="430"/>
+                  </a:lnTo>
+                  <a:lnTo>
+                    <a:pt x="120" y="430"/>
+                  </a:lnTo>
+                  <a:lnTo>
+                    <a:pt x="114" y="446"/>
+                  </a:lnTo>
+                  <a:lnTo>
+                    <a:pt x="114" y="446"/>
+                  </a:lnTo>
+                  <a:lnTo>
+                    <a:pt x="108" y="462"/>
+                  </a:lnTo>
+                  <a:lnTo>
+                    <a:pt x="108" y="462"/>
+                  </a:lnTo>
+                  <a:lnTo>
+                    <a:pt x="96" y="494"/>
+                  </a:lnTo>
+                  <a:lnTo>
+                    <a:pt x="84" y="522"/>
+                  </a:lnTo>
+                  <a:lnTo>
+                    <a:pt x="84" y="522"/>
+                  </a:lnTo>
+                  <a:lnTo>
+                    <a:pt x="78" y="536"/>
+                  </a:lnTo>
+                  <a:lnTo>
+                    <a:pt x="78" y="536"/>
+                  </a:lnTo>
+                  <a:lnTo>
+                    <a:pt x="52" y="586"/>
+                  </a:lnTo>
+                  <a:lnTo>
+                    <a:pt x="24" y="634"/>
+                  </a:lnTo>
+                  <a:lnTo>
+                    <a:pt x="24" y="634"/>
+                  </a:lnTo>
+                  <a:lnTo>
+                    <a:pt x="24" y="636"/>
+                  </a:lnTo>
+                  <a:lnTo>
+                    <a:pt x="24" y="636"/>
+                  </a:lnTo>
+                  <a:lnTo>
+                    <a:pt x="24" y="634"/>
+                  </a:lnTo>
+                  <a:lnTo>
+                    <a:pt x="24" y="634"/>
+                  </a:lnTo>
+                  <a:lnTo>
+                    <a:pt x="24" y="622"/>
+                  </a:lnTo>
+                  <a:lnTo>
+                    <a:pt x="24" y="622"/>
+                  </a:lnTo>
+                  <a:lnTo>
+                    <a:pt x="20" y="602"/>
+                  </a:lnTo>
+                  <a:lnTo>
+                    <a:pt x="20" y="602"/>
+                  </a:lnTo>
+                  <a:lnTo>
+                    <a:pt x="20" y="598"/>
+                  </a:lnTo>
+                  <a:lnTo>
+                    <a:pt x="20" y="594"/>
+                  </a:lnTo>
+                  <a:lnTo>
+                    <a:pt x="20" y="594"/>
+                  </a:lnTo>
+                  <a:lnTo>
+                    <a:pt x="20" y="590"/>
+                  </a:lnTo>
+                  <a:lnTo>
+                    <a:pt x="20" y="588"/>
+                  </a:lnTo>
+                  <a:lnTo>
+                    <a:pt x="20" y="588"/>
+                  </a:lnTo>
+                  <a:lnTo>
+                    <a:pt x="20" y="576"/>
+                  </a:lnTo>
+                  <a:lnTo>
+                    <a:pt x="22" y="570"/>
+                  </a:lnTo>
+                  <a:lnTo>
+                    <a:pt x="24" y="566"/>
+                  </a:lnTo>
+                  <a:lnTo>
+                    <a:pt x="24" y="566"/>
+                  </a:lnTo>
+                  <a:lnTo>
+                    <a:pt x="26" y="564"/>
+                  </a:lnTo>
+                  <a:lnTo>
+                    <a:pt x="26" y="562"/>
+                  </a:lnTo>
+                  <a:lnTo>
+                    <a:pt x="26" y="562"/>
+                  </a:lnTo>
+                  <a:lnTo>
+                    <a:pt x="22" y="562"/>
+                  </a:lnTo>
+                  <a:lnTo>
+                    <a:pt x="16" y="562"/>
+                  </a:lnTo>
+                  <a:lnTo>
+                    <a:pt x="16" y="562"/>
+                  </a:lnTo>
+                  <a:lnTo>
+                    <a:pt x="12" y="562"/>
+                  </a:lnTo>
+                  <a:lnTo>
+                    <a:pt x="12" y="562"/>
+                  </a:lnTo>
+                  <a:lnTo>
+                    <a:pt x="8" y="564"/>
+                  </a:lnTo>
+                  <a:lnTo>
+                    <a:pt x="8" y="564"/>
+                  </a:lnTo>
+                  <a:lnTo>
+                    <a:pt x="4" y="566"/>
+                  </a:lnTo>
+                  <a:lnTo>
+                    <a:pt x="4" y="566"/>
+                  </a:lnTo>
+                  <a:lnTo>
+                    <a:pt x="2" y="572"/>
+                  </a:lnTo>
+                  <a:lnTo>
+                    <a:pt x="0" y="576"/>
+                  </a:lnTo>
+                  <a:lnTo>
+                    <a:pt x="0" y="576"/>
+                  </a:lnTo>
+                  <a:lnTo>
+                    <a:pt x="0" y="580"/>
+                  </a:lnTo>
+                  <a:lnTo>
+                    <a:pt x="0" y="580"/>
+                  </a:lnTo>
+                  <a:lnTo>
+                    <a:pt x="2" y="596"/>
+                  </a:lnTo>
+                  <a:lnTo>
+                    <a:pt x="2" y="596"/>
+                  </a:lnTo>
+                  <a:lnTo>
+                    <a:pt x="2" y="608"/>
+                  </a:lnTo>
+                  <a:lnTo>
+                    <a:pt x="2" y="608"/>
+                  </a:lnTo>
+                  <a:lnTo>
+                    <a:pt x="2" y="612"/>
+                  </a:lnTo>
+                  <a:lnTo>
+                    <a:pt x="2" y="612"/>
+                  </a:lnTo>
+                  <a:lnTo>
+                    <a:pt x="4" y="628"/>
+                  </a:lnTo>
+                  <a:lnTo>
+                    <a:pt x="4" y="630"/>
+                  </a:lnTo>
+                  <a:lnTo>
+                    <a:pt x="4" y="630"/>
+                  </a:lnTo>
+                  <a:lnTo>
+                    <a:pt x="6" y="632"/>
+                  </a:lnTo>
+                  <a:lnTo>
+                    <a:pt x="6" y="632"/>
+                  </a:lnTo>
+                  <a:lnTo>
+                    <a:pt x="6" y="638"/>
+                  </a:lnTo>
+                  <a:lnTo>
+                    <a:pt x="8" y="642"/>
+                  </a:lnTo>
+                  <a:lnTo>
+                    <a:pt x="8" y="642"/>
+                  </a:lnTo>
+                  <a:lnTo>
+                    <a:pt x="6" y="644"/>
+                  </a:lnTo>
+                  <a:lnTo>
+                    <a:pt x="6" y="644"/>
+                  </a:lnTo>
+                  <a:lnTo>
+                    <a:pt x="8" y="652"/>
+                  </a:lnTo>
+                  <a:lnTo>
+                    <a:pt x="12" y="660"/>
+                  </a:lnTo>
+                  <a:lnTo>
+                    <a:pt x="12" y="660"/>
+                  </a:lnTo>
+                  <a:lnTo>
+                    <a:pt x="16" y="662"/>
+                  </a:lnTo>
+                  <a:lnTo>
+                    <a:pt x="16" y="662"/>
+                  </a:lnTo>
+                  <a:lnTo>
+                    <a:pt x="16" y="664"/>
+                  </a:lnTo>
+                  <a:lnTo>
+                    <a:pt x="16" y="664"/>
+                  </a:lnTo>
+                  <a:lnTo>
+                    <a:pt x="20" y="664"/>
+                  </a:lnTo>
+                  <a:lnTo>
+                    <a:pt x="20" y="664"/>
+                  </a:lnTo>
+                  <a:lnTo>
+                    <a:pt x="22" y="666"/>
+                  </a:lnTo>
+                  <a:lnTo>
+                    <a:pt x="22" y="666"/>
+                  </a:lnTo>
+                  <a:lnTo>
+                    <a:pt x="26" y="668"/>
+                  </a:lnTo>
+                  <a:lnTo>
+                    <a:pt x="26" y="668"/>
+                  </a:lnTo>
+                  <a:lnTo>
+                    <a:pt x="30" y="668"/>
+                  </a:lnTo>
+                  <a:lnTo>
+                    <a:pt x="30" y="668"/>
+                  </a:lnTo>
+                  <a:lnTo>
+                    <a:pt x="40" y="666"/>
+                  </a:lnTo>
+                  <a:lnTo>
+                    <a:pt x="46" y="662"/>
+                  </a:lnTo>
+                  <a:lnTo>
+                    <a:pt x="46" y="662"/>
+                  </a:lnTo>
+                  <a:lnTo>
+                    <a:pt x="52" y="660"/>
+                  </a:lnTo>
+                  <a:lnTo>
+                    <a:pt x="52" y="660"/>
+                  </a:lnTo>
+                  <a:lnTo>
+                    <a:pt x="72" y="646"/>
+                  </a:lnTo>
+                  <a:lnTo>
+                    <a:pt x="72" y="646"/>
+                  </a:lnTo>
+                  <a:lnTo>
+                    <a:pt x="90" y="634"/>
+                  </a:lnTo>
+                  <a:lnTo>
+                    <a:pt x="90" y="634"/>
+                  </a:lnTo>
+                  <a:lnTo>
+                    <a:pt x="94" y="632"/>
+                  </a:lnTo>
+                  <a:lnTo>
+                    <a:pt x="94" y="632"/>
+                  </a:lnTo>
+                  <a:lnTo>
+                    <a:pt x="116" y="618"/>
+                  </a:lnTo>
+                  <a:lnTo>
+                    <a:pt x="116" y="618"/>
+                  </a:lnTo>
+                  <a:lnTo>
+                    <a:pt x="118" y="616"/>
+                  </a:lnTo>
+                  <a:lnTo>
+                    <a:pt x="118" y="616"/>
+                  </a:lnTo>
+                  <a:lnTo>
+                    <a:pt x="122" y="614"/>
+                  </a:lnTo>
+                  <a:lnTo>
+                    <a:pt x="122" y="614"/>
+                  </a:lnTo>
+                  <a:lnTo>
+                    <a:pt x="130" y="610"/>
+                  </a:lnTo>
+                  <a:lnTo>
+                    <a:pt x="136" y="606"/>
+                  </a:lnTo>
+                  <a:lnTo>
+                    <a:pt x="136" y="606"/>
+                  </a:lnTo>
+                  <a:lnTo>
+                    <a:pt x="138" y="604"/>
+                  </a:lnTo>
+                  <a:lnTo>
+                    <a:pt x="138" y="604"/>
+                  </a:lnTo>
+                  <a:lnTo>
+                    <a:pt x="150" y="596"/>
+                  </a:lnTo>
+                  <a:lnTo>
+                    <a:pt x="160" y="588"/>
+                  </a:lnTo>
+                  <a:lnTo>
+                    <a:pt x="160" y="588"/>
+                  </a:lnTo>
+                  <a:lnTo>
+                    <a:pt x="162" y="582"/>
+                  </a:lnTo>
+                  <a:lnTo>
+                    <a:pt x="162" y="582"/>
+                  </a:lnTo>
+                  <a:lnTo>
+                    <a:pt x="162" y="580"/>
+                  </a:lnTo>
+                  <a:lnTo>
+                    <a:pt x="160" y="578"/>
+                  </a:lnTo>
+                  <a:lnTo>
+                    <a:pt x="160" y="578"/>
+                  </a:lnTo>
+                  <a:close/>
+                </a:path>
+              </a:pathLst>
+            </a:custGeom>
             <a:solidFill>
-              <a:schemeClr val="accent3">
-                <a:lumMod val="60000"/>
-                <a:lumOff val="40000"/>
-              </a:schemeClr>
+              <a:srgbClr val="A1EEBD"/>
             </a:solidFill>
-            <a:prstDash val="solid"/>
-            <a:round/>
-            <a:headEnd type="none" w="med" len="med"/>
-            <a:tailEnd type="none" w="med" len="med"/>
-          </a:ln>
-        </p:spPr>
-        <p:txBody>
-          <a:bodyPr vert="horz" wrap="square" lIns="121728" tIns="60864" rIns="121728" bIns="60864" numCol="1" anchor="t" anchorCtr="0" compatLnSpc="1">
-            <a:prstTxWarp prst="textNoShape">
+            <a:ln w="9525" cap="flat" cmpd="sng" algn="ctr">
+              <a:solidFill>
+                <a:srgbClr val="A1EEBD"/>
+              </a:solidFill>
+              <a:prstDash val="solid"/>
+              <a:round/>
+              <a:headEnd type="none" w="med" len="med"/>
+              <a:tailEnd type="none" w="med" len="med"/>
+            </a:ln>
+          </p:spPr>
+          <p:txBody>
+            <a:bodyPr vert="horz" wrap="square" lIns="121728" tIns="60864" rIns="121728" bIns="60864" numCol="1" anchor="t" anchorCtr="0" compatLnSpc="1">
+              <a:prstTxWarp prst="textNoShape">
+                <a:avLst/>
+              </a:prstTxWarp>
+            </a:bodyPr>
+            <a:lstStyle/>
+            <a:p>
+              <a:endParaRPr lang="en-US" sz="2396"/>
+            </a:p>
+          </p:txBody>
+        </p:sp>
+        <p:sp>
+          <p:nvSpPr>
+            <p:cNvPr id="11" name="TextBox 10">
+              <a:extLst>
+                <a:ext uri="{FF2B5EF4-FFF2-40B4-BE49-F238E27FC236}">
+                  <a16:creationId xmlns:a16="http://schemas.microsoft.com/office/drawing/2014/main" id="{C24DAFA3-6D6D-9FC5-5209-10AA387C29C1}"/>
+                </a:ext>
+              </a:extLst>
+            </p:cNvPr>
+            <p:cNvSpPr txBox="1"/>
+            <p:nvPr/>
+          </p:nvSpPr>
+          <p:spPr>
+            <a:xfrm>
+              <a:off x="8518971" y="4539323"/>
+              <a:ext cx="2949581" cy="707886"/>
+            </a:xfrm>
+            <a:prstGeom prst="rect">
               <a:avLst/>
-            </a:prstTxWarp>
-          </a:bodyPr>
-          <a:lstStyle/>
-          <a:p>
-            <a:endParaRPr lang="en-US" sz="2396"/>
-          </a:p>
-        </p:txBody>
-      </p:sp>
-      <p:sp>
-        <p:nvSpPr>
-          <p:cNvPr id="11" name="TextBox 10">
-            <a:extLst>
-              <a:ext uri="{FF2B5EF4-FFF2-40B4-BE49-F238E27FC236}">
-                <a16:creationId xmlns:a16="http://schemas.microsoft.com/office/drawing/2014/main" id="{C24DAFA3-6D6D-9FC5-5209-10AA387C29C1}"/>
-              </a:ext>
-            </a:extLst>
-          </p:cNvPr>
-          <p:cNvSpPr txBox="1"/>
-          <p:nvPr/>
-        </p:nvSpPr>
-        <p:spPr>
-          <a:xfrm>
-            <a:off x="8666451" y="4539323"/>
-            <a:ext cx="2970685" cy="707886"/>
-          </a:xfrm>
-          <a:prstGeom prst="rect">
-            <a:avLst/>
-          </a:prstGeom>
-          <a:noFill/>
-        </p:spPr>
-        <p:txBody>
-          <a:bodyPr wrap="none" rtlCol="0">
-            <a:spAutoFit/>
-          </a:bodyPr>
-          <a:lstStyle/>
-          <a:p>
-            <a:pPr algn="r"/>
-            <a:r>
-              <a:rPr lang="en-US" sz="2000" b="1" dirty="0">
-                <a:highlight>
-                  <a:srgbClr val="47D45A"/>
-                </a:highlight>
-                <a:latin typeface="Apple SD Gothic Neo" panose="02000300000000000000" pitchFamily="2" charset="-127"/>
-                <a:ea typeface="Apple SD Gothic Neo" panose="02000300000000000000" pitchFamily="2" charset="-127"/>
-              </a:rPr>
-              <a:t>Normal images and text </a:t>
-            </a:r>
-            <a:br>
-              <a:rPr lang="en-US" sz="2000" b="1" dirty="0">
-                <a:highlight>
-                  <a:srgbClr val="47D45A"/>
-                </a:highlight>
-                <a:latin typeface="Apple SD Gothic Neo" panose="02000300000000000000" pitchFamily="2" charset="-127"/>
-                <a:ea typeface="Apple SD Gothic Neo" panose="02000300000000000000" pitchFamily="2" charset="-127"/>
-              </a:rPr>
-            </a:br>
-            <a:r>
-              <a:rPr lang="en-US" sz="2000" b="1" dirty="0">
-                <a:highlight>
-                  <a:srgbClr val="47D45A"/>
-                </a:highlight>
-                <a:latin typeface="Apple SD Gothic Neo" panose="02000300000000000000" pitchFamily="2" charset="-127"/>
-                <a:ea typeface="Apple SD Gothic Neo" panose="02000300000000000000" pitchFamily="2" charset="-127"/>
-              </a:rPr>
-              <a:t>remains untouched</a:t>
-            </a:r>
-          </a:p>
-        </p:txBody>
-      </p:sp>
+            </a:prstGeom>
+            <a:noFill/>
+          </p:spPr>
+          <p:txBody>
+            <a:bodyPr wrap="square" rtlCol="0">
+              <a:spAutoFit/>
+            </a:bodyPr>
+            <a:lstStyle/>
+            <a:p>
+              <a:r>
+                <a:rPr lang="en-US" sz="2000" b="1" dirty="0">
+                  <a:highlight>
+                    <a:srgbClr val="A1EEBD"/>
+                  </a:highlight>
+                  <a:latin typeface="Apple SD Gothic Neo" panose="02000300000000000000" pitchFamily="2" charset="-127"/>
+                  <a:ea typeface="Apple SD Gothic Neo" panose="02000300000000000000" pitchFamily="2" charset="-127"/>
+                </a:rPr>
+                <a:t>Normal images and text </a:t>
+              </a:r>
+              <a:br>
+                <a:rPr lang="en-US" sz="2000" b="1" dirty="0">
+                  <a:highlight>
+                    <a:srgbClr val="A1EEBD"/>
+                  </a:highlight>
+                  <a:latin typeface="Apple SD Gothic Neo" panose="02000300000000000000" pitchFamily="2" charset="-127"/>
+                  <a:ea typeface="Apple SD Gothic Neo" panose="02000300000000000000" pitchFamily="2" charset="-127"/>
+                </a:rPr>
+              </a:br>
+              <a:r>
+                <a:rPr lang="en-US" sz="2000" b="1" dirty="0">
+                  <a:highlight>
+                    <a:srgbClr val="A1EEBD"/>
+                  </a:highlight>
+                  <a:latin typeface="Apple SD Gothic Neo" panose="02000300000000000000" pitchFamily="2" charset="-127"/>
+                  <a:ea typeface="Apple SD Gothic Neo" panose="02000300000000000000" pitchFamily="2" charset="-127"/>
+                </a:rPr>
+                <a:t>remains untouched</a:t>
+              </a:r>
+            </a:p>
+          </p:txBody>
+        </p:sp>
+      </p:grpSp>
     </p:spTree>
     <p:extLst>
       <p:ext uri="{BB962C8B-B14F-4D97-AF65-F5344CB8AC3E}">
@@ -5881,10 +5959,10 @@
       </p:graphicFrame>
       <p:pic>
         <p:nvPicPr>
-          <p:cNvPr id="5" name="Picture 4">
+          <p:cNvPr id="2" name="Picture 1">
             <a:extLst>
               <a:ext uri="{FF2B5EF4-FFF2-40B4-BE49-F238E27FC236}">
-                <a16:creationId xmlns:a16="http://schemas.microsoft.com/office/drawing/2014/main" id="{2BDF4414-AEA5-AB79-A8AB-080694B95655}"/>
+                <a16:creationId xmlns:a16="http://schemas.microsoft.com/office/drawing/2014/main" id="{8B2CF4C2-AB2D-8C2D-3018-DFFACB37B9A3}"/>
               </a:ext>
             </a:extLst>
           </p:cNvPr>
@@ -5901,14 +5979,60 @@
         </p:blipFill>
         <p:spPr>
           <a:xfrm>
-            <a:off x="2209800" y="1066703"/>
-            <a:ext cx="7772400" cy="4724593"/>
+            <a:off x="2209801" y="1245371"/>
+            <a:ext cx="7771585" cy="4366800"/>
           </a:xfrm>
           <a:prstGeom prst="rect">
             <a:avLst/>
           </a:prstGeom>
         </p:spPr>
       </p:pic>
+      <p:sp>
+        <p:nvSpPr>
+          <p:cNvPr id="3" name="Rectangle 2">
+            <a:extLst>
+              <a:ext uri="{FF2B5EF4-FFF2-40B4-BE49-F238E27FC236}">
+                <a16:creationId xmlns:a16="http://schemas.microsoft.com/office/drawing/2014/main" id="{70A90B3F-899C-69B3-F1BA-24F3DFAB1A31}"/>
+              </a:ext>
+            </a:extLst>
+          </p:cNvPr>
+          <p:cNvSpPr/>
+          <p:nvPr/>
+        </p:nvSpPr>
+        <p:spPr>
+          <a:xfrm>
+            <a:off x="0" y="1828799"/>
+            <a:ext cx="10958052" cy="6848783"/>
+          </a:xfrm>
+          <a:prstGeom prst="rect">
+            <a:avLst/>
+          </a:prstGeom>
+        </p:spPr>
+        <p:style>
+          <a:lnRef idx="2">
+            <a:schemeClr val="accent1">
+              <a:shade val="15000"/>
+            </a:schemeClr>
+          </a:lnRef>
+          <a:fillRef idx="1">
+            <a:schemeClr val="accent1"/>
+          </a:fillRef>
+          <a:effectRef idx="0">
+            <a:schemeClr val="accent1"/>
+          </a:effectRef>
+          <a:fontRef idx="minor">
+            <a:schemeClr val="lt1"/>
+          </a:fontRef>
+        </p:style>
+        <p:txBody>
+          <a:bodyPr rtlCol="0" anchor="ctr"/>
+          <a:lstStyle/>
+          <a:p>
+            <a:pPr algn="ctr"/>
+            <a:endParaRPr lang="en-US"/>
+          </a:p>
+        </p:txBody>
+      </p:sp>
     </p:spTree>
     <p:extLst>
       <p:ext uri="{BB962C8B-B14F-4D97-AF65-F5344CB8AC3E}">
@@ -5922,8 +6046,413 @@
 </p:sld>
 </file>
 
+<file path=ppt/slides/slide3.xml><?xml version="1.0" encoding="utf-8"?>
+<p:sld xmlns:a="http://schemas.openxmlformats.org/drawingml/2006/main" xmlns:r="http://schemas.openxmlformats.org/officeDocument/2006/relationships" xmlns:p="http://schemas.openxmlformats.org/presentationml/2006/main">
+  <p:cSld>
+    <p:spTree>
+      <p:nvGrpSpPr>
+        <p:cNvPr id="1" name=""/>
+        <p:cNvGrpSpPr/>
+        <p:nvPr/>
+      </p:nvGrpSpPr>
+      <p:grpSpPr>
+        <a:xfrm>
+          <a:off x="0" y="0"/>
+          <a:ext cx="0" cy="0"/>
+          <a:chOff x="0" y="0"/>
+          <a:chExt cx="0" cy="0"/>
+        </a:xfrm>
+      </p:grpSpPr>
+      <p:graphicFrame>
+        <p:nvGraphicFramePr>
+          <p:cNvPr id="5" name="think-cell data - do not delete" hidden="1">
+            <a:extLst>
+              <a:ext uri="{FF2B5EF4-FFF2-40B4-BE49-F238E27FC236}">
+                <a16:creationId xmlns:a16="http://schemas.microsoft.com/office/drawing/2014/main" id="{B52DC9B6-1588-9C4F-CE99-19F7D3001519}"/>
+              </a:ext>
+            </a:extLst>
+          </p:cNvPr>
+          <p:cNvGraphicFramePr>
+            <a:graphicFrameLocks noChangeAspect="1"/>
+          </p:cNvGraphicFramePr>
+          <p:nvPr>
+            <p:custDataLst>
+              <p:tags r:id="rId1"/>
+            </p:custDataLst>
+            <p:extLst>
+              <p:ext uri="{D42A27DB-BD31-4B8C-83A1-F6EECF244321}">
+                <p14:modId xmlns:p14="http://schemas.microsoft.com/office/powerpoint/2010/main" val="1377922936"/>
+              </p:ext>
+            </p:extLst>
+          </p:nvPr>
+        </p:nvGraphicFramePr>
+        <p:xfrm>
+          <a:off x="1588" y="1588"/>
+          <a:ext cx="1227" cy="1588"/>
+        </p:xfrm>
+        <a:graphic>
+          <a:graphicData uri="http://schemas.openxmlformats.org/presentationml/2006/ole">
+            <mc:AlternateContent xmlns:mc="http://schemas.openxmlformats.org/markup-compatibility/2006">
+              <mc:Choice xmlns:v="urn:schemas-microsoft-com:vml" Requires="v">
+                <p:oleObj name="think-cell Slide" r:id="rId3" imgW="7772400" imgH="10058400" progId="TCLayout.ActiveDocument.1">
+                  <p:embed/>
+                </p:oleObj>
+              </mc:Choice>
+              <mc:Fallback>
+                <p:oleObj name="think-cell Slide" r:id="rId3" imgW="7772400" imgH="10058400" progId="TCLayout.ActiveDocument.1">
+                  <p:embed/>
+                  <p:pic>
+                    <p:nvPicPr>
+                      <p:cNvPr id="0" name=""/>
+                      <p:cNvPicPr/>
+                      <p:nvPr/>
+                    </p:nvPicPr>
+                    <p:blipFill>
+                      <a:blip r:embed="rId4"/>
+                      <a:stretch>
+                        <a:fillRect/>
+                      </a:stretch>
+                    </p:blipFill>
+                    <p:spPr>
+                      <a:xfrm>
+                        <a:off x="1588" y="1588"/>
+                        <a:ext cx="1227" cy="1588"/>
+                      </a:xfrm>
+                      <a:prstGeom prst="rect">
+                        <a:avLst/>
+                      </a:prstGeom>
+                    </p:spPr>
+                  </p:pic>
+                </p:oleObj>
+              </mc:Fallback>
+            </mc:AlternateContent>
+          </a:graphicData>
+        </a:graphic>
+      </p:graphicFrame>
+      <p:sp>
+        <p:nvSpPr>
+          <p:cNvPr id="4" name="AutoShape 2">
+            <a:extLst>
+              <a:ext uri="{FF2B5EF4-FFF2-40B4-BE49-F238E27FC236}">
+                <a16:creationId xmlns:a16="http://schemas.microsoft.com/office/drawing/2014/main" id="{9124CBD0-F40C-D771-28F5-7FA9FAC6717A}"/>
+              </a:ext>
+            </a:extLst>
+          </p:cNvPr>
+          <p:cNvSpPr>
+            <a:spLocks noChangeAspect="1" noChangeArrowheads="1"/>
+          </p:cNvSpPr>
+          <p:nvPr/>
+        </p:nvSpPr>
+        <p:spPr bwMode="auto">
+          <a:xfrm>
+            <a:off x="5943600" y="3276600"/>
+            <a:ext cx="304800" cy="304800"/>
+          </a:xfrm>
+          <a:prstGeom prst="rect">
+            <a:avLst/>
+          </a:prstGeom>
+          <a:noFill/>
+          <a:extLst>
+            <a:ext uri="{909E8E84-426E-40DD-AFC4-6F175D3DCCD1}">
+              <a14:hiddenFill xmlns:a14="http://schemas.microsoft.com/office/drawing/2010/main">
+                <a:solidFill>
+                  <a:srgbClr val="FFFFFF"/>
+                </a:solidFill>
+              </a14:hiddenFill>
+            </a:ext>
+          </a:extLst>
+        </p:spPr>
+        <p:txBody>
+          <a:bodyPr vert="horz" wrap="square" lIns="91440" tIns="45720" rIns="91440" bIns="45720" numCol="1" anchor="t" anchorCtr="0" compatLnSpc="1">
+            <a:prstTxWarp prst="textNoShape">
+              <a:avLst/>
+            </a:prstTxWarp>
+          </a:bodyPr>
+          <a:lstStyle/>
+          <a:p>
+            <a:endParaRPr lang="en-US"/>
+          </a:p>
+        </p:txBody>
+      </p:sp>
+      <p:pic>
+        <p:nvPicPr>
+          <p:cNvPr id="6" name="Picture 5">
+            <a:extLst>
+              <a:ext uri="{FF2B5EF4-FFF2-40B4-BE49-F238E27FC236}">
+                <a16:creationId xmlns:a16="http://schemas.microsoft.com/office/drawing/2014/main" id="{E4B1F397-94DA-A2A1-F31A-18C77AD43109}"/>
+              </a:ext>
+            </a:extLst>
+          </p:cNvPr>
+          <p:cNvPicPr>
+            <a:picLocks noChangeAspect="1"/>
+          </p:cNvPicPr>
+          <p:nvPr/>
+        </p:nvPicPr>
+        <p:blipFill>
+          <a:blip r:embed="rId5"/>
+          <a:stretch>
+            <a:fillRect/>
+          </a:stretch>
+        </p:blipFill>
+        <p:spPr>
+          <a:xfrm>
+            <a:off x="2844800" y="177800"/>
+            <a:ext cx="6502400" cy="6502400"/>
+          </a:xfrm>
+          <a:prstGeom prst="rect">
+            <a:avLst/>
+          </a:prstGeom>
+        </p:spPr>
+      </p:pic>
+      <p:grpSp>
+        <p:nvGrpSpPr>
+          <p:cNvPr id="7" name="Group 6">
+            <a:extLst>
+              <a:ext uri="{FF2B5EF4-FFF2-40B4-BE49-F238E27FC236}">
+                <a16:creationId xmlns:a16="http://schemas.microsoft.com/office/drawing/2014/main" id="{714BBDF0-0BDE-59EA-BB34-BDE050CF1B07}"/>
+              </a:ext>
+            </a:extLst>
+          </p:cNvPr>
+          <p:cNvGrpSpPr>
+            <a:grpSpLocks noChangeAspect="1"/>
+          </p:cNvGrpSpPr>
+          <p:nvPr/>
+        </p:nvGrpSpPr>
+        <p:grpSpPr>
+          <a:xfrm>
+            <a:off x="4721914" y="2054914"/>
+            <a:ext cx="2748171" cy="2748171"/>
+            <a:chOff x="5961063" y="3294063"/>
+            <a:chExt cx="269875" cy="269875"/>
+          </a:xfrm>
+        </p:grpSpPr>
+        <p:sp>
+          <p:nvSpPr>
+            <p:cNvPr id="8" name="Oval 18">
+              <a:extLst>
+                <a:ext uri="{FF2B5EF4-FFF2-40B4-BE49-F238E27FC236}">
+                  <a16:creationId xmlns:a16="http://schemas.microsoft.com/office/drawing/2014/main" id="{623C62E4-4BC1-8E4C-3CE2-DED0EE09AF58}"/>
+                </a:ext>
+              </a:extLst>
+            </p:cNvPr>
+            <p:cNvSpPr>
+              <a:spLocks noChangeArrowheads="1"/>
+            </p:cNvSpPr>
+            <p:nvPr/>
+          </p:nvSpPr>
+          <p:spPr bwMode="auto">
+            <a:xfrm>
+              <a:off x="5961063" y="3294063"/>
+              <a:ext cx="269875" cy="269875"/>
+            </a:xfrm>
+            <a:prstGeom prst="ellipse">
+              <a:avLst/>
+            </a:prstGeom>
+            <a:noFill/>
+            <a:ln w="9525" cap="flat" cmpd="sng" algn="ctr">
+              <a:solidFill>
+                <a:srgbClr val="E71C57"/>
+              </a:solidFill>
+              <a:prstDash val="solid"/>
+              <a:round/>
+              <a:headEnd type="none" w="med" len="med"/>
+              <a:tailEnd type="none" w="med" len="med"/>
+            </a:ln>
+            <a:extLst>
+              <a:ext uri="{909E8E84-426E-40DD-AFC4-6F175D3DCCD1}">
+                <a14:hiddenFill xmlns:a14="http://schemas.microsoft.com/office/drawing/2010/main">
+                  <a:solidFill>
+                    <a:schemeClr val="bg1"/>
+                  </a:solidFill>
+                </a14:hiddenFill>
+              </a:ext>
+            </a:extLst>
+          </p:spPr>
+          <p:txBody>
+            <a:bodyPr vert="horz" wrap="square" lIns="91440" tIns="45720" rIns="91440" bIns="45720" numCol="1" anchor="t" anchorCtr="0" compatLnSpc="1">
+              <a:prstTxWarp prst="textNoShape">
+                <a:avLst/>
+              </a:prstTxWarp>
+            </a:bodyPr>
+            <a:lstStyle/>
+            <a:p>
+              <a:endParaRPr lang="en-US" dirty="0"/>
+            </a:p>
+          </p:txBody>
+        </p:sp>
+        <p:sp>
+          <p:nvSpPr>
+            <p:cNvPr id="9" name="Freeform 19">
+              <a:extLst>
+                <a:ext uri="{FF2B5EF4-FFF2-40B4-BE49-F238E27FC236}">
+                  <a16:creationId xmlns:a16="http://schemas.microsoft.com/office/drawing/2014/main" id="{E90814C7-1FB8-9994-0790-492B5249D6EF}"/>
+                </a:ext>
+              </a:extLst>
+            </p:cNvPr>
+            <p:cNvSpPr>
+              <a:spLocks/>
+            </p:cNvSpPr>
+            <p:nvPr/>
+          </p:nvSpPr>
+          <p:spPr bwMode="auto">
+            <a:xfrm>
+              <a:off x="6040438" y="3373438"/>
+              <a:ext cx="111125" cy="111125"/>
+            </a:xfrm>
+            <a:custGeom>
+              <a:avLst/>
+              <a:gdLst>
+                <a:gd name="T0" fmla="*/ 63 w 70"/>
+                <a:gd name="T1" fmla="*/ 0 h 70"/>
+                <a:gd name="T2" fmla="*/ 35 w 70"/>
+                <a:gd name="T3" fmla="*/ 29 h 70"/>
+                <a:gd name="T4" fmla="*/ 6 w 70"/>
+                <a:gd name="T5" fmla="*/ 0 h 70"/>
+                <a:gd name="T6" fmla="*/ 0 w 70"/>
+                <a:gd name="T7" fmla="*/ 6 h 70"/>
+                <a:gd name="T8" fmla="*/ 28 w 70"/>
+                <a:gd name="T9" fmla="*/ 35 h 70"/>
+                <a:gd name="T10" fmla="*/ 0 w 70"/>
+                <a:gd name="T11" fmla="*/ 63 h 70"/>
+                <a:gd name="T12" fmla="*/ 6 w 70"/>
+                <a:gd name="T13" fmla="*/ 70 h 70"/>
+                <a:gd name="T14" fmla="*/ 35 w 70"/>
+                <a:gd name="T15" fmla="*/ 41 h 70"/>
+                <a:gd name="T16" fmla="*/ 63 w 70"/>
+                <a:gd name="T17" fmla="*/ 70 h 70"/>
+                <a:gd name="T18" fmla="*/ 70 w 70"/>
+                <a:gd name="T19" fmla="*/ 63 h 70"/>
+                <a:gd name="T20" fmla="*/ 41 w 70"/>
+                <a:gd name="T21" fmla="*/ 35 h 70"/>
+                <a:gd name="T22" fmla="*/ 70 w 70"/>
+                <a:gd name="T23" fmla="*/ 6 h 70"/>
+                <a:gd name="T24" fmla="*/ 63 w 70"/>
+                <a:gd name="T25" fmla="*/ 0 h 70"/>
+              </a:gdLst>
+              <a:ahLst/>
+              <a:cxnLst>
+                <a:cxn ang="0">
+                  <a:pos x="T0" y="T1"/>
+                </a:cxn>
+                <a:cxn ang="0">
+                  <a:pos x="T2" y="T3"/>
+                </a:cxn>
+                <a:cxn ang="0">
+                  <a:pos x="T4" y="T5"/>
+                </a:cxn>
+                <a:cxn ang="0">
+                  <a:pos x="T6" y="T7"/>
+                </a:cxn>
+                <a:cxn ang="0">
+                  <a:pos x="T8" y="T9"/>
+                </a:cxn>
+                <a:cxn ang="0">
+                  <a:pos x="T10" y="T11"/>
+                </a:cxn>
+                <a:cxn ang="0">
+                  <a:pos x="T12" y="T13"/>
+                </a:cxn>
+                <a:cxn ang="0">
+                  <a:pos x="T14" y="T15"/>
+                </a:cxn>
+                <a:cxn ang="0">
+                  <a:pos x="T16" y="T17"/>
+                </a:cxn>
+                <a:cxn ang="0">
+                  <a:pos x="T18" y="T19"/>
+                </a:cxn>
+                <a:cxn ang="0">
+                  <a:pos x="T20" y="T21"/>
+                </a:cxn>
+                <a:cxn ang="0">
+                  <a:pos x="T22" y="T23"/>
+                </a:cxn>
+                <a:cxn ang="0">
+                  <a:pos x="T24" y="T25"/>
+                </a:cxn>
+              </a:cxnLst>
+              <a:rect l="0" t="0" r="r" b="b"/>
+              <a:pathLst>
+                <a:path w="70" h="70">
+                  <a:moveTo>
+                    <a:pt x="63" y="0"/>
+                  </a:moveTo>
+                  <a:lnTo>
+                    <a:pt x="35" y="29"/>
+                  </a:lnTo>
+                  <a:lnTo>
+                    <a:pt x="6" y="0"/>
+                  </a:lnTo>
+                  <a:lnTo>
+                    <a:pt x="0" y="6"/>
+                  </a:lnTo>
+                  <a:lnTo>
+                    <a:pt x="28" y="35"/>
+                  </a:lnTo>
+                  <a:lnTo>
+                    <a:pt x="0" y="63"/>
+                  </a:lnTo>
+                  <a:lnTo>
+                    <a:pt x="6" y="70"/>
+                  </a:lnTo>
+                  <a:lnTo>
+                    <a:pt x="35" y="41"/>
+                  </a:lnTo>
+                  <a:lnTo>
+                    <a:pt x="63" y="70"/>
+                  </a:lnTo>
+                  <a:lnTo>
+                    <a:pt x="70" y="63"/>
+                  </a:lnTo>
+                  <a:lnTo>
+                    <a:pt x="41" y="35"/>
+                  </a:lnTo>
+                  <a:lnTo>
+                    <a:pt x="70" y="6"/>
+                  </a:lnTo>
+                  <a:lnTo>
+                    <a:pt x="63" y="0"/>
+                  </a:lnTo>
+                  <a:close/>
+                </a:path>
+              </a:pathLst>
+            </a:custGeom>
+            <a:solidFill>
+              <a:srgbClr val="E71C57"/>
+            </a:solidFill>
+            <a:ln>
+              <a:noFill/>
+            </a:ln>
+          </p:spPr>
+          <p:txBody>
+            <a:bodyPr vert="horz" wrap="square" lIns="91440" tIns="45720" rIns="91440" bIns="45720" numCol="1" anchor="t" anchorCtr="0" compatLnSpc="1">
+              <a:prstTxWarp prst="textNoShape">
+                <a:avLst/>
+              </a:prstTxWarp>
+            </a:bodyPr>
+            <a:lstStyle/>
+            <a:p>
+              <a:endParaRPr lang="en-US" dirty="0"/>
+            </a:p>
+          </p:txBody>
+        </p:sp>
+      </p:grpSp>
+    </p:spTree>
+    <p:extLst>
+      <p:ext uri="{BB962C8B-B14F-4D97-AF65-F5344CB8AC3E}">
+        <p14:creationId xmlns:p14="http://schemas.microsoft.com/office/powerpoint/2010/main" val="1685002227"/>
+      </p:ext>
+    </p:extLst>
+  </p:cSld>
+  <p:clrMapOvr>
+    <a:masterClrMapping/>
+  </p:clrMapOvr>
+</p:sld>
+</file>
+
 <file path=ppt/tags/tag1.xml><?xml version="1.0" encoding="utf-8"?>
 <p:tagLst xmlns:a="http://schemas.openxmlformats.org/drawingml/2006/main" xmlns:r="http://schemas.openxmlformats.org/officeDocument/2006/relationships" xmlns:p="http://schemas.openxmlformats.org/presentationml/2006/main">
+  <p:tag name="EE4P_STYLE_ID" val="39dcc26a-7131-49f4-a9eb-1c0521500c03"/>
   <p:tag name="THINKCELLUNDODONOTDELETE" val="0"/>
 </p:tagLst>
 </file>
@@ -5941,6 +6470,12 @@
 </file>
 
 <file path=ppt/tags/tag4.xml><?xml version="1.0" encoding="utf-8"?>
+<p:tagLst xmlns:a="http://schemas.openxmlformats.org/drawingml/2006/main" xmlns:r="http://schemas.openxmlformats.org/officeDocument/2006/relationships" xmlns:p="http://schemas.openxmlformats.org/presentationml/2006/main">
+  <p:tag name="THINKCELLSHAPEDONOTDELETE" val="thinkcellActiveDocDoNotDelete"/>
+</p:tagLst>
+</file>
+
+<file path=ppt/tags/tag5.xml><?xml version="1.0" encoding="utf-8"?>
 <p:tagLst xmlns:a="http://schemas.openxmlformats.org/drawingml/2006/main" xmlns:r="http://schemas.openxmlformats.org/officeDocument/2006/relationships" xmlns:p="http://schemas.openxmlformats.org/presentationml/2006/main">
   <p:tag name="THINKCELLSHAPEDONOTDELETE" val="thinkcellActiveDocDoNotDelete"/>
 </p:tagLst>
